--- a/docs/6_presentation/presentation.pptx
+++ b/docs/6_presentation/presentation.pptx
@@ -20,10 +20,6 @@
     <p:sldId id="268" r:id="rId20"/>
     <p:sldId id="269" r:id="rId21"/>
     <p:sldId id="270" r:id="rId22"/>
-    <p:sldId id="271" r:id="rId23"/>
-    <p:sldId id="272" r:id="rId24"/>
-    <p:sldId id="273" r:id="rId25"/>
-    <p:sldId id="274" r:id="rId26"/>
   </p:sldIdLst>
   <p:sldSz cx="12191695" cy="6858000" type="screen4x3"/>
   <p:notesSz cx="6858000" cy="9144000"/>
@@ -520,7 +516,7 @@
           <a:lstStyle/>
           <a:p>
             <a:r>
-              <a:t>Good [morning/afternoon]. Thank you for having me. Today I'm presenting my capstone project: a standalone programming exercise platform for the university, built to replace a fragile legacy system. This talk has two halves. First, the platform itself — what it does and why it matters. Second, and this is the part I want you to pay close attention to — how it was built. I used an AI coding agent, but not by simply chatting with it. I'll show you a real, failed first attempt at 'vibe coding' this system, and the disciplined process I built afterward that actually worked — with concrete evidence pulled straight from the project's own commit history. Let's start with the problem.</a:t>
+              <a:t>Good [morning/afternoon]. Thank you for coming. Today I will show a new platform for programming exercises. It lets tutors run and manage exercises on their own. I will focus on what the system does. At the end I will show how it was built.</a:t>
             </a:r>
           </a:p>
         </p:txBody>
@@ -590,7 +586,7 @@
           <a:lstStyle/>
           <a:p>
             <a:r>
-              <a:t>Here's the process that replaced the Telegram experiment. Every feature starts with a brainstorming conversation, then a written design doc, then an implementation plan that breaks the work into small tasks. Each task gets its own brief, gets implemented test-first, and gets reviewed before anything merges. The critical property here is that every single step leaves behind a durable, checkable artifact — a doc, a plan, a test result, a review verdict. Nothing is just 'trust me, it's done.' This directly answers the failure mode from the Telegram phase: every agent decision now has a checkpoint, a spec to be judged against, and a review gate before it can merge.</a:t>
+              <a:t>Two smaller pieces to round this out. First, the super admin manages user accounts. They can create accounts. They can also disable a user. A disabled user is locked out at once, on the next request. Second, monitoring. Grafana shows the live health of the system. If something breaks, an alert fires. So the platform is easy to keep healthy in production.</a:t>
             </a:r>
           </a:p>
         </p:txBody>
@@ -660,7 +656,7 @@
           <a:lstStyle/>
           <a:p>
             <a:r>
-              <a:t>Let me make this concrete with a real example, not a hypothetical. There was a bug where the tutor submissions page had an 'All sources' filter option, but the backend endpoint had defaultValue equals IMPORT on the source parameter — which meant Spring silently rewrote both a missing parameter and an explicitly empty one back to 'IMPORT'. So 'All sources' silently only ever showed imported submissions. The fix followed the exact pipeline I just described: a short design doc pinned down the bug, an implementation plan broke it into one task, a test was written first that failed for the right reason — confirmed failing on the current code — then the one-line fix went in, the test passed, and it was committed. That whole chain is preserved in this project's own docs and git history, it's not a story I'm reconstructing after the fact.</a:t>
+              <a:t>Now, briefly, how it was built. This is the process that replaced the chat experiment. Every feature followed the same steps. We brainstorm. We write a design. We write a plan. We write code with tests first. We review. Then we deploy. Each step leaves a record you can check later. This is the key. Every AI decision has a checkpoint. And every change passes a review gate before it merges. That is what made the AI reliable.</a:t>
             </a:r>
           </a:p>
         </p:txBody>
@@ -730,7 +726,7 @@
           <a:lstStyle/>
           <a:p>
             <a:r>
-              <a:t>Zooming into one piece of that pipeline: how implementation tasks actually get handed to the agent. Each task in a plan gets its own brief — exactly which files to touch, what interfaces it must respect, and step-by-step TDD instructions. The implementer's job isn't just to write code, it's to come back with evidence: run the test, show it fails for the right reason, that's the RED step; make it pass, that's GREEN; then commit. The task report documents both, plus the actual commit hash. This is what makes 'it's done' a verifiable claim instead of a trust exercise.</a:t>
+              <a:t>So who did what? The AI wrote almost all of the code. It followed my specs and my tests. It ran the test steps and the automated review. But the important work was mine. I found the real OLE problems. I wrote the requirements. I made the permanent calls, like one server and no hard deletes. I reviewed and approved every merge. And I owned what shipped. The point is this. Writing code is easy now. Deciding what to build and being accountable is the real work.</a:t>
             </a:r>
           </a:p>
         </p:txBody>
@@ -800,7 +796,7 @@
           <a:lstStyle/>
           <a:p>
             <a:r>
-              <a:t>Every task's diff then goes through a review pass, findings graded Critical, Important, or Minor. Before a whole feature branch merges, there's one more full-branch review. Here's the example I'm proudest of finding in this project's own history: during one feature, the agent's own re-review of a concurrency fix caught a real race condition — a flush-ordering issue nobody had specifically asked it to look for — fixed it, and added a regression test proving the fix. Nobody prompted 'go find a concurrency bug.' The review step itself surfaced it. That's the review gate actually doing its job, not just rubber-stamping.</a:t>
+              <a:t>What did this produce? A working, deployed platform that fixes the OLE pain points. The numbers: 457 commits. Over 330 backend tests and over 280 frontend tests. They were all green at every merge. An honest lesson. The process has a cost. It slows down small changes. But it catches bugs before they ship. For future work: likes, profiles, and Python exercises. The bigger idea is this. A disciplined process makes AI-built software safe to deploy.</a:t>
             </a:r>
           </a:p>
         </p:txBody>
@@ -870,7 +866,7 @@
           <a:lstStyle/>
           <a:p>
             <a:r>
-              <a:t>So given all that automation, what was actually left for me to do? Concretely: the agent wrote effectively all of the implementation code — every commit in this repository is co-authored by Claude. My part was different in kind, not just in degree. I identified the real problem, because I'm the one who knows firsthand how OLE actually fails. I wrote the requirements — the personas, the acceptance criteria, the edge cases. I made the calls that can't be walked back: single-server architecture, no Redis or Kafka, immutable versioning, soft-deletes only. I designed this whole pipeline you've been looking at for the last few slides. And critically, I resolved the judgment calls the agent could surface but not decide. Here's a real one: mid-implementation, the agent flagged that an old test assumed a field — batch_id — gets nulled out when a batch is deleted. That assumption stopped being valid once deletion became soft-delete instead of hard-delete. The agent could see the conflict, it could not decide which behavior was correct going forward. I decided: keep the field intact. The spec got corrected to match — that's commit efd8854. That's the shape of my contribution: not typing the code, but making the calls nothing else in this pipeline could make.</a:t>
+              <a:t>Thank you. I am happy to take questions.</a:t>
             </a:r>
           </a:p>
         </p:txBody>
@@ -940,287 +936,7 @@
           <a:lstStyle/>
           <a:p>
             <a:r>
-              <a:t>Pulling this together into eight points, because I think this is the actual generalizable lesson of this capstone. One: I stayed deeply involved in every ambiguous decision, I didn't just accept output. Two: the project's constraints file was actively maintained as ground truth — for example, a sandbox execution limit got corrected from 500 thousand to 5 million bytecode operations after real testing showed the original number was simply wrong, that's commit 7b47312. Three: explicit hard constraints — no hard deletes, no skipping validation, no skipping the process itself — remove entire categories of mistakes structurally, instead of hoping the agent chooses well. Four: features are broken into small tasks, so one wrong call stays local instead of compounding. Five: TDD evidence is required at every single checkpoint, not a trusted 'done.' Six: review is layered — every task, then the whole branch. Seven: there's a durable audit trail — a progress ledger, design docs, task reports — so nothing depends on anyone's memory. Eight: everything gets verified against the actual deployed system, not just green tests in isolation. None of these eight is exotic on its own. What made the difference is that together, they mean the agent's high-but-imperfect accuracy per decision never gets the chance to compound into the kind of divergence I showed you back in the Telegram phase.</a:t>
-            </a:r>
-          </a:p>
-        </p:txBody>
-      </p:sp>
-      <p:sp>
-        <p:nvSpPr>
-          <p:cNvPr id="4" name="Slide Number Placeholder 3"/>
-          <p:cNvSpPr>
-            <a:spLocks noGrp="1"/>
-          </p:cNvSpPr>
-          <p:nvPr>
-            <p:ph type="sldNum" idx="5" sz="quarter"/>
-          </p:nvPr>
-        </p:nvSpPr>
-        <p:spPr/>
-      </p:sp>
-    </p:spTree>
-  </p:cSld>
-  <p:clrMapOvr>
-    <a:masterClrMapping/>
-  </p:clrMapOvr>
-</p:notes>
-</file>
-
-<file path=ppt/notesSlides/notesSlide16.xml><?xml version="1.0" encoding="utf-8"?>
-<p:notes xmlns:a="http://schemas.openxmlformats.org/drawingml/2006/main" xmlns:p="http://schemas.openxmlformats.org/presentationml/2006/main" xmlns:r="http://schemas.openxmlformats.org/officeDocument/2006/relationships">
-  <p:cSld>
-    <p:spTree>
-      <p:nvGrpSpPr>
-        <p:cNvPr id="1" name=""/>
-        <p:cNvGrpSpPr/>
-        <p:nvPr/>
-      </p:nvGrpSpPr>
-      <p:grpSpPr>
-        <a:xfrm>
-          <a:off x="0" y="0"/>
-          <a:ext cx="0" cy="0"/>
-          <a:chOff x="0" y="0"/>
-          <a:chExt cx="0" cy="0"/>
-        </a:xfrm>
-      </p:grpSpPr>
-      <p:sp>
-        <p:nvSpPr>
-          <p:cNvPr id="2" name="Slide Image Placeholder 1"/>
-          <p:cNvSpPr>
-            <a:spLocks noGrp="1"/>
-          </p:cNvSpPr>
-          <p:nvPr>
-            <p:ph type="sldImg" idx="2"/>
-          </p:nvPr>
-        </p:nvSpPr>
-        <p:spPr/>
-      </p:sp>
-      <p:sp>
-        <p:nvSpPr>
-          <p:cNvPr id="3" name="Notes Placeholder 2"/>
-          <p:cNvSpPr>
-            <a:spLocks noGrp="1"/>
-          </p:cNvSpPr>
-          <p:nvPr>
-            <p:ph type="body" idx="3" sz="quarter"/>
-          </p:nvPr>
-        </p:nvSpPr>
-        <p:spPr/>
-        <p:txBody>
-          <a:bodyPr/>
-          <a:lstStyle/>
-          <a:p>
-            <a:r>
-              <a:t>What did this actually produce? 457 commits across the project's history. Over 330 backend tests and over 280 frontend tests, all green, at every single merge gate — not just at the end. Every feature branch went through this pipeline and came out independently reviewed as ready to merge. This isn't a toy demo — it's the actual development history of a system running in production for the university right now.</a:t>
-            </a:r>
-          </a:p>
-        </p:txBody>
-      </p:sp>
-      <p:sp>
-        <p:nvSpPr>
-          <p:cNvPr id="4" name="Slide Number Placeholder 3"/>
-          <p:cNvSpPr>
-            <a:spLocks noGrp="1"/>
-          </p:cNvSpPr>
-          <p:nvPr>
-            <p:ph type="sldNum" idx="5" sz="quarter"/>
-          </p:nvPr>
-        </p:nvSpPr>
-        <p:spPr/>
-      </p:sp>
-    </p:spTree>
-  </p:cSld>
-  <p:clrMapOvr>
-    <a:masterClrMapping/>
-  </p:clrMapOvr>
-</p:notes>
-</file>
-
-<file path=ppt/notesSlides/notesSlide17.xml><?xml version="1.0" encoding="utf-8"?>
-<p:notes xmlns:a="http://schemas.openxmlformats.org/drawingml/2006/main" xmlns:p="http://schemas.openxmlformats.org/presentationml/2006/main" xmlns:r="http://schemas.openxmlformats.org/officeDocument/2006/relationships">
-  <p:cSld>
-    <p:spTree>
-      <p:nvGrpSpPr>
-        <p:cNvPr id="1" name=""/>
-        <p:cNvGrpSpPr/>
-        <p:nvPr/>
-      </p:nvGrpSpPr>
-      <p:grpSpPr>
-        <a:xfrm>
-          <a:off x="0" y="0"/>
-          <a:ext cx="0" cy="0"/>
-          <a:chOff x="0" y="0"/>
-          <a:chExt cx="0" cy="0"/>
-        </a:xfrm>
-      </p:grpSpPr>
-      <p:sp>
-        <p:nvSpPr>
-          <p:cNvPr id="2" name="Slide Image Placeholder 1"/>
-          <p:cNvSpPr>
-            <a:spLocks noGrp="1"/>
-          </p:cNvSpPr>
-          <p:nvPr>
-            <p:ph type="sldImg" idx="2"/>
-          </p:nvPr>
-        </p:nvSpPr>
-        <p:spPr/>
-      </p:sp>
-      <p:sp>
-        <p:nvSpPr>
-          <p:cNvPr id="3" name="Notes Placeholder 2"/>
-          <p:cNvSpPr>
-            <a:spLocks noGrp="1"/>
-          </p:cNvSpPr>
-          <p:nvPr>
-            <p:ph type="body" idx="3" sz="quarter"/>
-          </p:nvPr>
-        </p:nvSpPr>
-        <p:spPr/>
-        <p:txBody>
-          <a:bodyPr/>
-          <a:lstStyle/>
-          <a:p>
-            <a:r>
-              <a:t>I want to be honest about the limits of this, too. The disciplined process didn't make the agent perfect — the concurrency bug I mentioned earlier still happened. What the process did was catch it before it shipped, not prevent it from occurring in the first place. There's also real overhead: requiring a design doc, a plan, TDD evidence, and layered review for every change is slower than just asking for a quick fix — and that's a deliberate tradeoff, the human being in the loop is a feature of this model, not friction to be optimized away. And honestly, knowing which decisions are the ones that genuinely need a human judgment call — versus which ones are safe to leave to the agent — is itself a skill I had to build over the course of this project, not something I started with.</a:t>
-            </a:r>
-          </a:p>
-        </p:txBody>
-      </p:sp>
-      <p:sp>
-        <p:nvSpPr>
-          <p:cNvPr id="4" name="Slide Number Placeholder 3"/>
-          <p:cNvSpPr>
-            <a:spLocks noGrp="1"/>
-          </p:cNvSpPr>
-          <p:nvPr>
-            <p:ph type="sldNum" idx="5" sz="quarter"/>
-          </p:nvPr>
-        </p:nvSpPr>
-        <p:spPr/>
-      </p:sp>
-    </p:spTree>
-  </p:cSld>
-  <p:clrMapOvr>
-    <a:masterClrMapping/>
-  </p:clrMapOvr>
-</p:notes>
-</file>
-
-<file path=ppt/notesSlides/notesSlide18.xml><?xml version="1.0" encoding="utf-8"?>
-<p:notes xmlns:a="http://schemas.openxmlformats.org/drawingml/2006/main" xmlns:p="http://schemas.openxmlformats.org/presentationml/2006/main" xmlns:r="http://schemas.openxmlformats.org/officeDocument/2006/relationships">
-  <p:cSld>
-    <p:spTree>
-      <p:nvGrpSpPr>
-        <p:cNvPr id="1" name=""/>
-        <p:cNvGrpSpPr/>
-        <p:nvPr/>
-      </p:nvGrpSpPr>
-      <p:grpSpPr>
-        <a:xfrm>
-          <a:off x="0" y="0"/>
-          <a:ext cx="0" cy="0"/>
-          <a:chOff x="0" y="0"/>
-          <a:chExt cx="0" cy="0"/>
-        </a:xfrm>
-      </p:grpSpPr>
-      <p:sp>
-        <p:nvSpPr>
-          <p:cNvPr id="2" name="Slide Image Placeholder 1"/>
-          <p:cNvSpPr>
-            <a:spLocks noGrp="1"/>
-          </p:cNvSpPr>
-          <p:nvPr>
-            <p:ph type="sldImg" idx="2"/>
-          </p:nvPr>
-        </p:nvSpPr>
-        <p:spPr/>
-      </p:sp>
-      <p:sp>
-        <p:nvSpPr>
-          <p:cNvPr id="3" name="Notes Placeholder 2"/>
-          <p:cNvSpPr>
-            <a:spLocks noGrp="1"/>
-          </p:cNvSpPr>
-          <p:nvPr>
-            <p:ph type="body" idx="3" sz="quarter"/>
-          </p:nvPr>
-        </p:nvSpPr>
-        <p:spPr/>
-        <p:txBody>
-          <a:bodyPr/>
-          <a:lstStyle/>
-          <a:p>
-            <a:r>
-              <a:t>Looking forward: there are still Phase 2 features on the backlog — exercise likes, profile management — that weren't required to replace OLE's core workflow and can follow after launch. But the bigger point I want to leave you with is the broader implication: I don't think this pattern is specific to this one platform. Deep human involvement in decisions, plus a disciplined agentic pipeline — brainstorm, spec, small tasks, enforced TDD, layered review, real verification — that combination looks to me like a candidate template for making AI-agent-built software viable anywhere it needs to actually ship and be trusted, not just demo well.</a:t>
-            </a:r>
-          </a:p>
-        </p:txBody>
-      </p:sp>
-      <p:sp>
-        <p:nvSpPr>
-          <p:cNvPr id="4" name="Slide Number Placeholder 3"/>
-          <p:cNvSpPr>
-            <a:spLocks noGrp="1"/>
-          </p:cNvSpPr>
-          <p:nvPr>
-            <p:ph type="sldNum" idx="5" sz="quarter"/>
-          </p:nvPr>
-        </p:nvSpPr>
-        <p:spPr/>
-      </p:sp>
-    </p:spTree>
-  </p:cSld>
-  <p:clrMapOvr>
-    <a:masterClrMapping/>
-  </p:clrMapOvr>
-</p:notes>
-</file>
-
-<file path=ppt/notesSlides/notesSlide19.xml><?xml version="1.0" encoding="utf-8"?>
-<p:notes xmlns:a="http://schemas.openxmlformats.org/drawingml/2006/main" xmlns:p="http://schemas.openxmlformats.org/presentationml/2006/main" xmlns:r="http://schemas.openxmlformats.org/officeDocument/2006/relationships">
-  <p:cSld>
-    <p:spTree>
-      <p:nvGrpSpPr>
-        <p:cNvPr id="1" name=""/>
-        <p:cNvGrpSpPr/>
-        <p:nvPr/>
-      </p:nvGrpSpPr>
-      <p:grpSpPr>
-        <a:xfrm>
-          <a:off x="0" y="0"/>
-          <a:ext cx="0" cy="0"/>
-          <a:chOff x="0" y="0"/>
-          <a:chExt cx="0" cy="0"/>
-        </a:xfrm>
-      </p:grpSpPr>
-      <p:sp>
-        <p:nvSpPr>
-          <p:cNvPr id="2" name="Slide Image Placeholder 1"/>
-          <p:cNvSpPr>
-            <a:spLocks noGrp="1"/>
-          </p:cNvSpPr>
-          <p:nvPr>
-            <p:ph type="sldImg" idx="2"/>
-          </p:nvPr>
-        </p:nvSpPr>
-        <p:spPr/>
-      </p:sp>
-      <p:sp>
-        <p:nvSpPr>
-          <p:cNvPr id="3" name="Notes Placeholder 2"/>
-          <p:cNvSpPr>
-            <a:spLocks noGrp="1"/>
-          </p:cNvSpPr>
-          <p:nvPr>
-            <p:ph type="body" idx="3" sz="quarter"/>
-          </p:nvPr>
-        </p:nvSpPr>
-        <p:spPr/>
-        <p:txBody>
-          <a:bodyPr/>
-          <a:lstStyle/>
-          <a:p>
-            <a:r>
-              <a:t>Thank you — I'm happy to take questions.</a:t>
+              <a:t>This appendix lists the references. It is here if a marker asks.</a:t>
             </a:r>
           </a:p>
         </p:txBody>
@@ -1290,7 +1006,7 @@
           <a:lstStyle/>
           <a:p>
             <a:r>
-              <a:t>The university currently runs programming exercises through a system called OLE. Every single exercise lives inside one giant XML file — that's the core problem, it's monolithic. If a tutor makes one bad edit, there's a real risk of corrupting that entire file, breaking every exercise for every student at once. Because the cost of a mistake is so high, and because very few people maintain this system, nobody wants to touch it. The practical result: exercise content has gone stale, there's no way to introduce new exercise types, and tutors have no independent way to fix or extend anything. That's the real, currently-felt pain this project addresses — and that's the value: giving tutors a platform they can manage themselves, safely.</a:t>
+              <a:t>The university runs exercises on an old system called OLE. It stores every exercise in one big XML file. One small mistake can break the whole file. So people are afraid to edit it. There are few maintainers. The result is stale content and no new exercise types. Tutors have no safe way to author or fix content. This is the real pain we set out to fix.</a:t>
             </a:r>
           </a:p>
         </p:txBody>
@@ -1360,7 +1076,7 @@
           <a:lstStyle/>
           <a:p>
             <a:r>
-              <a:t>The solution is a standalone web platform that tutors can run and manage completely independently of OLE. It has three roles with a simple permission hierarchy — Super Admin sits above Tutor, which sits above Student. For this talk I'm focusing specifically on the Blockly exercise type — visual, block-based programming exercises. Students practice on the platform, export their answers, and those get imported back into OLE's existing submission process — so grading stays decoupled, and this system doesn't need to replace OLE's submission workflow, just fix the exercise-authoring and practice experience around it.</a:t>
+              <a:t>The solution is a new, standalone platform. It runs on its own, apart from OLE. It has three roles: student, tutor, and super admin. Exercises use Blockly. Students drag blocks to build code. Block-based coding is a well-known way to teach programming. Tools like Hedy, EduBlocks, and Open Roberta use the same idea. Grading is decoupled. Students export an answer. Tutors import it and grade it. This mirrors the old workflow, but in a safe, modern way.</a:t>
             </a:r>
           </a:p>
         </p:txBody>
@@ -1430,7 +1146,7 @@
           <a:lstStyle/>
           <a:p>
             <a:r>
-              <a:t>Before any of the process I'm about to show you existed, I actually started building this a different way — over a Telegram channel. Purely chat-driven: I would describe what I wanted, the agent would go implement it, and I'd verify only by watching the final result. I never looked at a diff, never opened an IDE. For small, isolated changes this felt great — fast, almost magical. But as the system grew, it broke down. There were no global constraints yet, no design docs, no enforced review — every decision was left entirely to the agent. And here's the key fact: the agent is right most of the time, but not all of the time. With nothing catching the wrong calls, new features started breaking old ones, and — this is the part that really told me something was wrong — fixing one bug would often introduce more than one new bug. Development stopped converging. It became genuinely difficult to make forward progress.</a:t>
+              <a:t>A quick word on the approach. The first attempt was pure vibe coding over a chat. There was no plan, no design, and no review. It worked fine for small changes. But it broke as the project grew. One fix often caused new bugs. Progress stalled. The lesson is simple. The AI can write code. But it needs a real process to be reliable. So I rebuilt the project on a disciplined pipeline. I will show that near the end. First, let me show what the system actually does.</a:t>
             </a:r>
           </a:p>
         </p:txBody>
@@ -1500,7 +1216,7 @@
           <a:lstStyle/>
           <a:p>
             <a:r>
-              <a:t>So what was actually going wrong? It wasn't that the agent couldn't write correct code most of the time — it clearly could. The problem was structural: with no checkpoints and no review gate, the small fraction of decisions the agent got wrong never got caught. They just accumulated, silently, until the whole codebase stopped converging. That's the actual finding I want this talk to land: the interesting question for this capstone was never 'can an AI agent write code' — that's now a fairly settled yes. The interesting, and much harder, question is: what process turns that into software you can actually ship and trust? Everything in the next section is the answer I built and tested against that question.</a:t>
+              <a:t>Here is the system at a high level. Requests come in through Nginx. Nginx serves the site and passes API calls to Spring Boot. Spring Boot talks to a MySQL database. When a tutor grades a Blockly answer, it runs on the server. It runs in a safe sandbox, so student code cannot do harm. Prometheus and Grafana watch the system. The whole thing runs on one server with Docker. It is simple to deploy and simple to run.</a:t>
             </a:r>
           </a:p>
         </p:txBody>
@@ -1570,7 +1286,7 @@
           <a:lstStyle/>
           <a:p>
             <a:r>
-              <a:t>On the technical side: requests come in through Nginx, which serves the static frontend and reverse-proxies API calls to a Spring Boot backend. That backend talks to MySQL for persistence. When a Blockly submission needs grading, it runs inside an embedded Rhino JavaScript engine — sandboxed, with a bytecode instruction limit so a student's infinite loop can't hang the server. Prometheus scrapes metrics from the API every fifteen seconds, and Grafana turns that into dashboards, with Telegram alerting on top.</a:t>
+              <a:t>Let us start with the student. The student opens a published exercise. They drag blocks to build their solution. They click Run. The code runs right in the browser. It runs in a safe worker, off the main thread. They see the result at once. There is no waiting and no risk to the server. When they are happy, they export their answer to a file. That file is what the tutor will grade later.</a:t>
             </a:r>
           </a:p>
         </p:txBody>
@@ -1640,7 +1356,7 @@
           <a:lstStyle/>
           <a:p>
             <a:r>
-              <a:t>The whole thing runs as seven Docker containers on a single server — deliberately no Kubernetes, no Redis, no Kafka. This is a single-university tool and it doesn't need distributed infrastructure. Nginx and the API server handle traffic; MySQL holds the data, with Flyway managing schema migrations automatically on startup. There's a sandbox container too — a Python execution environment using nsjail, no network access, capped memory. I want to be upfront that I'm not covering Python exercises as a student-facing feature in this talk — this container is just part of the honest infrastructure picture. Prometheus and Grafana handle monitoring, and a backup container takes a daily MySQL dump with thirty-day retention.</a:t>
+              <a:t>Now the tutor side. This is the part OLE could not do well. A tutor can create a new exercise on their own. They set the task and choose the blocks. They can edit it and publish it. Here is the key safety idea. Every edit saves a new version. Old versions are never lost. If an edit is wrong, rollback is easy. You just point back to an older version. So tutors can change content without fear.</a:t>
             </a:r>
           </a:p>
         </p:txBody>
@@ -1710,7 +1426,7 @@
           <a:lstStyle/>
           <a:p>
             <a:r>
-              <a:t>On the stack: React with Vite on the frontend, Blockly for the visual editor. Spring Boot 3.5 on the backend with Spring Security and JWT for auth, Flyway for migrations. Two design principles matter a lot here, and they come back later in this talk: every edit to an exercise creates a new immutable version rather than overwriting the old one, so rollback is always possible. And deletes are soft deletes only, everywhere — exercises, courses, submissions. Nothing is ever actually destroyed. Both of these turned out to matter a lot once an AI agent was doing the implementing, which I'll get back to.</a:t>
+              <a:t>Tutors also organize their content. They group exercises into courses. They use categories to keep things tidy. They assign exercises to a course. And they choose which students see them. This gives each tutor full control of their own material. They no longer depend on one shared, fragile file.</a:t>
             </a:r>
           </a:p>
         </p:txBody>
@@ -1780,7 +1496,7 @@
           <a:lstStyle/>
           <a:p>
             <a:r>
-              <a:t>So that's the what. Now let's get into the how — because the process behind this is the part of the project I actually want to spend the rest of this talk on.</a:t>
+              <a:t>This is the core of the platform. It replaces the old OLE grading workflow. A student exports an answer file. The tutor imports that file. The system grades the Blockly answer automatically. The grading runs safely on the server. It also checks for problems. It flags duplicate submissions. It flags when a student used an old version. Finally, tutors can export all results to a CSV file. This whole loop used to be manual and painful. Now it is simple.</a:t>
             </a:r>
           </a:p>
         </p:txBody>
@@ -4801,7 +4517,7 @@
             <a:avLst/>
           </a:prstGeom>
           <a:solidFill>
-            <a:srgbClr val="1F2937"/>
+            <a:srgbClr val="0F172A"/>
           </a:solidFill>
           <a:ln>
             <a:noFill/>
@@ -4838,8 +4554,8 @@
         </p:nvSpPr>
         <p:spPr>
           <a:xfrm>
-            <a:off x="0" y="6729984"/>
-            <a:ext cx="12191695" cy="128016"/>
+            <a:off x="0" y="2788920"/>
+            <a:ext cx="12191695" cy="54864"/>
           </a:xfrm>
           <a:prstGeom prst="rect">
             <a:avLst/>
@@ -4882,8 +4598,8 @@
         </p:nvSpPr>
         <p:spPr>
           <a:xfrm>
-            <a:off x="914400" y="2103120"/>
-            <a:ext cx="10362895" cy="1188720"/>
+            <a:off x="822960" y="1874519"/>
+            <a:ext cx="10515600" cy="914400"/>
           </a:xfrm>
           <a:prstGeom prst="rect">
             <a:avLst/>
@@ -4891,16 +4607,11 @@
           <a:noFill/>
         </p:spPr>
         <p:txBody>
-          <a:bodyPr wrap="square" anchor="ctr">
+          <a:bodyPr wrap="square" lIns="0" rIns="0" tIns="0" bIns="0">
             <a:spAutoFit/>
           </a:bodyPr>
           <a:lstStyle/>
           <a:p>
-            <a:pPr algn="ctr">
-              <a:lnSpc>
-                <a:spcPct val="115000"/>
-              </a:lnSpc>
-            </a:pPr>
             <a:r>
               <a:rPr sz="4200" b="1" i="0">
                 <a:solidFill>
@@ -4921,8 +4632,8 @@
         </p:nvSpPr>
         <p:spPr>
           <a:xfrm>
-            <a:off x="914400" y="3703320"/>
-            <a:ext cx="10362895" cy="868680"/>
+            <a:off x="822960" y="2971800"/>
+            <a:ext cx="10515600" cy="548640"/>
           </a:xfrm>
           <a:prstGeom prst="rect">
             <a:avLst/>
@@ -4930,16 +4641,11 @@
           <a:noFill/>
         </p:spPr>
         <p:txBody>
-          <a:bodyPr wrap="square" anchor="t">
+          <a:bodyPr wrap="square" lIns="0" rIns="0" tIns="0" bIns="0">
             <a:spAutoFit/>
           </a:bodyPr>
           <a:lstStyle/>
           <a:p>
-            <a:pPr algn="ctr">
-              <a:lnSpc>
-                <a:spcPct val="120000"/>
-              </a:lnSpc>
-            </a:pPr>
             <a:r>
               <a:rPr sz="2000" b="0" i="0">
                 <a:solidFill>
@@ -4947,7 +4653,7 @@
                 </a:solidFill>
                 <a:latin typeface="Calibri"/>
               </a:rPr>
-              <a:t>A Blockly Exercise Platform — Built with Disciplined AI-Agent Development</a:t>
+              <a:t>A Blockly Exercise Platform for Tutors and Students</a:t>
             </a:r>
           </a:p>
         </p:txBody>
@@ -4960,8 +4666,8 @@
         </p:nvSpPr>
         <p:spPr>
           <a:xfrm>
-            <a:off x="914400" y="4709160"/>
-            <a:ext cx="10362895" cy="457200"/>
+            <a:off x="822960" y="3840480"/>
+            <a:ext cx="10515600" cy="457200"/>
           </a:xfrm>
           <a:prstGeom prst="rect">
             <a:avLst/>
@@ -4969,18 +4675,13 @@
           <a:noFill/>
         </p:spPr>
         <p:txBody>
-          <a:bodyPr wrap="square" anchor="t">
+          <a:bodyPr wrap="square" lIns="0" rIns="0" tIns="0" bIns="0">
             <a:spAutoFit/>
           </a:bodyPr>
           <a:lstStyle/>
           <a:p>
-            <a:pPr algn="ctr">
-              <a:lnSpc>
-                <a:spcPct val="115000"/>
-              </a:lnSpc>
-            </a:pPr>
-            <a:r>
-              <a:rPr sz="1700" b="0" i="0">
+            <a:r>
+              <a:rPr sz="1600" b="0" i="0">
                 <a:solidFill>
                   <a:srgbClr val="CBD5E1"/>
                 </a:solidFill>
@@ -5062,7 +4763,7 @@
         <p:spPr>
           <a:xfrm>
             <a:off x="502920" y="256032"/>
-            <a:ext cx="11185855" cy="320040"/>
+            <a:ext cx="11183112" cy="320040"/>
           </a:xfrm>
           <a:prstGeom prst="rect">
             <a:avLst/>
@@ -5070,16 +4771,11 @@
           <a:noFill/>
         </p:spPr>
         <p:txBody>
-          <a:bodyPr wrap="square" anchor="t">
+          <a:bodyPr wrap="square" lIns="0" rIns="0" tIns="0" bIns="0">
             <a:spAutoFit/>
           </a:bodyPr>
           <a:lstStyle/>
           <a:p>
-            <a:pPr algn="l">
-              <a:lnSpc>
-                <a:spcPct val="115000"/>
-              </a:lnSpc>
-            </a:pPr>
             <a:r>
               <a:rPr sz="1300" b="1" i="0">
                 <a:solidFill>
@@ -5087,7 +4783,7 @@
                 </a:solidFill>
                 <a:latin typeface="Calibri"/>
               </a:rPr>
-              <a:t>PART 3 — THE METHODOLOGY</a:t>
+              <a:t>PART 3 — THE SYSTEM (HOW IT WORKS)</a:t>
             </a:r>
           </a:p>
         </p:txBody>
@@ -5101,7 +4797,7 @@
         <p:spPr>
           <a:xfrm>
             <a:off x="502920" y="566928"/>
-            <a:ext cx="11185855" cy="822960"/>
+            <a:ext cx="11183112" cy="822960"/>
           </a:xfrm>
           <a:prstGeom prst="rect">
             <a:avLst/>
@@ -5109,16 +4805,11 @@
           <a:noFill/>
         </p:spPr>
         <p:txBody>
-          <a:bodyPr wrap="square" anchor="t">
+          <a:bodyPr wrap="square" lIns="0" rIns="0" tIns="0" bIns="0">
             <a:spAutoFit/>
           </a:bodyPr>
           <a:lstStyle/>
           <a:p>
-            <a:pPr algn="l">
-              <a:lnSpc>
-                <a:spcPct val="115000"/>
-              </a:lnSpc>
-            </a:pPr>
             <a:r>
               <a:rPr sz="3200" b="1" i="0">
                 <a:solidFill>
@@ -5126,7 +4817,7 @@
                 </a:solidFill>
                 <a:latin typeface="Calibri"/>
               </a:rPr>
-              <a:t>The Fix: A Spec-Driven Agentic Pipeline</a:t>
+              <a:t>Admin and Monitoring</a:t>
             </a:r>
           </a:p>
         </p:txBody>
@@ -5140,7 +4831,7 @@
         <p:spPr>
           <a:xfrm>
             <a:off x="502920" y="1371600"/>
-            <a:ext cx="11185855" cy="20116"/>
+            <a:ext cx="11183112" cy="18288"/>
           </a:xfrm>
           <a:prstGeom prst="rect">
             <a:avLst/>
@@ -5192,16 +4883,11 @@
           <a:noFill/>
         </p:spPr>
         <p:txBody>
-          <a:bodyPr wrap="square" anchor="t">
+          <a:bodyPr wrap="square" lIns="0" rIns="0" tIns="0" bIns="0">
             <a:spAutoFit/>
           </a:bodyPr>
           <a:lstStyle/>
           <a:p>
-            <a:pPr algn="l">
-              <a:lnSpc>
-                <a:spcPct val="115000"/>
-              </a:lnSpc>
-            </a:pPr>
             <a:r>
               <a:rPr sz="1100" b="0" i="0">
                 <a:solidFill>
@@ -5222,7 +4908,7 @@
         </p:nvSpPr>
         <p:spPr>
           <a:xfrm>
-            <a:off x="10728655" y="6400800"/>
+            <a:off x="10725912" y="6400800"/>
             <a:ext cx="1005840" cy="320040"/>
           </a:xfrm>
           <a:prstGeom prst="rect">
@@ -5231,16 +4917,12 @@
           <a:noFill/>
         </p:spPr>
         <p:txBody>
-          <a:bodyPr wrap="square" anchor="t">
+          <a:bodyPr wrap="square" lIns="0" rIns="0" tIns="0" bIns="0">
             <a:spAutoFit/>
           </a:bodyPr>
           <a:lstStyle/>
           <a:p>
-            <a:pPr algn="r">
-              <a:lnSpc>
-                <a:spcPct val="115000"/>
-              </a:lnSpc>
-            </a:pPr>
+            <a:pPr algn="r"/>
             <a:r>
               <a:rPr sz="1100" b="0" i="0">
                 <a:solidFill>
@@ -5261,8 +4943,8 @@
         </p:nvSpPr>
         <p:spPr>
           <a:xfrm>
-            <a:off x="502920" y="1600200"/>
-            <a:ext cx="11185855" cy="1691640"/>
+            <a:off x="502920" y="1645920"/>
+            <a:ext cx="5486400" cy="4389120"/>
           </a:xfrm>
           <a:prstGeom prst="rect">
             <a:avLst/>
@@ -5270,21 +4952,21 @@
           <a:noFill/>
         </p:spPr>
         <p:txBody>
-          <a:bodyPr wrap="square">
+          <a:bodyPr wrap="square" lIns="0" rIns="0" tIns="0" bIns="0">
             <a:spAutoFit/>
           </a:bodyPr>
           <a:lstStyle/>
           <a:p>
             <a:pPr>
-              <a:lnSpc>
-                <a:spcPct val="115000"/>
-              </a:lnSpc>
+              <a:spcBef>
+                <a:spcPts val="0"/>
+              </a:spcBef>
               <a:spcAft>
                 <a:spcPts val="1000"/>
               </a:spcAft>
             </a:pPr>
             <a:r>
-              <a:rPr sz="2000" b="1">
+              <a:rPr sz="1900" b="1" i="0">
                 <a:solidFill>
                   <a:srgbClr val="2563EB"/>
                 </a:solidFill>
@@ -5293,26 +4975,26 @@
               <a:t>•  </a:t>
             </a:r>
             <a:r>
-              <a:rPr sz="2000">
+              <a:rPr sz="1900" b="0" i="0">
                 <a:solidFill>
                   <a:srgbClr val="1F2937"/>
                 </a:solidFill>
                 <a:latin typeface="Calibri"/>
               </a:rPr>
-              <a:t>Brainstorm → Design → Plan → Task Briefs</a:t>
+              <a:t>Super Admin creates and manages user accounts.</a:t>
             </a:r>
           </a:p>
           <a:p>
             <a:pPr>
-              <a:lnSpc>
-                <a:spcPct val="115000"/>
-              </a:lnSpc>
+              <a:spcBef>
+                <a:spcPts val="0"/>
+              </a:spcBef>
               <a:spcAft>
                 <a:spcPts val="1000"/>
               </a:spcAft>
             </a:pPr>
             <a:r>
-              <a:rPr sz="2000" b="1">
+              <a:rPr sz="1900" b="1" i="0">
                 <a:solidFill>
                   <a:srgbClr val="2563EB"/>
                 </a:solidFill>
@@ -5321,26 +5003,26 @@
               <a:t>•  </a:t>
             </a:r>
             <a:r>
-              <a:rPr sz="2000">
+              <a:rPr sz="1900" b="0" i="0">
                 <a:solidFill>
                   <a:srgbClr val="1F2937"/>
                 </a:solidFill>
                 <a:latin typeface="Calibri"/>
               </a:rPr>
-              <a:t>→ TDD Implementation → Code Review → Deploy</a:t>
+              <a:t>Admin can disable a user. That user is locked out at once.</a:t>
             </a:r>
           </a:p>
           <a:p>
             <a:pPr>
-              <a:lnSpc>
-                <a:spcPct val="115000"/>
-              </a:lnSpc>
+              <a:spcBef>
+                <a:spcPts val="0"/>
+              </a:spcBef>
               <a:spcAft>
                 <a:spcPts val="1000"/>
               </a:spcAft>
             </a:pPr>
             <a:r>
-              <a:rPr sz="2000" b="1">
+              <a:rPr sz="1900" b="1" i="0">
                 <a:solidFill>
                   <a:srgbClr val="2563EB"/>
                 </a:solidFill>
@@ -5349,41 +5031,203 @@
               <a:t>•  </a:t>
             </a:r>
             <a:r>
-              <a:rPr sz="2000">
+              <a:rPr sz="1900" b="0" i="0">
                 <a:solidFill>
                   <a:srgbClr val="1F2937"/>
                 </a:solidFill>
                 <a:latin typeface="Calibri"/>
               </a:rPr>
-              <a:t>Every step leaves a durable, checkable artifact</a:t>
-            </a:r>
-          </a:p>
-        </p:txBody>
-      </p:sp>
-      <p:pic>
-        <p:nvPicPr>
-          <p:cNvPr id="9" name="Picture 8" descr="pipeline.png"/>
-          <p:cNvPicPr>
-            <a:picLocks noChangeAspect="1"/>
-          </p:cNvPicPr>
-          <p:nvPr/>
-        </p:nvPicPr>
-        <p:blipFill>
-          <a:blip r:embed="rId2"/>
-          <a:stretch>
-            <a:fillRect/>
-          </a:stretch>
-        </p:blipFill>
-        <p:spPr>
-          <a:xfrm>
-            <a:off x="2748490" y="3611880"/>
-            <a:ext cx="6694714" cy="2743200"/>
-          </a:xfrm>
-          <a:prstGeom prst="rect">
-            <a:avLst/>
-          </a:prstGeom>
-        </p:spPr>
-      </p:pic>
+              <a:t>Grafana shows live health of the system [1].</a:t>
+            </a:r>
+          </a:p>
+          <a:p>
+            <a:pPr>
+              <a:spcBef>
+                <a:spcPts val="0"/>
+              </a:spcBef>
+              <a:spcAft>
+                <a:spcPts val="1000"/>
+              </a:spcAft>
+            </a:pPr>
+            <a:r>
+              <a:rPr sz="1900" b="1" i="0">
+                <a:solidFill>
+                  <a:srgbClr val="2563EB"/>
+                </a:solidFill>
+                <a:latin typeface="Calibri"/>
+              </a:rPr>
+              <a:t>•  </a:t>
+            </a:r>
+            <a:r>
+              <a:rPr sz="1900" b="0" i="0">
+                <a:solidFill>
+                  <a:srgbClr val="1F2937"/>
+                </a:solidFill>
+                <a:latin typeface="Calibri"/>
+              </a:rPr>
+              <a:t>Alerts fire if something breaks.</a:t>
+            </a:r>
+          </a:p>
+        </p:txBody>
+      </p:sp>
+      <p:sp>
+        <p:nvSpPr>
+          <p:cNvPr id="9" name="Rounded Rectangle 8"/>
+          <p:cNvSpPr/>
+          <p:nvPr/>
+        </p:nvSpPr>
+        <p:spPr>
+          <a:xfrm>
+            <a:off x="6309360" y="1691640"/>
+            <a:ext cx="5394960" cy="2011680"/>
+          </a:xfrm>
+          <a:prstGeom prst="roundRect">
+            <a:avLst/>
+          </a:prstGeom>
+          <a:solidFill>
+            <a:srgbClr val="F3F4F6"/>
+          </a:solidFill>
+          <a:ln w="19050">
+            <a:solidFill>
+              <a:srgbClr val="9CA3AF"/>
+            </a:solidFill>
+          </a:ln>
+          <a:effectLst/>
+        </p:spPr>
+        <p:style>
+          <a:lnRef idx="1">
+            <a:schemeClr val="accent1"/>
+          </a:lnRef>
+          <a:fillRef idx="3">
+            <a:schemeClr val="accent1"/>
+          </a:fillRef>
+          <a:effectRef idx="2">
+            <a:schemeClr val="accent1"/>
+          </a:effectRef>
+          <a:fontRef idx="minor">
+            <a:schemeClr val="lt1"/>
+          </a:fontRef>
+        </p:style>
+        <p:txBody>
+          <a:bodyPr rtlCol="0" anchor="ctr" wrap="square"/>
+          <a:lstStyle/>
+          <a:p>
+            <a:pPr algn="ctr"/>
+            <a:r>
+              <a:rPr sz="1300" b="1" i="0">
+                <a:solidFill>
+                  <a:srgbClr val="6B7280"/>
+                </a:solidFill>
+                <a:latin typeface="Calibri"/>
+              </a:rPr>
+              <a:t>SCREENSHOT</a:t>
+            </a:r>
+          </a:p>
+          <a:p>
+            <a:pPr algn="ctr"/>
+            <a:r>
+              <a:rPr sz="1500" b="1" i="0">
+                <a:solidFill>
+                  <a:srgbClr val="6B7280"/>
+                </a:solidFill>
+                <a:latin typeface="Calibri"/>
+              </a:rPr>
+              <a:t>Admin user list</a:t>
+            </a:r>
+          </a:p>
+          <a:p>
+            <a:pPr algn="ctr"/>
+            <a:r>
+              <a:rPr sz="1100" b="0" i="1">
+                <a:solidFill>
+                  <a:srgbClr val="6B7280"/>
+                </a:solidFill>
+                <a:latin typeface="Calibri"/>
+              </a:rPr>
+              <a:t>(capture and drop in here)</a:t>
+            </a:r>
+          </a:p>
+        </p:txBody>
+      </p:sp>
+      <p:sp>
+        <p:nvSpPr>
+          <p:cNvPr id="10" name="Rounded Rectangle 9"/>
+          <p:cNvSpPr/>
+          <p:nvPr/>
+        </p:nvSpPr>
+        <p:spPr>
+          <a:xfrm>
+            <a:off x="6309360" y="3977639"/>
+            <a:ext cx="5394960" cy="2011680"/>
+          </a:xfrm>
+          <a:prstGeom prst="roundRect">
+            <a:avLst/>
+          </a:prstGeom>
+          <a:solidFill>
+            <a:srgbClr val="F3F4F6"/>
+          </a:solidFill>
+          <a:ln w="19050">
+            <a:solidFill>
+              <a:srgbClr val="9CA3AF"/>
+            </a:solidFill>
+          </a:ln>
+          <a:effectLst/>
+        </p:spPr>
+        <p:style>
+          <a:lnRef idx="1">
+            <a:schemeClr val="accent1"/>
+          </a:lnRef>
+          <a:fillRef idx="3">
+            <a:schemeClr val="accent1"/>
+          </a:fillRef>
+          <a:effectRef idx="2">
+            <a:schemeClr val="accent1"/>
+          </a:effectRef>
+          <a:fontRef idx="minor">
+            <a:schemeClr val="lt1"/>
+          </a:fontRef>
+        </p:style>
+        <p:txBody>
+          <a:bodyPr rtlCol="0" anchor="ctr" wrap="square"/>
+          <a:lstStyle/>
+          <a:p>
+            <a:pPr algn="ctr"/>
+            <a:r>
+              <a:rPr sz="1300" b="1" i="0">
+                <a:solidFill>
+                  <a:srgbClr val="6B7280"/>
+                </a:solidFill>
+                <a:latin typeface="Calibri"/>
+              </a:rPr>
+              <a:t>SCREENSHOT</a:t>
+            </a:r>
+          </a:p>
+          <a:p>
+            <a:pPr algn="ctr"/>
+            <a:r>
+              <a:rPr sz="1500" b="1" i="0">
+                <a:solidFill>
+                  <a:srgbClr val="6B7280"/>
+                </a:solidFill>
+                <a:latin typeface="Calibri"/>
+              </a:rPr>
+              <a:t>Grafana dashboard panel</a:t>
+            </a:r>
+          </a:p>
+          <a:p>
+            <a:pPr algn="ctr"/>
+            <a:r>
+              <a:rPr sz="1100" b="0" i="1">
+                <a:solidFill>
+                  <a:srgbClr val="6B7280"/>
+                </a:solidFill>
+                <a:latin typeface="Calibri"/>
+              </a:rPr>
+              <a:t>(capture and drop in here)</a:t>
+            </a:r>
+          </a:p>
+        </p:txBody>
+      </p:sp>
     </p:spTree>
   </p:cSld>
   <p:clrMapOvr>
@@ -5455,7 +5299,7 @@
         <p:spPr>
           <a:xfrm>
             <a:off x="502920" y="256032"/>
-            <a:ext cx="11185855" cy="320040"/>
+            <a:ext cx="11183112" cy="320040"/>
           </a:xfrm>
           <a:prstGeom prst="rect">
             <a:avLst/>
@@ -5463,16 +5307,11 @@
           <a:noFill/>
         </p:spPr>
         <p:txBody>
-          <a:bodyPr wrap="square" anchor="t">
+          <a:bodyPr wrap="square" lIns="0" rIns="0" tIns="0" bIns="0">
             <a:spAutoFit/>
           </a:bodyPr>
           <a:lstStyle/>
           <a:p>
-            <a:pPr algn="l">
-              <a:lnSpc>
-                <a:spcPct val="115000"/>
-              </a:lnSpc>
-            </a:pPr>
             <a:r>
               <a:rPr sz="1300" b="1" i="0">
                 <a:solidFill>
@@ -5480,7 +5319,7 @@
                 </a:solidFill>
                 <a:latin typeface="Calibri"/>
               </a:rPr>
-              <a:t>PART 3 — THE METHODOLOGY</a:t>
+              <a:t>PART 3 — HOW IT WAS BUILT</a:t>
             </a:r>
           </a:p>
         </p:txBody>
@@ -5494,7 +5333,7 @@
         <p:spPr>
           <a:xfrm>
             <a:off x="502920" y="566928"/>
-            <a:ext cx="11185855" cy="822960"/>
+            <a:ext cx="11183112" cy="822960"/>
           </a:xfrm>
           <a:prstGeom prst="rect">
             <a:avLst/>
@@ -5502,16 +5341,11 @@
           <a:noFill/>
         </p:spPr>
         <p:txBody>
-          <a:bodyPr wrap="square" anchor="t">
+          <a:bodyPr wrap="square" lIns="0" rIns="0" tIns="0" bIns="0">
             <a:spAutoFit/>
           </a:bodyPr>
           <a:lstStyle/>
           <a:p>
-            <a:pPr algn="l">
-              <a:lnSpc>
-                <a:spcPct val="115000"/>
-              </a:lnSpc>
-            </a:pPr>
             <a:r>
               <a:rPr sz="3200" b="1" i="0">
                 <a:solidFill>
@@ -5519,7 +5353,7 @@
                 </a:solidFill>
                 <a:latin typeface="Calibri"/>
               </a:rPr>
-              <a:t>Case Study: One Bug, Start to Finish</a:t>
+              <a:t>A Spec-Driven AI Pipeline</a:t>
             </a:r>
           </a:p>
         </p:txBody>
@@ -5533,7 +5367,7 @@
         <p:spPr>
           <a:xfrm>
             <a:off x="502920" y="1371600"/>
-            <a:ext cx="11185855" cy="20116"/>
+            <a:ext cx="11183112" cy="18288"/>
           </a:xfrm>
           <a:prstGeom prst="rect">
             <a:avLst/>
@@ -5585,16 +5419,11 @@
           <a:noFill/>
         </p:spPr>
         <p:txBody>
-          <a:bodyPr wrap="square" anchor="t">
+          <a:bodyPr wrap="square" lIns="0" rIns="0" tIns="0" bIns="0">
             <a:spAutoFit/>
           </a:bodyPr>
           <a:lstStyle/>
           <a:p>
-            <a:pPr algn="l">
-              <a:lnSpc>
-                <a:spcPct val="115000"/>
-              </a:lnSpc>
-            </a:pPr>
             <a:r>
               <a:rPr sz="1100" b="0" i="0">
                 <a:solidFill>
@@ -5615,7 +5444,7 @@
         </p:nvSpPr>
         <p:spPr>
           <a:xfrm>
-            <a:off x="10728655" y="6400800"/>
+            <a:off x="10725912" y="6400800"/>
             <a:ext cx="1005840" cy="320040"/>
           </a:xfrm>
           <a:prstGeom prst="rect">
@@ -5624,16 +5453,12 @@
           <a:noFill/>
         </p:spPr>
         <p:txBody>
-          <a:bodyPr wrap="square" anchor="t">
+          <a:bodyPr wrap="square" lIns="0" rIns="0" tIns="0" bIns="0">
             <a:spAutoFit/>
           </a:bodyPr>
           <a:lstStyle/>
           <a:p>
-            <a:pPr algn="r">
-              <a:lnSpc>
-                <a:spcPct val="115000"/>
-              </a:lnSpc>
-            </a:pPr>
+            <a:pPr algn="r"/>
             <a:r>
               <a:rPr sz="1100" b="0" i="0">
                 <a:solidFill>
@@ -5648,60 +5473,14 @@
       </p:sp>
       <p:sp>
         <p:nvSpPr>
-          <p:cNvPr id="8" name="Rectangle 7"/>
-          <p:cNvSpPr/>
-          <p:nvPr/>
-        </p:nvSpPr>
-        <p:spPr>
-          <a:xfrm>
-            <a:off x="502920" y="1645920"/>
-            <a:ext cx="11185855" cy="1737360"/>
-          </a:xfrm>
-          <a:prstGeom prst="rect">
-            <a:avLst/>
-          </a:prstGeom>
-          <a:solidFill>
-            <a:srgbClr val="F3F4F6"/>
-          </a:solidFill>
-          <a:ln w="12700">
-            <a:solidFill>
-              <a:srgbClr val="E5E7EB"/>
-            </a:solidFill>
-          </a:ln>
-          <a:effectLst/>
-        </p:spPr>
-        <p:style>
-          <a:lnRef idx="1">
-            <a:schemeClr val="accent1"/>
-          </a:lnRef>
-          <a:fillRef idx="3">
-            <a:schemeClr val="accent1"/>
-          </a:fillRef>
-          <a:effectRef idx="2">
-            <a:schemeClr val="accent1"/>
-          </a:effectRef>
-          <a:fontRef idx="minor">
-            <a:schemeClr val="lt1"/>
-          </a:fontRef>
-        </p:style>
-        <p:txBody>
-          <a:bodyPr rtlCol="0" anchor="ctr"/>
-          <a:lstStyle/>
-          <a:p>
-            <a:pPr algn="ctr"/>
-          </a:p>
-        </p:txBody>
-      </p:sp>
-      <p:sp>
-        <p:nvSpPr>
-          <p:cNvPr id="9" name="TextBox 8"/>
+          <p:cNvPr id="8" name="TextBox 7"/>
           <p:cNvSpPr txBox="1"/>
           <p:nvPr/>
         </p:nvSpPr>
         <p:spPr>
           <a:xfrm>
-            <a:off x="731520" y="1810512"/>
-            <a:ext cx="10728655" cy="1408176"/>
+            <a:off x="502920" y="1600200"/>
+            <a:ext cx="11183112" cy="1463040"/>
           </a:xfrm>
           <a:prstGeom prst="rect">
             <a:avLst/>
@@ -5709,266 +5488,148 @@
           <a:noFill/>
         </p:spPr>
         <p:txBody>
-          <a:bodyPr wrap="square">
+          <a:bodyPr wrap="square" lIns="0" rIns="0" tIns="0" bIns="0">
             <a:spAutoFit/>
           </a:bodyPr>
           <a:lstStyle/>
           <a:p>
             <a:pPr>
-              <a:lnSpc>
-                <a:spcPct val="120000"/>
-              </a:lnSpc>
+              <a:spcBef>
+                <a:spcPts val="0"/>
+              </a:spcBef>
               <a:spcAft>
-                <a:spcPts val="400"/>
+                <a:spcPts val="600"/>
               </a:spcAft>
             </a:pPr>
             <a:r>
-              <a:rPr sz="1550" b="0">
-                <a:solidFill>
-                  <a:srgbClr val="6B7280"/>
-                </a:solidFill>
-                <a:latin typeface="Consolas"/>
-              </a:rPr>
-              <a:t>// SubmissionController.java — before</a:t>
+              <a:rPr sz="2000" b="1" i="0">
+                <a:solidFill>
+                  <a:srgbClr val="2563EB"/>
+                </a:solidFill>
+                <a:latin typeface="Calibri"/>
+              </a:rPr>
+              <a:t>•  </a:t>
+            </a:r>
+            <a:r>
+              <a:rPr sz="2000" b="0" i="0">
+                <a:solidFill>
+                  <a:srgbClr val="1F2937"/>
+                </a:solidFill>
+                <a:latin typeface="Calibri"/>
+              </a:rPr>
+              <a:t>Every feature followed the same steps.</a:t>
             </a:r>
           </a:p>
           <a:p>
             <a:pPr>
-              <a:lnSpc>
-                <a:spcPct val="120000"/>
-              </a:lnSpc>
+              <a:spcBef>
+                <a:spcPts val="0"/>
+              </a:spcBef>
               <a:spcAft>
-                <a:spcPts val="400"/>
+                <a:spcPts val="600"/>
               </a:spcAft>
             </a:pPr>
             <a:r>
-              <a:rPr sz="1550" b="1">
-                <a:solidFill>
-                  <a:srgbClr val="DC2626"/>
-                </a:solidFill>
-                <a:latin typeface="Consolas"/>
-              </a:rPr>
-              <a:t>@RequestParam(defaultValue = "IMPORT") String source</a:t>
+              <a:rPr sz="2000" b="1" i="0">
+                <a:solidFill>
+                  <a:srgbClr val="2563EB"/>
+                </a:solidFill>
+                <a:latin typeface="Calibri"/>
+              </a:rPr>
+              <a:t>•  </a:t>
+            </a:r>
+            <a:r>
+              <a:rPr sz="2000" b="0" i="0">
+                <a:solidFill>
+                  <a:srgbClr val="1F2937"/>
+                </a:solidFill>
+                <a:latin typeface="Calibri"/>
+              </a:rPr>
+              <a:t>Brainstorm → design → plan → code with tests → review → deploy.</a:t>
             </a:r>
           </a:p>
           <a:p>
             <a:pPr>
-              <a:lnSpc>
-                <a:spcPct val="120000"/>
-              </a:lnSpc>
+              <a:spcBef>
+                <a:spcPts val="0"/>
+              </a:spcBef>
               <a:spcAft>
-                <a:spcPts val="400"/>
+                <a:spcPts val="600"/>
               </a:spcAft>
             </a:pPr>
             <a:r>
-              <a:rPr sz="1550" b="0">
-                <a:solidFill>
-                  <a:srgbClr val="6B7280"/>
-                </a:solidFill>
-                <a:latin typeface="Consolas"/>
-              </a:rPr>
-              <a:t>// Spring rewrites BOTH a missing param AND an explicit empty</a:t>
+              <a:rPr sz="2000" b="1" i="0">
+                <a:solidFill>
+                  <a:srgbClr val="2563EB"/>
+                </a:solidFill>
+                <a:latin typeface="Calibri"/>
+              </a:rPr>
+              <a:t>•  </a:t>
+            </a:r>
+            <a:r>
+              <a:rPr sz="2000" b="0" i="0">
+                <a:solidFill>
+                  <a:srgbClr val="1F2937"/>
+                </a:solidFill>
+                <a:latin typeface="Calibri"/>
+              </a:rPr>
+              <a:t>Each step leaves a record you can check.</a:t>
             </a:r>
           </a:p>
           <a:p>
             <a:pPr>
-              <a:lnSpc>
-                <a:spcPct val="120000"/>
-              </a:lnSpc>
+              <a:spcBef>
+                <a:spcPts val="0"/>
+              </a:spcBef>
               <a:spcAft>
-                <a:spcPts val="400"/>
+                <a:spcPts val="600"/>
               </a:spcAft>
             </a:pPr>
             <a:r>
-              <a:rPr sz="1550" b="0">
-                <a:solidFill>
-                  <a:srgbClr val="6B7280"/>
-                </a:solidFill>
-                <a:latin typeface="Consolas"/>
-              </a:rPr>
-              <a:t>// string back to "IMPORT" — “All sources” silently broke</a:t>
-            </a:r>
-          </a:p>
-        </p:txBody>
-      </p:sp>
-      <p:sp>
-        <p:nvSpPr>
-          <p:cNvPr id="10" name="Rectangle 9"/>
-          <p:cNvSpPr/>
-          <p:nvPr/>
-        </p:nvSpPr>
-        <p:spPr>
-          <a:xfrm>
-            <a:off x="502920" y="3611880"/>
-            <a:ext cx="11185855" cy="1051560"/>
-          </a:xfrm>
-          <a:prstGeom prst="rect">
-            <a:avLst/>
-          </a:prstGeom>
-          <a:solidFill>
-            <a:srgbClr val="F3F4F6"/>
-          </a:solidFill>
-          <a:ln w="12700">
-            <a:solidFill>
-              <a:srgbClr val="E5E7EB"/>
-            </a:solidFill>
-          </a:ln>
-          <a:effectLst/>
-        </p:spPr>
-        <p:style>
-          <a:lnRef idx="1">
-            <a:schemeClr val="accent1"/>
-          </a:lnRef>
-          <a:fillRef idx="3">
-            <a:schemeClr val="accent1"/>
-          </a:fillRef>
-          <a:effectRef idx="2">
-            <a:schemeClr val="accent1"/>
-          </a:effectRef>
-          <a:fontRef idx="minor">
-            <a:schemeClr val="lt1"/>
-          </a:fontRef>
-        </p:style>
-        <p:txBody>
-          <a:bodyPr rtlCol="0" anchor="ctr"/>
-          <a:lstStyle/>
-          <a:p>
-            <a:pPr algn="ctr"/>
-          </a:p>
-        </p:txBody>
-      </p:sp>
-      <p:sp>
-        <p:nvSpPr>
-          <p:cNvPr id="11" name="TextBox 10"/>
-          <p:cNvSpPr txBox="1"/>
-          <p:nvPr/>
-        </p:nvSpPr>
-        <p:spPr>
-          <a:xfrm>
-            <a:off x="731520" y="3776472"/>
-            <a:ext cx="10728655" cy="722375"/>
-          </a:xfrm>
-          <a:prstGeom prst="rect">
-            <a:avLst/>
-          </a:prstGeom>
-          <a:noFill/>
-        </p:spPr>
-        <p:txBody>
-          <a:bodyPr wrap="square">
-            <a:spAutoFit/>
-          </a:bodyPr>
-          <a:lstStyle/>
-          <a:p>
-            <a:pPr>
-              <a:lnSpc>
-                <a:spcPct val="120000"/>
-              </a:lnSpc>
-              <a:spcAft>
-                <a:spcPts val="400"/>
-              </a:spcAft>
-            </a:pPr>
-            <a:r>
-              <a:rPr sz="1550" b="0">
-                <a:solidFill>
-                  <a:srgbClr val="6B7280"/>
-                </a:solidFill>
-                <a:latin typeface="Consolas"/>
-              </a:rPr>
-              <a:t>// after — fixed</a:t>
-            </a:r>
-          </a:p>
-          <a:p>
-            <a:pPr>
-              <a:lnSpc>
-                <a:spcPct val="120000"/>
-              </a:lnSpc>
-              <a:spcAft>
-                <a:spcPts val="400"/>
-              </a:spcAft>
-            </a:pPr>
-            <a:r>
-              <a:rPr sz="1550" b="1">
-                <a:solidFill>
-                  <a:srgbClr val="059669"/>
-                </a:solidFill>
-                <a:latin typeface="Consolas"/>
-              </a:rPr>
-              <a:t>@RequestParam(required = false) String source</a:t>
-            </a:r>
-          </a:p>
-        </p:txBody>
-      </p:sp>
-      <p:sp>
-        <p:nvSpPr>
-          <p:cNvPr id="12" name="TextBox 11"/>
-          <p:cNvSpPr txBox="1"/>
-          <p:nvPr/>
-        </p:nvSpPr>
-        <p:spPr>
-          <a:xfrm>
-            <a:off x="502920" y="4892040"/>
-            <a:ext cx="11185855" cy="1463040"/>
-          </a:xfrm>
-          <a:prstGeom prst="rect">
-            <a:avLst/>
-          </a:prstGeom>
-          <a:noFill/>
-        </p:spPr>
-        <p:txBody>
-          <a:bodyPr wrap="square" anchor="t">
-            <a:spAutoFit/>
-          </a:bodyPr>
-          <a:lstStyle/>
-          <a:p>
-            <a:pPr algn="l">
-              <a:lnSpc>
-                <a:spcPct val="130000"/>
-              </a:lnSpc>
-            </a:pPr>
-            <a:r>
-              <a:rPr sz="1800" b="0" i="0">
+              <a:rPr sz="2000" b="1" i="0">
+                <a:solidFill>
+                  <a:srgbClr val="2563EB"/>
+                </a:solidFill>
+                <a:latin typeface="Calibri"/>
+              </a:rPr>
+              <a:t>•  </a:t>
+            </a:r>
+            <a:r>
+              <a:rPr sz="2000" b="0" i="0">
                 <a:solidFill>
                   <a:srgbClr val="1F2937"/>
                 </a:solidFill>
                 <a:latin typeface="Calibri"/>
               </a:rPr>
-              <a:t>Real chain followed: design doc → implementation plan → RED failing test</a:t>
-            </a:r>
-          </a:p>
-          <a:p>
-            <a:pPr algn="l">
-              <a:lnSpc>
-                <a:spcPct val="130000"/>
-              </a:lnSpc>
-            </a:pPr>
-            <a:r>
-              <a:rPr sz="1800" b="0" i="0">
-                <a:solidFill>
-                  <a:srgbClr val="1F2937"/>
-                </a:solidFill>
-                <a:latin typeface="Calibri"/>
-              </a:rPr>
-              <a:t>→ GREEN fix → commit. Not a hypothetical — preserved in this project's own</a:t>
-            </a:r>
-          </a:p>
-          <a:p>
-            <a:pPr algn="l">
-              <a:lnSpc>
-                <a:spcPct val="130000"/>
-              </a:lnSpc>
-            </a:pPr>
-            <a:r>
-              <a:rPr sz="1800" b="0" i="0">
-                <a:solidFill>
-                  <a:srgbClr val="1F2937"/>
-                </a:solidFill>
-                <a:latin typeface="Calibri"/>
-              </a:rPr>
-              <a:t>docs and git history.</a:t>
-            </a:r>
-          </a:p>
-        </p:txBody>
-      </p:sp>
+              <a:t>Every AI decision has a checkpoint and a review gate.</a:t>
+            </a:r>
+          </a:p>
+        </p:txBody>
+      </p:sp>
+      <p:pic>
+        <p:nvPicPr>
+          <p:cNvPr id="9" name="Picture 8" descr="pipeline.png"/>
+          <p:cNvPicPr>
+            <a:picLocks noChangeAspect="1"/>
+          </p:cNvPicPr>
+          <p:nvPr/>
+        </p:nvPicPr>
+        <p:blipFill>
+          <a:blip r:embed="rId2"/>
+          <a:stretch>
+            <a:fillRect/>
+          </a:stretch>
+        </p:blipFill>
+        <p:spPr>
+          <a:xfrm>
+            <a:off x="838047" y="3291840"/>
+            <a:ext cx="10515600" cy="2879677"/>
+          </a:xfrm>
+          <a:prstGeom prst="rect">
+            <a:avLst/>
+          </a:prstGeom>
+        </p:spPr>
+      </p:pic>
     </p:spTree>
   </p:cSld>
   <p:clrMapOvr>
@@ -6040,7 +5701,7 @@
         <p:spPr>
           <a:xfrm>
             <a:off x="502920" y="256032"/>
-            <a:ext cx="11185855" cy="320040"/>
+            <a:ext cx="11183112" cy="320040"/>
           </a:xfrm>
           <a:prstGeom prst="rect">
             <a:avLst/>
@@ -6048,16 +5709,11 @@
           <a:noFill/>
         </p:spPr>
         <p:txBody>
-          <a:bodyPr wrap="square" anchor="t">
+          <a:bodyPr wrap="square" lIns="0" rIns="0" tIns="0" bIns="0">
             <a:spAutoFit/>
           </a:bodyPr>
           <a:lstStyle/>
           <a:p>
-            <a:pPr algn="l">
-              <a:lnSpc>
-                <a:spcPct val="115000"/>
-              </a:lnSpc>
-            </a:pPr>
             <a:r>
               <a:rPr sz="1300" b="1" i="0">
                 <a:solidFill>
@@ -6065,7 +5721,7 @@
                 </a:solidFill>
                 <a:latin typeface="Calibri"/>
               </a:rPr>
-              <a:t>PART 3 — THE METHODOLOGY</a:t>
+              <a:t>PART 3 — HOW IT WAS BUILT</a:t>
             </a:r>
           </a:p>
         </p:txBody>
@@ -6079,7 +5735,7 @@
         <p:spPr>
           <a:xfrm>
             <a:off x="502920" y="566928"/>
-            <a:ext cx="11185855" cy="822960"/>
+            <a:ext cx="11183112" cy="822960"/>
           </a:xfrm>
           <a:prstGeom prst="rect">
             <a:avLst/>
@@ -6087,16 +5743,11 @@
           <a:noFill/>
         </p:spPr>
         <p:txBody>
-          <a:bodyPr wrap="square" anchor="t">
+          <a:bodyPr wrap="square" lIns="0" rIns="0" tIns="0" bIns="0">
             <a:spAutoFit/>
           </a:bodyPr>
           <a:lstStyle/>
           <a:p>
-            <a:pPr algn="l">
-              <a:lnSpc>
-                <a:spcPct val="115000"/>
-              </a:lnSpc>
-            </a:pPr>
             <a:r>
               <a:rPr sz="3200" b="1" i="0">
                 <a:solidFill>
@@ -6104,7 +5755,7 @@
                 </a:solidFill>
                 <a:latin typeface="Calibri"/>
               </a:rPr>
-              <a:t>Task Dispatch + Enforced TDD</a:t>
+              <a:t>What I Did vs. What the AI Did</a:t>
             </a:r>
           </a:p>
         </p:txBody>
@@ -6118,7 +5769,7 @@
         <p:spPr>
           <a:xfrm>
             <a:off x="502920" y="1371600"/>
-            <a:ext cx="11185855" cy="20116"/>
+            <a:ext cx="11183112" cy="18288"/>
           </a:xfrm>
           <a:prstGeom prst="rect">
             <a:avLst/>
@@ -6170,16 +5821,11 @@
           <a:noFill/>
         </p:spPr>
         <p:txBody>
-          <a:bodyPr wrap="square" anchor="t">
+          <a:bodyPr wrap="square" lIns="0" rIns="0" tIns="0" bIns="0">
             <a:spAutoFit/>
           </a:bodyPr>
           <a:lstStyle/>
           <a:p>
-            <a:pPr algn="l">
-              <a:lnSpc>
-                <a:spcPct val="115000"/>
-              </a:lnSpc>
-            </a:pPr>
             <a:r>
               <a:rPr sz="1100" b="0" i="0">
                 <a:solidFill>
@@ -6200,7 +5846,7 @@
         </p:nvSpPr>
         <p:spPr>
           <a:xfrm>
-            <a:off x="10728655" y="6400800"/>
+            <a:off x="10725912" y="6400800"/>
             <a:ext cx="1005840" cy="320040"/>
           </a:xfrm>
           <a:prstGeom prst="rect">
@@ -6209,16 +5855,12 @@
           <a:noFill/>
         </p:spPr>
         <p:txBody>
-          <a:bodyPr wrap="square" anchor="t">
+          <a:bodyPr wrap="square" lIns="0" rIns="0" tIns="0" bIns="0">
             <a:spAutoFit/>
           </a:bodyPr>
           <a:lstStyle/>
           <a:p>
-            <a:pPr algn="r">
-              <a:lnSpc>
-                <a:spcPct val="115000"/>
-              </a:lnSpc>
-            </a:pPr>
+            <a:pPr algn="r"/>
             <a:r>
               <a:rPr sz="1100" b="0" i="0">
                 <a:solidFill>
@@ -6227,120 +5869,13 @@
                 <a:latin typeface="Calibri"/>
               </a:rPr>
               <a:t>12</a:t>
-            </a:r>
-          </a:p>
-        </p:txBody>
-      </p:sp>
-      <p:sp>
-        <p:nvSpPr>
-          <p:cNvPr id="8" name="TextBox 7"/>
-          <p:cNvSpPr txBox="1"/>
-          <p:nvPr/>
-        </p:nvSpPr>
-        <p:spPr>
-          <a:xfrm>
-            <a:off x="502920" y="1600200"/>
-            <a:ext cx="11185855" cy="1691640"/>
-          </a:xfrm>
-          <a:prstGeom prst="rect">
-            <a:avLst/>
-          </a:prstGeom>
-          <a:noFill/>
-        </p:spPr>
-        <p:txBody>
-          <a:bodyPr wrap="square">
-            <a:spAutoFit/>
-          </a:bodyPr>
-          <a:lstStyle/>
-          <a:p>
-            <a:pPr>
-              <a:lnSpc>
-                <a:spcPct val="115000"/>
-              </a:lnSpc>
-              <a:spcAft>
-                <a:spcPts val="1000"/>
-              </a:spcAft>
-            </a:pPr>
-            <a:r>
-              <a:rPr sz="2000" b="1">
-                <a:solidFill>
-                  <a:srgbClr val="2563EB"/>
-                </a:solidFill>
-                <a:latin typeface="Calibri"/>
-              </a:rPr>
-              <a:t>•  </a:t>
-            </a:r>
-            <a:r>
-              <a:rPr sz="2000">
-                <a:solidFill>
-                  <a:srgbClr val="1F2937"/>
-                </a:solidFill>
-                <a:latin typeface="Calibri"/>
-              </a:rPr>
-              <a:t>Each task: independent brief (files, interfaces, steps)</a:t>
-            </a:r>
-          </a:p>
-          <a:p>
-            <a:pPr>
-              <a:lnSpc>
-                <a:spcPct val="115000"/>
-              </a:lnSpc>
-              <a:spcAft>
-                <a:spcPts val="1000"/>
-              </a:spcAft>
-            </a:pPr>
-            <a:r>
-              <a:rPr sz="2000" b="1">
-                <a:solidFill>
-                  <a:srgbClr val="2563EB"/>
-                </a:solidFill>
-                <a:latin typeface="Calibri"/>
-              </a:rPr>
-              <a:t>•  </a:t>
-            </a:r>
-            <a:r>
-              <a:rPr sz="2000">
-                <a:solidFill>
-                  <a:srgbClr val="1F2937"/>
-                </a:solidFill>
-                <a:latin typeface="Calibri"/>
-              </a:rPr>
-              <a:t>Implementer returns RED → GREEN evidence</a:t>
-            </a:r>
-          </a:p>
-          <a:p>
-            <a:pPr>
-              <a:lnSpc>
-                <a:spcPct val="115000"/>
-              </a:lnSpc>
-              <a:spcAft>
-                <a:spcPts val="1000"/>
-              </a:spcAft>
-            </a:pPr>
-            <a:r>
-              <a:rPr sz="2000" b="1">
-                <a:solidFill>
-                  <a:srgbClr val="2563EB"/>
-                </a:solidFill>
-                <a:latin typeface="Calibri"/>
-              </a:rPr>
-              <a:t>•  </a:t>
-            </a:r>
-            <a:r>
-              <a:rPr sz="2000">
-                <a:solidFill>
-                  <a:srgbClr val="1F2937"/>
-                </a:solidFill>
-                <a:latin typeface="Calibri"/>
-              </a:rPr>
-              <a:t>Report includes the commit hash</a:t>
             </a:r>
           </a:p>
         </p:txBody>
       </p:sp>
       <p:pic>
         <p:nvPicPr>
-          <p:cNvPr id="9" name="Picture 8" descr="task_dispatch.png"/>
+          <p:cNvPr id="8" name="Picture 7" descr="me_vs_ai.png"/>
           <p:cNvPicPr>
             <a:picLocks noChangeAspect="1"/>
           </p:cNvPicPr>
@@ -6354,8 +5889,8 @@
         </p:blipFill>
         <p:spPr>
           <a:xfrm>
-            <a:off x="1892189" y="3611880"/>
-            <a:ext cx="8407315" cy="2743200"/>
+            <a:off x="838047" y="1645920"/>
+            <a:ext cx="10515600" cy="4299044"/>
           </a:xfrm>
           <a:prstGeom prst="rect">
             <a:avLst/>
@@ -6433,7 +5968,7 @@
         <p:spPr>
           <a:xfrm>
             <a:off x="502920" y="256032"/>
-            <a:ext cx="11185855" cy="320040"/>
+            <a:ext cx="11183112" cy="320040"/>
           </a:xfrm>
           <a:prstGeom prst="rect">
             <a:avLst/>
@@ -6441,16 +5976,11 @@
           <a:noFill/>
         </p:spPr>
         <p:txBody>
-          <a:bodyPr wrap="square" anchor="t">
+          <a:bodyPr wrap="square" lIns="0" rIns="0" tIns="0" bIns="0">
             <a:spAutoFit/>
           </a:bodyPr>
           <a:lstStyle/>
           <a:p>
-            <a:pPr algn="l">
-              <a:lnSpc>
-                <a:spcPct val="115000"/>
-              </a:lnSpc>
-            </a:pPr>
             <a:r>
               <a:rPr sz="1300" b="1" i="0">
                 <a:solidFill>
@@ -6458,7 +5988,7 @@
                 </a:solidFill>
                 <a:latin typeface="Calibri"/>
               </a:rPr>
-              <a:t>PART 3 — THE METHODOLOGY</a:t>
+              <a:t>PART 4 — RESULTS AND IMPLICATIONS</a:t>
             </a:r>
           </a:p>
         </p:txBody>
@@ -6472,7 +6002,7 @@
         <p:spPr>
           <a:xfrm>
             <a:off x="502920" y="566928"/>
-            <a:ext cx="11185855" cy="822960"/>
+            <a:ext cx="11183112" cy="822960"/>
           </a:xfrm>
           <a:prstGeom prst="rect">
             <a:avLst/>
@@ -6480,16 +6010,11 @@
           <a:noFill/>
         </p:spPr>
         <p:txBody>
-          <a:bodyPr wrap="square" anchor="t">
+          <a:bodyPr wrap="square" lIns="0" rIns="0" tIns="0" bIns="0">
             <a:spAutoFit/>
           </a:bodyPr>
           <a:lstStyle/>
           <a:p>
-            <a:pPr algn="l">
-              <a:lnSpc>
-                <a:spcPct val="115000"/>
-              </a:lnSpc>
-            </a:pPr>
             <a:r>
               <a:rPr sz="3200" b="1" i="0">
                 <a:solidFill>
@@ -6497,7 +6022,7 @@
                 </a:solidFill>
                 <a:latin typeface="Calibri"/>
               </a:rPr>
-              <a:t>Automated Code Review + Self-Correction</a:t>
+              <a:t>Results and Lessons</a:t>
             </a:r>
           </a:p>
         </p:txBody>
@@ -6511,7 +6036,7 @@
         <p:spPr>
           <a:xfrm>
             <a:off x="502920" y="1371600"/>
-            <a:ext cx="11185855" cy="20116"/>
+            <a:ext cx="11183112" cy="18288"/>
           </a:xfrm>
           <a:prstGeom prst="rect">
             <a:avLst/>
@@ -6563,16 +6088,11 @@
           <a:noFill/>
         </p:spPr>
         <p:txBody>
-          <a:bodyPr wrap="square" anchor="t">
+          <a:bodyPr wrap="square" lIns="0" rIns="0" tIns="0" bIns="0">
             <a:spAutoFit/>
           </a:bodyPr>
           <a:lstStyle/>
           <a:p>
-            <a:pPr algn="l">
-              <a:lnSpc>
-                <a:spcPct val="115000"/>
-              </a:lnSpc>
-            </a:pPr>
             <a:r>
               <a:rPr sz="1100" b="0" i="0">
                 <a:solidFill>
@@ -6593,7 +6113,7 @@
         </p:nvSpPr>
         <p:spPr>
           <a:xfrm>
-            <a:off x="10728655" y="6400800"/>
+            <a:off x="10725912" y="6400800"/>
             <a:ext cx="1005840" cy="320040"/>
           </a:xfrm>
           <a:prstGeom prst="rect">
@@ -6602,16 +6122,12 @@
           <a:noFill/>
         </p:spPr>
         <p:txBody>
-          <a:bodyPr wrap="square" anchor="t">
+          <a:bodyPr wrap="square" lIns="0" rIns="0" tIns="0" bIns="0">
             <a:spAutoFit/>
           </a:bodyPr>
           <a:lstStyle/>
           <a:p>
-            <a:pPr algn="r">
-              <a:lnSpc>
-                <a:spcPct val="115000"/>
-              </a:lnSpc>
-            </a:pPr>
+            <a:pPr algn="r"/>
             <a:r>
               <a:rPr sz="1100" b="0" i="0">
                 <a:solidFill>
@@ -6633,7 +6149,7 @@
         <p:spPr>
           <a:xfrm>
             <a:off x="502920" y="1600200"/>
-            <a:ext cx="11185855" cy="1371600"/>
+            <a:ext cx="11183112" cy="1554480"/>
           </a:xfrm>
           <a:prstGeom prst="rect">
             <a:avLst/>
@@ -6641,21 +6157,21 @@
           <a:noFill/>
         </p:spPr>
         <p:txBody>
-          <a:bodyPr wrap="square">
+          <a:bodyPr wrap="square" lIns="0" rIns="0" tIns="0" bIns="0">
             <a:spAutoFit/>
           </a:bodyPr>
           <a:lstStyle/>
           <a:p>
             <a:pPr>
-              <a:lnSpc>
-                <a:spcPct val="115000"/>
-              </a:lnSpc>
+              <a:spcBef>
+                <a:spcPts val="0"/>
+              </a:spcBef>
               <a:spcAft>
-                <a:spcPts val="1000"/>
+                <a:spcPts val="600"/>
               </a:spcAft>
             </a:pPr>
             <a:r>
-              <a:rPr sz="2000" b="1">
+              <a:rPr sz="1900" b="1" i="0">
                 <a:solidFill>
                   <a:srgbClr val="2563EB"/>
                 </a:solidFill>
@@ -6664,26 +6180,26 @@
               <a:t>•  </a:t>
             </a:r>
             <a:r>
-              <a:rPr sz="2000">
+              <a:rPr sz="1900" b="0" i="0">
                 <a:solidFill>
                   <a:srgbClr val="1F2937"/>
                 </a:solidFill>
                 <a:latin typeface="Calibri"/>
               </a:rPr>
-              <a:t>Every diff reviewed: Critical / Important / Minor</a:t>
+              <a:t>A working, deployed platform. It fixes the OLE pain points.</a:t>
             </a:r>
           </a:p>
           <a:p>
             <a:pPr>
-              <a:lnSpc>
-                <a:spcPct val="115000"/>
-              </a:lnSpc>
+              <a:spcBef>
+                <a:spcPts val="0"/>
+              </a:spcBef>
               <a:spcAft>
-                <a:spcPts val="1000"/>
+                <a:spcPts val="600"/>
               </a:spcAft>
             </a:pPr>
             <a:r>
-              <a:rPr sz="2000" b="1">
+              <a:rPr sz="1900" b="1" i="0">
                 <a:solidFill>
                   <a:srgbClr val="2563EB"/>
                 </a:solidFill>
@@ -6692,219 +6208,97 @@
               <a:t>•  </a:t>
             </a:r>
             <a:r>
-              <a:rPr sz="2000">
+              <a:rPr sz="1900" b="0" i="0">
                 <a:solidFill>
                   <a:srgbClr val="1F2937"/>
                 </a:solidFill>
                 <a:latin typeface="Calibri"/>
               </a:rPr>
-              <a:t>Full-branch final review before merge</a:t>
-            </a:r>
-          </a:p>
-        </p:txBody>
-      </p:sp>
-      <p:sp>
-        <p:nvSpPr>
-          <p:cNvPr id="9" name="Rectangle 8"/>
-          <p:cNvSpPr/>
-          <p:nvPr/>
-        </p:nvSpPr>
-        <p:spPr>
-          <a:xfrm>
-            <a:off x="502920" y="3017520"/>
-            <a:ext cx="11185855" cy="2514600"/>
-          </a:xfrm>
-          <a:prstGeom prst="rect">
-            <a:avLst/>
-          </a:prstGeom>
-          <a:solidFill>
-            <a:srgbClr val="F3F4F6"/>
-          </a:solidFill>
-          <a:ln w="12700">
-            <a:solidFill>
-              <a:srgbClr val="E5E7EB"/>
-            </a:solidFill>
-          </a:ln>
-          <a:effectLst/>
-        </p:spPr>
-        <p:style>
-          <a:lnRef idx="1">
-            <a:schemeClr val="accent1"/>
-          </a:lnRef>
-          <a:fillRef idx="3">
-            <a:schemeClr val="accent1"/>
-          </a:fillRef>
-          <a:effectRef idx="2">
-            <a:schemeClr val="accent1"/>
-          </a:effectRef>
-          <a:fontRef idx="minor">
-            <a:schemeClr val="lt1"/>
-          </a:fontRef>
-        </p:style>
-        <p:txBody>
-          <a:bodyPr rtlCol="0" anchor="ctr"/>
-          <a:lstStyle/>
-          <a:p>
-            <a:pPr algn="ctr"/>
-          </a:p>
-        </p:txBody>
-      </p:sp>
-      <p:sp>
-        <p:nvSpPr>
-          <p:cNvPr id="10" name="TextBox 9"/>
-          <p:cNvSpPr txBox="1"/>
-          <p:nvPr/>
-        </p:nvSpPr>
-        <p:spPr>
-          <a:xfrm>
-            <a:off x="731520" y="3182112"/>
-            <a:ext cx="10728655" cy="2185416"/>
-          </a:xfrm>
-          <a:prstGeom prst="rect">
-            <a:avLst/>
-          </a:prstGeom>
-          <a:noFill/>
-        </p:spPr>
-        <p:txBody>
-          <a:bodyPr wrap="square">
-            <a:spAutoFit/>
-          </a:bodyPr>
-          <a:lstStyle/>
+              <a:t>Real numbers below, all green at every merge.</a:t>
+            </a:r>
+          </a:p>
           <a:p>
             <a:pPr>
-              <a:lnSpc>
-                <a:spcPct val="120000"/>
-              </a:lnSpc>
+              <a:spcBef>
+                <a:spcPts val="0"/>
+              </a:spcBef>
               <a:spcAft>
-                <a:spcPts val="400"/>
+                <a:spcPts val="600"/>
               </a:spcAft>
             </a:pPr>
             <a:r>
-              <a:rPr sz="1450" b="0">
-                <a:solidFill>
-                  <a:srgbClr val="6B7280"/>
-                </a:solidFill>
-                <a:latin typeface="Calibri"/>
-              </a:rPr>
-              <a:t>From the project's own SDD progress ledger:</a:t>
+              <a:rPr sz="1900" b="1" i="0">
+                <a:solidFill>
+                  <a:srgbClr val="2563EB"/>
+                </a:solidFill>
+                <a:latin typeface="Calibri"/>
+              </a:rPr>
+              <a:t>•  </a:t>
+            </a:r>
+            <a:r>
+              <a:rPr sz="1900" b="0" i="0">
+                <a:solidFill>
+                  <a:srgbClr val="1F2937"/>
+                </a:solidFill>
+                <a:latin typeface="Calibri"/>
+              </a:rPr>
+              <a:t>Lesson: the process has a cost, but it catches bugs before they ship.</a:t>
             </a:r>
           </a:p>
           <a:p>
             <a:pPr>
-              <a:lnSpc>
-                <a:spcPct val="120000"/>
-              </a:lnSpc>
+              <a:spcBef>
+                <a:spcPts val="0"/>
+              </a:spcBef>
               <a:spcAft>
-                <a:spcPts val="400"/>
+                <a:spcPts val="600"/>
               </a:spcAft>
             </a:pPr>
             <a:r>
-              <a:rPr sz="1450" b="0">
+              <a:rPr sz="1900" b="1" i="0">
+                <a:solidFill>
+                  <a:srgbClr val="2563EB"/>
+                </a:solidFill>
+                <a:latin typeface="Calibri"/>
+              </a:rPr>
+              <a:t>•  </a:t>
+            </a:r>
+            <a:r>
+              <a:rPr sz="1900" b="0" i="0">
                 <a:solidFill>
                   <a:srgbClr val="1F2937"/>
                 </a:solidFill>
                 <a:latin typeface="Calibri"/>
               </a:rPr>
-              <a:t/>
-            </a:r>
-          </a:p>
-          <a:p>
-            <a:pPr>
-              <a:lnSpc>
-                <a:spcPct val="120000"/>
-              </a:lnSpc>
-              <a:spcAft>
-                <a:spcPts val="400"/>
-              </a:spcAft>
-            </a:pPr>
-            <a:r>
-              <a:rPr sz="1450" b="0">
-                <a:solidFill>
-                  <a:srgbClr val="1F2937"/>
-                </a:solidFill>
-                <a:latin typeface="Calibri"/>
-              </a:rPr>
-              <a:t>“Task 4 fix-2 (self-fix, no dispatch): re-review of the concurrency</a:t>
-            </a:r>
-          </a:p>
-          <a:p>
-            <a:pPr>
-              <a:lnSpc>
-                <a:spcPct val="120000"/>
-              </a:lnSpc>
-              <a:spcAft>
-                <a:spcPts val="400"/>
-              </a:spcAft>
-            </a:pPr>
-            <a:r>
-              <a:rPr sz="1450" b="0">
-                <a:solidFill>
-                  <a:srgbClr val="1F2937"/>
-                </a:solidFill>
-                <a:latin typeface="Calibri"/>
-              </a:rPr>
-              <a:t>fix found a Critical bug — with IDENTITY generation, the new row's</a:t>
-            </a:r>
-          </a:p>
-          <a:p>
-            <a:pPr>
-              <a:lnSpc>
-                <a:spcPct val="120000"/>
-              </a:lnSpc>
-              <a:spcAft>
-                <a:spcPts val="400"/>
-              </a:spcAft>
-            </a:pPr>
-            <a:r>
-              <a:rPr sz="1450" b="0">
-                <a:solidFill>
-                  <a:srgbClr val="1F2937"/>
-                </a:solidFill>
-                <a:latin typeface="Calibri"/>
-              </a:rPr>
-              <a:t>INSERT ran before the flush of the old row's UPDATE... Fixed with</a:t>
-            </a:r>
-          </a:p>
-          <a:p>
-            <a:pPr>
-              <a:lnSpc>
-                <a:spcPct val="120000"/>
-              </a:lnSpc>
-              <a:spcAft>
-                <a:spcPts val="400"/>
-              </a:spcAft>
-            </a:pPr>
-            <a:r>
-              <a:rPr sz="1450" b="0">
-                <a:solidFill>
-                  <a:srgbClr val="1F2937"/>
-                </a:solidFill>
-                <a:latin typeface="Calibri"/>
-              </a:rPr>
-              <a:t>saveAndFlush(); added a real end-to-end integration test proving</a:t>
-            </a:r>
-          </a:p>
-          <a:p>
-            <a:pPr>
-              <a:lnSpc>
-                <a:spcPct val="120000"/>
-              </a:lnSpc>
-              <a:spcAft>
-                <a:spcPts val="400"/>
-              </a:spcAft>
-            </a:pPr>
-            <a:r>
-              <a:rPr sz="1450" b="0">
-                <a:solidFill>
-                  <a:srgbClr val="1F2937"/>
-                </a:solidFill>
-                <a:latin typeface="Calibri"/>
-              </a:rPr>
-              <a:t>double-submit works.”</a:t>
-            </a:r>
-          </a:p>
-        </p:txBody>
-      </p:sp>
+              <a:t>Future work: likes, profiles, and Python exercises [2][7].</a:t>
+            </a:r>
+          </a:p>
+        </p:txBody>
+      </p:sp>
+      <p:pic>
+        <p:nvPicPr>
+          <p:cNvPr id="9" name="Picture 8" descr="stats.png"/>
+          <p:cNvPicPr>
+            <a:picLocks noChangeAspect="1"/>
+          </p:cNvPicPr>
+          <p:nvPr/>
+        </p:nvPicPr>
+        <p:blipFill>
+          <a:blip r:embed="rId2"/>
+          <a:stretch>
+            <a:fillRect/>
+          </a:stretch>
+        </p:blipFill>
+        <p:spPr>
+          <a:xfrm>
+            <a:off x="838047" y="3383280"/>
+            <a:ext cx="10515600" cy="2722728"/>
+          </a:xfrm>
+          <a:prstGeom prst="rect">
+            <a:avLst/>
+          </a:prstGeom>
+        </p:spPr>
+      </p:pic>
     </p:spTree>
   </p:cSld>
   <p:clrMapOvr>
@@ -6932,13 +6326,13 @@
         <p:spPr>
           <a:xfrm>
             <a:off x="0" y="0"/>
-            <a:ext cx="12191695" cy="109728"/>
+            <a:ext cx="12191695" cy="6858000"/>
           </a:xfrm>
           <a:prstGeom prst="rect">
             <a:avLst/>
           </a:prstGeom>
           <a:solidFill>
-            <a:srgbClr val="2563EB"/>
+            <a:srgbClr val="0F172A"/>
           </a:solidFill>
           <a:ln>
             <a:noFill/>
@@ -6969,98 +6363,20 @@
       </p:sp>
       <p:sp>
         <p:nvSpPr>
-          <p:cNvPr id="3" name="TextBox 2"/>
-          <p:cNvSpPr txBox="1"/>
-          <p:nvPr/>
-        </p:nvSpPr>
-        <p:spPr>
-          <a:xfrm>
-            <a:off x="502920" y="256032"/>
-            <a:ext cx="11185855" cy="320040"/>
-          </a:xfrm>
-          <a:prstGeom prst="rect">
-            <a:avLst/>
-          </a:prstGeom>
-          <a:noFill/>
-        </p:spPr>
-        <p:txBody>
-          <a:bodyPr wrap="square" anchor="t">
-            <a:spAutoFit/>
-          </a:bodyPr>
-          <a:lstStyle/>
-          <a:p>
-            <a:pPr algn="l">
-              <a:lnSpc>
-                <a:spcPct val="115000"/>
-              </a:lnSpc>
-            </a:pPr>
-            <a:r>
-              <a:rPr sz="1300" b="1" i="0">
-                <a:solidFill>
-                  <a:srgbClr val="6B7280"/>
-                </a:solidFill>
-                <a:latin typeface="Calibri"/>
-              </a:rPr>
-              <a:t>PART 3 — THE METHODOLOGY</a:t>
-            </a:r>
-          </a:p>
-        </p:txBody>
-      </p:sp>
-      <p:sp>
-        <p:nvSpPr>
-          <p:cNvPr id="4" name="TextBox 3"/>
-          <p:cNvSpPr txBox="1"/>
-          <p:nvPr/>
-        </p:nvSpPr>
-        <p:spPr>
-          <a:xfrm>
-            <a:off x="502920" y="566928"/>
-            <a:ext cx="11185855" cy="822960"/>
-          </a:xfrm>
-          <a:prstGeom prst="rect">
-            <a:avLst/>
-          </a:prstGeom>
-          <a:noFill/>
-        </p:spPr>
-        <p:txBody>
-          <a:bodyPr wrap="square" anchor="t">
-            <a:spAutoFit/>
-          </a:bodyPr>
-          <a:lstStyle/>
-          <a:p>
-            <a:pPr algn="l">
-              <a:lnSpc>
-                <a:spcPct val="115000"/>
-              </a:lnSpc>
-            </a:pPr>
-            <a:r>
-              <a:rPr sz="3200" b="1" i="0">
-                <a:solidFill>
-                  <a:srgbClr val="1F2937"/>
-                </a:solidFill>
-                <a:latin typeface="Calibri"/>
-              </a:rPr>
-              <a:t>What I Did vs. What the Agent Did</a:t>
-            </a:r>
-          </a:p>
-        </p:txBody>
-      </p:sp>
-      <p:sp>
-        <p:nvSpPr>
-          <p:cNvPr id="5" name="Rectangle 4"/>
+          <p:cNvPr id="3" name="Rectangle 2"/>
           <p:cNvSpPr/>
           <p:nvPr/>
         </p:nvSpPr>
         <p:spPr>
           <a:xfrm>
-            <a:off x="502920" y="1371600"/>
-            <a:ext cx="11185855" cy="20116"/>
+            <a:off x="0" y="3429000"/>
+            <a:ext cx="12191695" cy="54864"/>
           </a:xfrm>
           <a:prstGeom prst="rect">
             <a:avLst/>
           </a:prstGeom>
           <a:solidFill>
-            <a:srgbClr val="E5E7EB"/>
+            <a:srgbClr val="2563EB"/>
           </a:solidFill>
           <a:ln>
             <a:noFill/>
@@ -7091,14 +6407,14 @@
       </p:sp>
       <p:sp>
         <p:nvSpPr>
-          <p:cNvPr id="6" name="TextBox 5"/>
+          <p:cNvPr id="4" name="TextBox 3"/>
           <p:cNvSpPr txBox="1"/>
           <p:nvPr/>
         </p:nvSpPr>
         <p:spPr>
           <a:xfrm>
-            <a:off x="502920" y="6400800"/>
-            <a:ext cx="5486400" cy="320040"/>
+            <a:off x="822960" y="2468880"/>
+            <a:ext cx="10515600" cy="914400"/>
           </a:xfrm>
           <a:prstGeom prst="rect">
             <a:avLst/>
@@ -7106,38 +6422,33 @@
           <a:noFill/>
         </p:spPr>
         <p:txBody>
-          <a:bodyPr wrap="square" anchor="t">
+          <a:bodyPr wrap="square" lIns="0" rIns="0" tIns="0" bIns="0">
             <a:spAutoFit/>
           </a:bodyPr>
           <a:lstStyle/>
           <a:p>
-            <a:pPr algn="l">
-              <a:lnSpc>
-                <a:spcPct val="115000"/>
-              </a:lnSpc>
-            </a:pPr>
-            <a:r>
-              <a:rPr sz="1100" b="0" i="0">
-                <a:solidFill>
-                  <a:srgbClr val="6B7280"/>
-                </a:solidFill>
-                <a:latin typeface="Calibri"/>
-              </a:rPr>
-              <a:t>Programming Learning Platform — Capstone</a:t>
-            </a:r>
-          </a:p>
-        </p:txBody>
-      </p:sp>
-      <p:sp>
-        <p:nvSpPr>
-          <p:cNvPr id="7" name="TextBox 6"/>
+            <a:r>
+              <a:rPr sz="4400" b="1" i="0">
+                <a:solidFill>
+                  <a:srgbClr val="FFFFFF"/>
+                </a:solidFill>
+                <a:latin typeface="Calibri"/>
+              </a:rPr>
+              <a:t>Thank You</a:t>
+            </a:r>
+          </a:p>
+        </p:txBody>
+      </p:sp>
+      <p:sp>
+        <p:nvSpPr>
+          <p:cNvPr id="5" name="TextBox 4"/>
           <p:cNvSpPr txBox="1"/>
           <p:nvPr/>
         </p:nvSpPr>
         <p:spPr>
           <a:xfrm>
-            <a:off x="10728655" y="6400800"/>
-            <a:ext cx="1005840" cy="320040"/>
+            <a:off x="822960" y="3611880"/>
+            <a:ext cx="10515600" cy="548640"/>
           </a:xfrm>
           <a:prstGeom prst="rect">
             <a:avLst/>
@@ -7145,459 +6456,19 @@
           <a:noFill/>
         </p:spPr>
         <p:txBody>
-          <a:bodyPr wrap="square" anchor="t">
+          <a:bodyPr wrap="square" lIns="0" rIns="0" tIns="0" bIns="0">
             <a:spAutoFit/>
           </a:bodyPr>
           <a:lstStyle/>
           <a:p>
-            <a:pPr algn="r">
-              <a:lnSpc>
-                <a:spcPct val="115000"/>
-              </a:lnSpc>
-            </a:pPr>
-            <a:r>
-              <a:rPr sz="1100" b="0" i="0">
-                <a:solidFill>
-                  <a:srgbClr val="6B7280"/>
-                </a:solidFill>
-                <a:latin typeface="Calibri"/>
-              </a:rPr>
-              <a:t>14</a:t>
-            </a:r>
-          </a:p>
-        </p:txBody>
-      </p:sp>
-      <p:graphicFrame>
-        <p:nvGraphicFramePr>
-          <p:cNvPr id="8" name="Table 7"/>
-          <p:cNvGraphicFramePr>
-            <a:graphicFrameLocks noGrp="1"/>
-          </p:cNvGraphicFramePr>
-          <p:nvPr/>
-        </p:nvGraphicFramePr>
-        <p:xfrm>
-          <a:off x="502920" y="1691640"/>
-          <a:ext cx="11185854" cy="3200400"/>
-        </p:xfrm>
-        <a:graphic>
-          <a:graphicData uri="http://schemas.openxmlformats.org/drawingml/2006/table">
-            <a:tbl>
-              <a:tblPr firstRow="1" bandRow="1">
-                <a:tableStyleId>{5C22544A-7EE6-4342-B048-85BDC9FD1C3A}</a:tableStyleId>
-              </a:tblPr>
-              <a:tblGrid>
-                <a:gridCol w="5592927"/>
-                <a:gridCol w="5592927"/>
-              </a:tblGrid>
-              <a:tr h="457200">
-                <a:tc>
-                  <a:txBody>
-                    <a:bodyPr/>
-                    <a:lstStyle/>
-                    <a:p>
-                      <a:pPr algn="ctr"/>
-                      <a:r>
-                        <a:rPr sz="1800" b="1">
-                          <a:solidFill>
-                            <a:srgbClr val="FFFFFF"/>
-                          </a:solidFill>
-                          <a:latin typeface="Calibri"/>
-                        </a:rPr>
-                        <a:t>Claude (the Agent)</a:t>
-                      </a:r>
-                    </a:p>
-                  </a:txBody>
-                  <a:tcPr anchor="ctr">
-                    <a:solidFill>
-                      <a:srgbClr val="2563EB"/>
-                    </a:solidFill>
-                  </a:tcPr>
-                </a:tc>
-                <a:tc>
-                  <a:txBody>
-                    <a:bodyPr/>
-                    <a:lstStyle/>
-                    <a:p>
-                      <a:pPr algn="ctr"/>
-                      <a:r>
-                        <a:rPr sz="1800" b="1">
-                          <a:solidFill>
-                            <a:srgbClr val="FFFFFF"/>
-                          </a:solidFill>
-                          <a:latin typeface="Calibri"/>
-                        </a:rPr>
-                        <a:t>Me</a:t>
-                      </a:r>
-                    </a:p>
-                  </a:txBody>
-                  <a:tcPr anchor="ctr">
-                    <a:solidFill>
-                      <a:srgbClr val="1F2937"/>
-                    </a:solidFill>
-                  </a:tcPr>
-                </a:tc>
-              </a:tr>
-              <a:tr h="457200">
-                <a:tc>
-                  <a:txBody>
-                    <a:bodyPr wrap="square"/>
-                    <a:lstStyle/>
-                    <a:p>
-                      <a:r>
-                        <a:rPr sz="1450">
-                          <a:solidFill>
-                            <a:srgbClr val="1F2937"/>
-                          </a:solidFill>
-                          <a:latin typeface="Calibri"/>
-                        </a:rPr>
-                        <a:t>Wrote ~100% of the implementation code</a:t>
-                      </a:r>
-                    </a:p>
-                  </a:txBody>
-                  <a:tcPr anchor="ctr" marT="54864" marB="54864">
-                    <a:solidFill>
-                      <a:srgbClr val="FFFFFF"/>
-                    </a:solidFill>
-                  </a:tcPr>
-                </a:tc>
-                <a:tc>
-                  <a:txBody>
-                    <a:bodyPr wrap="square"/>
-                    <a:lstStyle/>
-                    <a:p>
-                      <a:r>
-                        <a:rPr sz="1450">
-                          <a:solidFill>
-                            <a:srgbClr val="1F2937"/>
-                          </a:solidFill>
-                          <a:latin typeface="Calibri"/>
-                        </a:rPr>
-                        <a:t>Identified the real OLE problem firsthand</a:t>
-                      </a:r>
-                    </a:p>
-                  </a:txBody>
-                  <a:tcPr anchor="ctr" marT="54864" marB="54864">
-                    <a:solidFill>
-                      <a:srgbClr val="FFFFFF"/>
-                    </a:solidFill>
-                  </a:tcPr>
-                </a:tc>
-              </a:tr>
-              <a:tr h="457200">
-                <a:tc>
-                  <a:txBody>
-                    <a:bodyPr wrap="square"/>
-                    <a:lstStyle/>
-                    <a:p>
-                      <a:r>
-                        <a:rPr sz="1450">
-                          <a:solidFill>
-                            <a:srgbClr val="1F2937"/>
-                          </a:solidFill>
-                          <a:latin typeface="Calibri"/>
-                        </a:rPr>
-                        <a:t>Drafted design docs/plans from my specs</a:t>
-                      </a:r>
-                    </a:p>
-                  </a:txBody>
-                  <a:tcPr anchor="ctr" marT="54864" marB="54864">
-                    <a:solidFill>
-                      <a:srgbClr val="F8FAFC"/>
-                    </a:solidFill>
-                  </a:tcPr>
-                </a:tc>
-                <a:tc>
-                  <a:txBody>
-                    <a:bodyPr wrap="square"/>
-                    <a:lstStyle/>
-                    <a:p>
-                      <a:r>
-                        <a:rPr sz="1450">
-                          <a:solidFill>
-                            <a:srgbClr val="1F2937"/>
-                          </a:solidFill>
-                          <a:latin typeface="Calibri"/>
-                        </a:rPr>
-                        <a:t>Wrote requirements — personas, acceptance criteria, edge cases</a:t>
-                      </a:r>
-                    </a:p>
-                  </a:txBody>
-                  <a:tcPr anchor="ctr" marT="54864" marB="54864">
-                    <a:solidFill>
-                      <a:srgbClr val="F8FAFC"/>
-                    </a:solidFill>
-                  </a:tcPr>
-                </a:tc>
-              </a:tr>
-              <a:tr h="457200">
-                <a:tc>
-                  <a:txBody>
-                    <a:bodyPr wrap="square"/>
-                    <a:lstStyle/>
-                    <a:p>
-                      <a:r>
-                        <a:rPr sz="1450">
-                          <a:solidFill>
-                            <a:srgbClr val="1F2937"/>
-                          </a:solidFill>
-                          <a:latin typeface="Calibri"/>
-                        </a:rPr>
-                        <a:t>Executed TDD steps, ran code review</a:t>
-                      </a:r>
-                    </a:p>
-                  </a:txBody>
-                  <a:tcPr anchor="ctr" marT="54864" marB="54864">
-                    <a:solidFill>
-                      <a:srgbClr val="FFFFFF"/>
-                    </a:solidFill>
-                  </a:tcPr>
-                </a:tc>
-                <a:tc>
-                  <a:txBody>
-                    <a:bodyPr wrap="square"/>
-                    <a:lstStyle/>
-                    <a:p>
-                      <a:r>
-                        <a:rPr sz="1450">
-                          <a:solidFill>
-                            <a:srgbClr val="1F2937"/>
-                          </a:solidFill>
-                          <a:latin typeface="Calibri"/>
-                        </a:rPr>
-                        <a:t>Made irreversible architecture &amp; scope calls</a:t>
-                      </a:r>
-                    </a:p>
-                  </a:txBody>
-                  <a:tcPr anchor="ctr" marT="54864" marB="54864">
-                    <a:solidFill>
-                      <a:srgbClr val="FFFFFF"/>
-                    </a:solidFill>
-                  </a:tcPr>
-                </a:tc>
-              </a:tr>
-              <a:tr h="457200">
-                <a:tc>
-                  <a:txBody>
-                    <a:bodyPr wrap="square"/>
-                    <a:lstStyle/>
-                    <a:p>
-                      <a:r>
-                        <a:rPr sz="1450">
-                          <a:solidFill>
-                            <a:srgbClr val="1F2937"/>
-                          </a:solidFill>
-                          <a:latin typeface="Calibri"/>
-                        </a:rPr>
-                        <a:t/>
-                      </a:r>
-                    </a:p>
-                  </a:txBody>
-                  <a:tcPr anchor="ctr" marT="54864" marB="54864">
-                    <a:solidFill>
-                      <a:srgbClr val="F8FAFC"/>
-                    </a:solidFill>
-                  </a:tcPr>
-                </a:tc>
-                <a:tc>
-                  <a:txBody>
-                    <a:bodyPr wrap="square"/>
-                    <a:lstStyle/>
-                    <a:p>
-                      <a:r>
-                        <a:rPr sz="1450">
-                          <a:solidFill>
-                            <a:srgbClr val="1F2937"/>
-                          </a:solidFill>
-                          <a:latin typeface="Calibri"/>
-                        </a:rPr>
-                        <a:t>Designed &amp; enforced this whole pipeline</a:t>
-                      </a:r>
-                    </a:p>
-                  </a:txBody>
-                  <a:tcPr anchor="ctr" marT="54864" marB="54864">
-                    <a:solidFill>
-                      <a:srgbClr val="F8FAFC"/>
-                    </a:solidFill>
-                  </a:tcPr>
-                </a:tc>
-              </a:tr>
-              <a:tr h="457200">
-                <a:tc>
-                  <a:txBody>
-                    <a:bodyPr wrap="square"/>
-                    <a:lstStyle/>
-                    <a:p>
-                      <a:r>
-                        <a:rPr sz="1450">
-                          <a:solidFill>
-                            <a:srgbClr val="1F2937"/>
-                          </a:solidFill>
-                          <a:latin typeface="Calibri"/>
-                        </a:rPr>
-                        <a:t/>
-                      </a:r>
-                    </a:p>
-                  </a:txBody>
-                  <a:tcPr anchor="ctr" marT="54864" marB="54864">
-                    <a:solidFill>
-                      <a:srgbClr val="FFFFFF"/>
-                    </a:solidFill>
-                  </a:tcPr>
-                </a:tc>
-                <a:tc>
-                  <a:txBody>
-                    <a:bodyPr wrap="square"/>
-                    <a:lstStyle/>
-                    <a:p>
-                      <a:r>
-                        <a:rPr sz="1450">
-                          <a:solidFill>
-                            <a:srgbClr val="1F2937"/>
-                          </a:solidFill>
-                          <a:latin typeface="Calibri"/>
-                        </a:rPr>
-                        <a:t>Resolved judgment calls the agent couldn't</a:t>
-                      </a:r>
-                    </a:p>
-                  </a:txBody>
-                  <a:tcPr anchor="ctr" marT="54864" marB="54864">
-                    <a:solidFill>
-                      <a:srgbClr val="FFFFFF"/>
-                    </a:solidFill>
-                  </a:tcPr>
-                </a:tc>
-              </a:tr>
-              <a:tr h="457200">
-                <a:tc>
-                  <a:txBody>
-                    <a:bodyPr wrap="square"/>
-                    <a:lstStyle/>
-                    <a:p>
-                      <a:r>
-                        <a:rPr sz="1450">
-                          <a:solidFill>
-                            <a:srgbClr val="1F2937"/>
-                          </a:solidFill>
-                          <a:latin typeface="Calibri"/>
-                        </a:rPr>
-                        <a:t/>
-                      </a:r>
-                    </a:p>
-                  </a:txBody>
-                  <a:tcPr anchor="ctr" marT="54864" marB="54864">
-                    <a:solidFill>
-                      <a:srgbClr val="F8FAFC"/>
-                    </a:solidFill>
-                  </a:tcPr>
-                </a:tc>
-                <a:tc>
-                  <a:txBody>
-                    <a:bodyPr wrap="square"/>
-                    <a:lstStyle/>
-                    <a:p>
-                      <a:r>
-                        <a:rPr sz="1450">
-                          <a:solidFill>
-                            <a:srgbClr val="1F2937"/>
-                          </a:solidFill>
-                          <a:latin typeface="Calibri"/>
-                        </a:rPr>
-                        <a:t>Owned final verification &amp; deployment</a:t>
-                      </a:r>
-                    </a:p>
-                  </a:txBody>
-                  <a:tcPr anchor="ctr" marT="54864" marB="54864">
-                    <a:solidFill>
-                      <a:srgbClr val="F8FAFC"/>
-                    </a:solidFill>
-                  </a:tcPr>
-                </a:tc>
-              </a:tr>
-            </a:tbl>
-          </a:graphicData>
-        </a:graphic>
-      </p:graphicFrame>
-      <p:sp>
-        <p:nvSpPr>
-          <p:cNvPr id="9" name="Rectangle 8"/>
-          <p:cNvSpPr/>
-          <p:nvPr/>
-        </p:nvSpPr>
-        <p:spPr>
-          <a:xfrm>
-            <a:off x="502920" y="5120640"/>
-            <a:ext cx="11185855" cy="1234440"/>
-          </a:xfrm>
-          <a:prstGeom prst="rect">
-            <a:avLst/>
-          </a:prstGeom>
-          <a:solidFill>
-            <a:srgbClr val="FFFBEB"/>
-          </a:solidFill>
-          <a:ln w="15875">
-            <a:solidFill>
-              <a:srgbClr val="D97706"/>
-            </a:solidFill>
-          </a:ln>
-          <a:effectLst/>
-        </p:spPr>
-        <p:style>
-          <a:lnRef idx="1">
-            <a:schemeClr val="accent1"/>
-          </a:lnRef>
-          <a:fillRef idx="3">
-            <a:schemeClr val="accent1"/>
-          </a:fillRef>
-          <a:effectRef idx="2">
-            <a:schemeClr val="accent1"/>
-          </a:effectRef>
-          <a:fontRef idx="minor">
-            <a:schemeClr val="lt1"/>
-          </a:fontRef>
-        </p:style>
-        <p:txBody>
-          <a:bodyPr rtlCol="0" anchor="ctr"/>
-          <a:lstStyle/>
-          <a:p>
-            <a:pPr algn="ctr"/>
-          </a:p>
-        </p:txBody>
-      </p:sp>
-      <p:sp>
-        <p:nvSpPr>
-          <p:cNvPr id="10" name="TextBox 9"/>
-          <p:cNvSpPr txBox="1"/>
-          <p:nvPr/>
-        </p:nvSpPr>
-        <p:spPr>
-          <a:xfrm>
-            <a:off x="731520" y="5230368"/>
-            <a:ext cx="10728655" cy="1051560"/>
-          </a:xfrm>
-          <a:prstGeom prst="rect">
-            <a:avLst/>
-          </a:prstGeom>
-          <a:noFill/>
-        </p:spPr>
-        <p:txBody>
-          <a:bodyPr wrap="square" anchor="t">
-            <a:spAutoFit/>
-          </a:bodyPr>
-          <a:lstStyle/>
-          <a:p>
-            <a:pPr algn="l">
-              <a:lnSpc>
-                <a:spcPct val="120000"/>
-              </a:lnSpc>
-            </a:pPr>
-            <a:r>
-              <a:rPr sz="1450" b="0" i="0">
-                <a:solidFill>
-                  <a:srgbClr val="1F2937"/>
-                </a:solidFill>
-                <a:latin typeface="Calibri"/>
-              </a:rPr>
-              <a:t>Concrete example: mid-implementation, the agent flagged that an old test assumed a field (batch_id) gets nulled on delete — no longer valid once deletion became soft-delete. It could surface the conflict, not resolve it. I decided to keep the field intact; the spec was corrected accordingly (commit efd8854).</a:t>
+            <a:r>
+              <a:rPr sz="2200" b="0" i="0">
+                <a:solidFill>
+                  <a:srgbClr val="93C5FD"/>
+                </a:solidFill>
+                <a:latin typeface="Calibri"/>
+              </a:rPr>
+              <a:t>Questions?</a:t>
             </a:r>
           </a:p>
         </p:txBody>
@@ -7673,7 +6544,7 @@
         <p:spPr>
           <a:xfrm>
             <a:off x="502920" y="256032"/>
-            <a:ext cx="11185855" cy="320040"/>
+            <a:ext cx="11183112" cy="320040"/>
           </a:xfrm>
           <a:prstGeom prst="rect">
             <a:avLst/>
@@ -7681,16 +6552,11 @@
           <a:noFill/>
         </p:spPr>
         <p:txBody>
-          <a:bodyPr wrap="square" anchor="t">
+          <a:bodyPr wrap="square" lIns="0" rIns="0" tIns="0" bIns="0">
             <a:spAutoFit/>
           </a:bodyPr>
           <a:lstStyle/>
           <a:p>
-            <a:pPr algn="l">
-              <a:lnSpc>
-                <a:spcPct val="115000"/>
-              </a:lnSpc>
-            </a:pPr>
             <a:r>
               <a:rPr sz="1300" b="1" i="0">
                 <a:solidFill>
@@ -7698,7 +6564,7 @@
                 </a:solidFill>
                 <a:latin typeface="Calibri"/>
               </a:rPr>
-              <a:t>PART 3 — THE METHODOLOGY</a:t>
+              <a:t>APPENDIX</a:t>
             </a:r>
           </a:p>
         </p:txBody>
@@ -7712,7 +6578,7 @@
         <p:spPr>
           <a:xfrm>
             <a:off x="502920" y="566928"/>
-            <a:ext cx="11185855" cy="822960"/>
+            <a:ext cx="11183112" cy="822960"/>
           </a:xfrm>
           <a:prstGeom prst="rect">
             <a:avLst/>
@@ -7720,16 +6586,11 @@
           <a:noFill/>
         </p:spPr>
         <p:txBody>
-          <a:bodyPr wrap="square" anchor="t">
+          <a:bodyPr wrap="square" lIns="0" rIns="0" tIns="0" bIns="0">
             <a:spAutoFit/>
           </a:bodyPr>
           <a:lstStyle/>
           <a:p>
-            <a:pPr algn="l">
-              <a:lnSpc>
-                <a:spcPct val="115000"/>
-              </a:lnSpc>
-            </a:pPr>
             <a:r>
               <a:rPr sz="3200" b="1" i="0">
                 <a:solidFill>
@@ -7737,7 +6598,7 @@
                 </a:solidFill>
                 <a:latin typeface="Calibri"/>
               </a:rPr>
-              <a:t>Why This Development Model Worked</a:t>
+              <a:t>References</a:t>
             </a:r>
           </a:p>
         </p:txBody>
@@ -7751,7 +6612,7 @@
         <p:spPr>
           <a:xfrm>
             <a:off x="502920" y="1371600"/>
-            <a:ext cx="11185855" cy="20116"/>
+            <a:ext cx="11183112" cy="18288"/>
           </a:xfrm>
           <a:prstGeom prst="rect">
             <a:avLst/>
@@ -7803,16 +6664,11 @@
           <a:noFill/>
         </p:spPr>
         <p:txBody>
-          <a:bodyPr wrap="square" anchor="t">
+          <a:bodyPr wrap="square" lIns="0" rIns="0" tIns="0" bIns="0">
             <a:spAutoFit/>
           </a:bodyPr>
           <a:lstStyle/>
           <a:p>
-            <a:pPr algn="l">
-              <a:lnSpc>
-                <a:spcPct val="115000"/>
-              </a:lnSpc>
-            </a:pPr>
             <a:r>
               <a:rPr sz="1100" b="0" i="0">
                 <a:solidFill>
@@ -7833,7 +6689,7 @@
         </p:nvSpPr>
         <p:spPr>
           <a:xfrm>
-            <a:off x="10728655" y="6400800"/>
+            <a:off x="10725912" y="6400800"/>
             <a:ext cx="1005840" cy="320040"/>
           </a:xfrm>
           <a:prstGeom prst="rect">
@@ -7842,16 +6698,12 @@
           <a:noFill/>
         </p:spPr>
         <p:txBody>
-          <a:bodyPr wrap="square" anchor="t">
+          <a:bodyPr wrap="square" lIns="0" rIns="0" tIns="0" bIns="0">
             <a:spAutoFit/>
           </a:bodyPr>
           <a:lstStyle/>
           <a:p>
-            <a:pPr algn="r">
-              <a:lnSpc>
-                <a:spcPct val="115000"/>
-              </a:lnSpc>
-            </a:pPr>
+            <a:pPr algn="r"/>
             <a:r>
               <a:rPr sz="1100" b="0" i="0">
                 <a:solidFill>
@@ -7872,8 +6724,8 @@
         </p:nvSpPr>
         <p:spPr>
           <a:xfrm>
-            <a:off x="502920" y="1645920"/>
-            <a:ext cx="5410047" cy="4663440"/>
+            <a:off x="502920" y="1600200"/>
+            <a:ext cx="11183112" cy="4572000"/>
           </a:xfrm>
           <a:prstGeom prst="rect">
             <a:avLst/>
@@ -7881,1569 +6733,200 @@
           <a:noFill/>
         </p:spPr>
         <p:txBody>
-          <a:bodyPr wrap="square">
+          <a:bodyPr wrap="square" lIns="0" rIns="0" tIns="0" bIns="0">
             <a:spAutoFit/>
           </a:bodyPr>
           <a:lstStyle/>
           <a:p>
             <a:pPr>
-              <a:lnSpc>
-                <a:spcPct val="115000"/>
-              </a:lnSpc>
               <a:spcAft>
-                <a:spcPts val="1400"/>
+                <a:spcPts val="400"/>
               </a:spcAft>
             </a:pPr>
             <a:r>
-              <a:rPr sz="1700" b="1">
-                <a:solidFill>
-                  <a:srgbClr val="059669"/>
-                </a:solidFill>
-                <a:latin typeface="Calibri"/>
-              </a:rPr>
-              <a:t>1.  </a:t>
-            </a:r>
-            <a:r>
-              <a:rPr sz="1700">
+              <a:rPr sz="1500" b="0" i="0">
                 <a:solidFill>
                   <a:srgbClr val="1F2937"/>
                 </a:solidFill>
                 <a:latin typeface="Calibri"/>
               </a:rPr>
-              <a:t>Deep involvement in every ambiguous decision</a:t>
+              <a:t>[1] Baeldung. (2024). Monitor a Spring Boot app using Prometheus.</a:t>
             </a:r>
           </a:p>
           <a:p>
             <a:pPr>
-              <a:lnSpc>
-                <a:spcPct val="115000"/>
-              </a:lnSpc>
               <a:spcAft>
-                <a:spcPts val="1400"/>
+                <a:spcPts val="400"/>
               </a:spcAft>
             </a:pPr>
             <a:r>
-              <a:rPr sz="1700" b="1">
-                <a:solidFill>
-                  <a:srgbClr val="059669"/>
-                </a:solidFill>
-                <a:latin typeface="Calibri"/>
-              </a:rPr>
-              <a:t>2.  </a:t>
-            </a:r>
-            <a:r>
-              <a:rPr sz="1700">
+              <a:rPr sz="1500" b="0" i="0">
                 <a:solidFill>
                   <a:srgbClr val="1F2937"/>
                 </a:solidFill>
                 <a:latin typeface="Calibri"/>
               </a:rPr>
-              <a:t>CLAUDE.md actively maintained, not written once</a:t>
+              <a:t>[2] Codecademy. (2024). Learn Python 3.</a:t>
             </a:r>
           </a:p>
           <a:p>
             <a:pPr>
-              <a:lnSpc>
-                <a:spcPct val="115000"/>
-              </a:lnSpc>
               <a:spcAft>
-                <a:spcPts val="1400"/>
+                <a:spcPts val="400"/>
               </a:spcAft>
             </a:pPr>
             <a:r>
-              <a:rPr sz="1700" b="1">
-                <a:solidFill>
-                  <a:srgbClr val="059669"/>
-                </a:solidFill>
-                <a:latin typeface="Calibri"/>
-              </a:rPr>
-              <a:t>3.  </a:t>
-            </a:r>
-            <a:r>
-              <a:rPr sz="1700">
+              <a:rPr sz="1500" b="0" i="0">
                 <a:solidFill>
                   <a:srgbClr val="1F2937"/>
                 </a:solidFill>
                 <a:latin typeface="Calibri"/>
               </a:rPr>
-              <a:t>Explicit “Red Lines” remove entire risk categories</a:t>
+              <a:t>[3] DZone. (2021). JGit library examples in Java.</a:t>
             </a:r>
           </a:p>
           <a:p>
             <a:pPr>
-              <a:lnSpc>
-                <a:spcPct val="115000"/>
-              </a:lnSpc>
               <a:spcAft>
-                <a:spcPts val="1400"/>
+                <a:spcPts val="400"/>
               </a:spcAft>
             </a:pPr>
             <a:r>
-              <a:rPr sz="1700" b="1">
-                <a:solidFill>
-                  <a:srgbClr val="059669"/>
-                </a:solidFill>
-                <a:latin typeface="Calibri"/>
-              </a:rPr>
-              <a:t>4.  </a:t>
-            </a:r>
-            <a:r>
-              <a:rPr sz="1700">
+              <a:rPr sz="1500" b="0" i="0">
                 <a:solidFill>
                   <a:srgbClr val="1F2937"/>
                 </a:solidFill>
                 <a:latin typeface="Calibri"/>
               </a:rPr>
-              <a:t>Large features → small, independently reviewed tasks</a:t>
-            </a:r>
-          </a:p>
-        </p:txBody>
-      </p:sp>
-      <p:sp>
-        <p:nvSpPr>
-          <p:cNvPr id="9" name="TextBox 8"/>
-          <p:cNvSpPr txBox="1"/>
-          <p:nvPr/>
-        </p:nvSpPr>
-        <p:spPr>
-          <a:xfrm>
-            <a:off x="6278727" y="1645920"/>
-            <a:ext cx="5410047" cy="4663440"/>
-          </a:xfrm>
-          <a:prstGeom prst="rect">
-            <a:avLst/>
-          </a:prstGeom>
-          <a:noFill/>
-        </p:spPr>
-        <p:txBody>
-          <a:bodyPr wrap="square">
-            <a:spAutoFit/>
-          </a:bodyPr>
-          <a:lstStyle/>
+              <a:t>[4] EduBlocks. (2024). Block-based coding to text-based Python.</a:t>
+            </a:r>
+          </a:p>
           <a:p>
             <a:pPr>
-              <a:lnSpc>
-                <a:spcPct val="115000"/>
-              </a:lnSpc>
               <a:spcAft>
-                <a:spcPts val="1400"/>
+                <a:spcPts val="400"/>
               </a:spcAft>
             </a:pPr>
             <a:r>
-              <a:rPr sz="1700" b="1">
-                <a:solidFill>
-                  <a:srgbClr val="059669"/>
-                </a:solidFill>
-                <a:latin typeface="Calibri"/>
-              </a:rPr>
-              <a:t>5.  </a:t>
-            </a:r>
-            <a:r>
-              <a:rPr sz="1700">
+              <a:rPr sz="1500" b="0" i="0">
                 <a:solidFill>
                   <a:srgbClr val="1F2937"/>
                 </a:solidFill>
                 <a:latin typeface="Calibri"/>
               </a:rPr>
-              <a:t>TDD evidence required at every checkpoint</a:t>
+              <a:t>[5] Google for Developers. (2025). Save and load (Blockly serialization).</a:t>
             </a:r>
           </a:p>
           <a:p>
             <a:pPr>
-              <a:lnSpc>
-                <a:spcPct val="115000"/>
-              </a:lnSpc>
               <a:spcAft>
-                <a:spcPts val="1400"/>
+                <a:spcPts val="400"/>
               </a:spcAft>
             </a:pPr>
             <a:r>
-              <a:rPr sz="1700" b="1">
-                <a:solidFill>
-                  <a:srgbClr val="059669"/>
-                </a:solidFill>
-                <a:latin typeface="Calibri"/>
-              </a:rPr>
-              <a:t>6.  </a:t>
-            </a:r>
-            <a:r>
-              <a:rPr sz="1700">
+              <a:rPr sz="1500" b="0" i="0">
                 <a:solidFill>
                   <a:srgbClr val="1F2937"/>
                 </a:solidFill>
                 <a:latin typeface="Calibri"/>
               </a:rPr>
-              <a:t>Layered review — per-task + full-branch</a:t>
+              <a:t>[6] Google for Developers. (2025). Using Blockly APIs.</a:t>
             </a:r>
           </a:p>
           <a:p>
             <a:pPr>
-              <a:lnSpc>
-                <a:spcPct val="115000"/>
-              </a:lnSpc>
               <a:spcAft>
-                <a:spcPts val="1400"/>
+                <a:spcPts val="400"/>
               </a:spcAft>
             </a:pPr>
             <a:r>
-              <a:rPr sz="1700" b="1">
-                <a:solidFill>
-                  <a:srgbClr val="059669"/>
-                </a:solidFill>
-                <a:latin typeface="Calibri"/>
-              </a:rPr>
-              <a:t>7.  </a:t>
-            </a:r>
-            <a:r>
-              <a:rPr sz="1700">
+              <a:rPr sz="1500" b="0" i="0">
                 <a:solidFill>
                   <a:srgbClr val="1F2937"/>
                 </a:solidFill>
                 <a:latin typeface="Calibri"/>
               </a:rPr>
-              <a:t>Durable audit trail — nothing is tribal knowledge</a:t>
+              <a:t>[7] freeCodeCamp. (2024). Scientific computing with Python.</a:t>
             </a:r>
           </a:p>
           <a:p>
             <a:pPr>
-              <a:lnSpc>
-                <a:spcPct val="115000"/>
-              </a:lnSpc>
               <a:spcAft>
-                <a:spcPts val="1400"/>
+                <a:spcPts val="400"/>
               </a:spcAft>
             </a:pPr>
             <a:r>
-              <a:rPr sz="1700" b="1">
-                <a:solidFill>
-                  <a:srgbClr val="059669"/>
-                </a:solidFill>
-                <a:latin typeface="Calibri"/>
-              </a:rPr>
-              <a:t>8.  </a:t>
-            </a:r>
-            <a:r>
-              <a:rPr sz="1700">
+              <a:rPr sz="1500" b="0" i="0">
                 <a:solidFill>
                   <a:srgbClr val="1F2937"/>
                 </a:solidFill>
                 <a:latin typeface="Calibri"/>
               </a:rPr>
-              <a:t>Verified against the real deployed system</a:t>
-            </a:r>
-          </a:p>
-        </p:txBody>
-      </p:sp>
-    </p:spTree>
-  </p:cSld>
-  <p:clrMapOvr>
-    <a:masterClrMapping/>
-  </p:clrMapOvr>
-</p:sld>
-</file>
-
-<file path=ppt/slides/slide16.xml><?xml version="1.0" encoding="utf-8"?>
-<p:sld xmlns:a="http://schemas.openxmlformats.org/drawingml/2006/main" xmlns:p="http://schemas.openxmlformats.org/presentationml/2006/main" xmlns:r="http://schemas.openxmlformats.org/officeDocument/2006/relationships">
-  <p:cSld>
-    <p:spTree>
-      <p:nvGrpSpPr>
-        <p:cNvPr id="1" name=""/>
-        <p:cNvGrpSpPr/>
-        <p:nvPr/>
-      </p:nvGrpSpPr>
-      <p:grpSpPr/>
-      <p:sp>
-        <p:nvSpPr>
-          <p:cNvPr id="2" name="Rectangle 1"/>
-          <p:cNvSpPr/>
-          <p:nvPr/>
-        </p:nvSpPr>
-        <p:spPr>
-          <a:xfrm>
-            <a:off x="0" y="0"/>
-            <a:ext cx="12191695" cy="109728"/>
-          </a:xfrm>
-          <a:prstGeom prst="rect">
-            <a:avLst/>
-          </a:prstGeom>
-          <a:solidFill>
-            <a:srgbClr val="2563EB"/>
-          </a:solidFill>
-          <a:ln>
-            <a:noFill/>
-          </a:ln>
-          <a:effectLst/>
-        </p:spPr>
-        <p:style>
-          <a:lnRef idx="1">
-            <a:schemeClr val="accent1"/>
-          </a:lnRef>
-          <a:fillRef idx="3">
-            <a:schemeClr val="accent1"/>
-          </a:fillRef>
-          <a:effectRef idx="2">
-            <a:schemeClr val="accent1"/>
-          </a:effectRef>
-          <a:fontRef idx="minor">
-            <a:schemeClr val="lt1"/>
-          </a:fontRef>
-        </p:style>
-        <p:txBody>
-          <a:bodyPr rtlCol="0" anchor="ctr"/>
-          <a:lstStyle/>
-          <a:p>
-            <a:pPr algn="ctr"/>
-          </a:p>
-        </p:txBody>
-      </p:sp>
-      <p:sp>
-        <p:nvSpPr>
-          <p:cNvPr id="3" name="TextBox 2"/>
-          <p:cNvSpPr txBox="1"/>
-          <p:nvPr/>
-        </p:nvSpPr>
-        <p:spPr>
-          <a:xfrm>
-            <a:off x="502920" y="256032"/>
-            <a:ext cx="11185855" cy="320040"/>
-          </a:xfrm>
-          <a:prstGeom prst="rect">
-            <a:avLst/>
-          </a:prstGeom>
-          <a:noFill/>
-        </p:spPr>
-        <p:txBody>
-          <a:bodyPr wrap="square" anchor="t">
-            <a:spAutoFit/>
-          </a:bodyPr>
-          <a:lstStyle/>
-          <a:p>
-            <a:pPr algn="l">
-              <a:lnSpc>
-                <a:spcPct val="115000"/>
-              </a:lnSpc>
-            </a:pPr>
-            <a:r>
-              <a:rPr sz="1300" b="1" i="0">
-                <a:solidFill>
-                  <a:srgbClr val="6B7280"/>
-                </a:solidFill>
-                <a:latin typeface="Calibri"/>
-              </a:rPr>
-              <a:t>PART 4 — RESULTS AND IMPLICATIONS</a:t>
-            </a:r>
-          </a:p>
-        </p:txBody>
-      </p:sp>
-      <p:sp>
-        <p:nvSpPr>
-          <p:cNvPr id="4" name="TextBox 3"/>
-          <p:cNvSpPr txBox="1"/>
-          <p:nvPr/>
-        </p:nvSpPr>
-        <p:spPr>
-          <a:xfrm>
-            <a:off x="502920" y="566928"/>
-            <a:ext cx="11185855" cy="822960"/>
-          </a:xfrm>
-          <a:prstGeom prst="rect">
-            <a:avLst/>
-          </a:prstGeom>
-          <a:noFill/>
-        </p:spPr>
-        <p:txBody>
-          <a:bodyPr wrap="square" anchor="t">
-            <a:spAutoFit/>
-          </a:bodyPr>
-          <a:lstStyle/>
-          <a:p>
-            <a:pPr algn="l">
-              <a:lnSpc>
-                <a:spcPct val="115000"/>
-              </a:lnSpc>
-            </a:pPr>
-            <a:r>
-              <a:rPr sz="3200" b="1" i="0">
-                <a:solidFill>
-                  <a:srgbClr val="1F2937"/>
-                </a:solidFill>
-                <a:latin typeface="Calibri"/>
-              </a:rPr>
-              <a:t>Results in Numbers</a:t>
-            </a:r>
-          </a:p>
-        </p:txBody>
-      </p:sp>
-      <p:sp>
-        <p:nvSpPr>
-          <p:cNvPr id="5" name="Rectangle 4"/>
-          <p:cNvSpPr/>
-          <p:nvPr/>
-        </p:nvSpPr>
-        <p:spPr>
-          <a:xfrm>
-            <a:off x="502920" y="1371600"/>
-            <a:ext cx="11185855" cy="20116"/>
-          </a:xfrm>
-          <a:prstGeom prst="rect">
-            <a:avLst/>
-          </a:prstGeom>
-          <a:solidFill>
-            <a:srgbClr val="E5E7EB"/>
-          </a:solidFill>
-          <a:ln>
-            <a:noFill/>
-          </a:ln>
-          <a:effectLst/>
-        </p:spPr>
-        <p:style>
-          <a:lnRef idx="1">
-            <a:schemeClr val="accent1"/>
-          </a:lnRef>
-          <a:fillRef idx="3">
-            <a:schemeClr val="accent1"/>
-          </a:fillRef>
-          <a:effectRef idx="2">
-            <a:schemeClr val="accent1"/>
-          </a:effectRef>
-          <a:fontRef idx="minor">
-            <a:schemeClr val="lt1"/>
-          </a:fontRef>
-        </p:style>
-        <p:txBody>
-          <a:bodyPr rtlCol="0" anchor="ctr"/>
-          <a:lstStyle/>
-          <a:p>
-            <a:pPr algn="ctr"/>
-          </a:p>
-        </p:txBody>
-      </p:sp>
-      <p:sp>
-        <p:nvSpPr>
-          <p:cNvPr id="6" name="TextBox 5"/>
-          <p:cNvSpPr txBox="1"/>
-          <p:nvPr/>
-        </p:nvSpPr>
-        <p:spPr>
-          <a:xfrm>
-            <a:off x="502920" y="6400800"/>
-            <a:ext cx="5486400" cy="320040"/>
-          </a:xfrm>
-          <a:prstGeom prst="rect">
-            <a:avLst/>
-          </a:prstGeom>
-          <a:noFill/>
-        </p:spPr>
-        <p:txBody>
-          <a:bodyPr wrap="square" anchor="t">
-            <a:spAutoFit/>
-          </a:bodyPr>
-          <a:lstStyle/>
-          <a:p>
-            <a:pPr algn="l">
-              <a:lnSpc>
-                <a:spcPct val="115000"/>
-              </a:lnSpc>
-            </a:pPr>
-            <a:r>
-              <a:rPr sz="1100" b="0" i="0">
-                <a:solidFill>
-                  <a:srgbClr val="6B7280"/>
-                </a:solidFill>
-                <a:latin typeface="Calibri"/>
-              </a:rPr>
-              <a:t>Programming Learning Platform — Capstone</a:t>
-            </a:r>
-          </a:p>
-        </p:txBody>
-      </p:sp>
-      <p:sp>
-        <p:nvSpPr>
-          <p:cNvPr id="7" name="TextBox 6"/>
-          <p:cNvSpPr txBox="1"/>
-          <p:nvPr/>
-        </p:nvSpPr>
-        <p:spPr>
-          <a:xfrm>
-            <a:off x="10728655" y="6400800"/>
-            <a:ext cx="1005840" cy="320040"/>
-          </a:xfrm>
-          <a:prstGeom prst="rect">
-            <a:avLst/>
-          </a:prstGeom>
-          <a:noFill/>
-        </p:spPr>
-        <p:txBody>
-          <a:bodyPr wrap="square" anchor="t">
-            <a:spAutoFit/>
-          </a:bodyPr>
-          <a:lstStyle/>
-          <a:p>
-            <a:pPr algn="r">
-              <a:lnSpc>
-                <a:spcPct val="115000"/>
-              </a:lnSpc>
-            </a:pPr>
-            <a:r>
-              <a:rPr sz="1100" b="0" i="0">
-                <a:solidFill>
-                  <a:srgbClr val="6B7280"/>
-                </a:solidFill>
-                <a:latin typeface="Calibri"/>
-              </a:rPr>
-              <a:t>16</a:t>
-            </a:r>
-          </a:p>
-        </p:txBody>
-      </p:sp>
-      <p:pic>
-        <p:nvPicPr>
-          <p:cNvPr id="8" name="Picture 7" descr="stats.png"/>
-          <p:cNvPicPr>
-            <a:picLocks noChangeAspect="1"/>
-          </p:cNvPicPr>
-          <p:nvPr/>
-        </p:nvPicPr>
-        <p:blipFill>
-          <a:blip r:embed="rId2"/>
-          <a:stretch>
-            <a:fillRect/>
-          </a:stretch>
-        </p:blipFill>
-        <p:spPr>
-          <a:xfrm>
-            <a:off x="640080" y="1600200"/>
-            <a:ext cx="10911535" cy="3747144"/>
-          </a:xfrm>
-          <a:prstGeom prst="rect">
-            <a:avLst/>
-          </a:prstGeom>
-        </p:spPr>
-      </p:pic>
-    </p:spTree>
-  </p:cSld>
-  <p:clrMapOvr>
-    <a:masterClrMapping/>
-  </p:clrMapOvr>
-</p:sld>
-</file>
-
-<file path=ppt/slides/slide17.xml><?xml version="1.0" encoding="utf-8"?>
-<p:sld xmlns:a="http://schemas.openxmlformats.org/drawingml/2006/main" xmlns:p="http://schemas.openxmlformats.org/presentationml/2006/main" xmlns:r="http://schemas.openxmlformats.org/officeDocument/2006/relationships">
-  <p:cSld>
-    <p:spTree>
-      <p:nvGrpSpPr>
-        <p:cNvPr id="1" name=""/>
-        <p:cNvGrpSpPr/>
-        <p:nvPr/>
-      </p:nvGrpSpPr>
-      <p:grpSpPr/>
-      <p:sp>
-        <p:nvSpPr>
-          <p:cNvPr id="2" name="Rectangle 1"/>
-          <p:cNvSpPr/>
-          <p:nvPr/>
-        </p:nvSpPr>
-        <p:spPr>
-          <a:xfrm>
-            <a:off x="0" y="0"/>
-            <a:ext cx="12191695" cy="109728"/>
-          </a:xfrm>
-          <a:prstGeom prst="rect">
-            <a:avLst/>
-          </a:prstGeom>
-          <a:solidFill>
-            <a:srgbClr val="2563EB"/>
-          </a:solidFill>
-          <a:ln>
-            <a:noFill/>
-          </a:ln>
-          <a:effectLst/>
-        </p:spPr>
-        <p:style>
-          <a:lnRef idx="1">
-            <a:schemeClr val="accent1"/>
-          </a:lnRef>
-          <a:fillRef idx="3">
-            <a:schemeClr val="accent1"/>
-          </a:fillRef>
-          <a:effectRef idx="2">
-            <a:schemeClr val="accent1"/>
-          </a:effectRef>
-          <a:fontRef idx="minor">
-            <a:schemeClr val="lt1"/>
-          </a:fontRef>
-        </p:style>
-        <p:txBody>
-          <a:bodyPr rtlCol="0" anchor="ctr"/>
-          <a:lstStyle/>
-          <a:p>
-            <a:pPr algn="ctr"/>
-          </a:p>
-        </p:txBody>
-      </p:sp>
-      <p:sp>
-        <p:nvSpPr>
-          <p:cNvPr id="3" name="TextBox 2"/>
-          <p:cNvSpPr txBox="1"/>
-          <p:nvPr/>
-        </p:nvSpPr>
-        <p:spPr>
-          <a:xfrm>
-            <a:off x="502920" y="256032"/>
-            <a:ext cx="11185855" cy="320040"/>
-          </a:xfrm>
-          <a:prstGeom prst="rect">
-            <a:avLst/>
-          </a:prstGeom>
-          <a:noFill/>
-        </p:spPr>
-        <p:txBody>
-          <a:bodyPr wrap="square" anchor="t">
-            <a:spAutoFit/>
-          </a:bodyPr>
-          <a:lstStyle/>
-          <a:p>
-            <a:pPr algn="l">
-              <a:lnSpc>
-                <a:spcPct val="115000"/>
-              </a:lnSpc>
-            </a:pPr>
-            <a:r>
-              <a:rPr sz="1300" b="1" i="0">
-                <a:solidFill>
-                  <a:srgbClr val="6B7280"/>
-                </a:solidFill>
-                <a:latin typeface="Calibri"/>
-              </a:rPr>
-              <a:t>PART 4 — RESULTS AND IMPLICATIONS</a:t>
-            </a:r>
-          </a:p>
-        </p:txBody>
-      </p:sp>
-      <p:sp>
-        <p:nvSpPr>
-          <p:cNvPr id="4" name="TextBox 3"/>
-          <p:cNvSpPr txBox="1"/>
-          <p:nvPr/>
-        </p:nvSpPr>
-        <p:spPr>
-          <a:xfrm>
-            <a:off x="502920" y="566928"/>
-            <a:ext cx="11185855" cy="822960"/>
-          </a:xfrm>
-          <a:prstGeom prst="rect">
-            <a:avLst/>
-          </a:prstGeom>
-          <a:noFill/>
-        </p:spPr>
-        <p:txBody>
-          <a:bodyPr wrap="square" anchor="t">
-            <a:spAutoFit/>
-          </a:bodyPr>
-          <a:lstStyle/>
-          <a:p>
-            <a:pPr algn="l">
-              <a:lnSpc>
-                <a:spcPct val="115000"/>
-              </a:lnSpc>
-            </a:pPr>
-            <a:r>
-              <a:rPr sz="3200" b="1" i="0">
-                <a:solidFill>
-                  <a:srgbClr val="1F2937"/>
-                </a:solidFill>
-                <a:latin typeface="Calibri"/>
-              </a:rPr>
-              <a:t>Challenges &amp; Lessons Learned</a:t>
-            </a:r>
-          </a:p>
-        </p:txBody>
-      </p:sp>
-      <p:sp>
-        <p:nvSpPr>
-          <p:cNvPr id="5" name="Rectangle 4"/>
-          <p:cNvSpPr/>
-          <p:nvPr/>
-        </p:nvSpPr>
-        <p:spPr>
-          <a:xfrm>
-            <a:off x="502920" y="1371600"/>
-            <a:ext cx="11185855" cy="20116"/>
-          </a:xfrm>
-          <a:prstGeom prst="rect">
-            <a:avLst/>
-          </a:prstGeom>
-          <a:solidFill>
-            <a:srgbClr val="E5E7EB"/>
-          </a:solidFill>
-          <a:ln>
-            <a:noFill/>
-          </a:ln>
-          <a:effectLst/>
-        </p:spPr>
-        <p:style>
-          <a:lnRef idx="1">
-            <a:schemeClr val="accent1"/>
-          </a:lnRef>
-          <a:fillRef idx="3">
-            <a:schemeClr val="accent1"/>
-          </a:fillRef>
-          <a:effectRef idx="2">
-            <a:schemeClr val="accent1"/>
-          </a:effectRef>
-          <a:fontRef idx="minor">
-            <a:schemeClr val="lt1"/>
-          </a:fontRef>
-        </p:style>
-        <p:txBody>
-          <a:bodyPr rtlCol="0" anchor="ctr"/>
-          <a:lstStyle/>
-          <a:p>
-            <a:pPr algn="ctr"/>
-          </a:p>
-        </p:txBody>
-      </p:sp>
-      <p:sp>
-        <p:nvSpPr>
-          <p:cNvPr id="6" name="TextBox 5"/>
-          <p:cNvSpPr txBox="1"/>
-          <p:nvPr/>
-        </p:nvSpPr>
-        <p:spPr>
-          <a:xfrm>
-            <a:off x="502920" y="6400800"/>
-            <a:ext cx="5486400" cy="320040"/>
-          </a:xfrm>
-          <a:prstGeom prst="rect">
-            <a:avLst/>
-          </a:prstGeom>
-          <a:noFill/>
-        </p:spPr>
-        <p:txBody>
-          <a:bodyPr wrap="square" anchor="t">
-            <a:spAutoFit/>
-          </a:bodyPr>
-          <a:lstStyle/>
-          <a:p>
-            <a:pPr algn="l">
-              <a:lnSpc>
-                <a:spcPct val="115000"/>
-              </a:lnSpc>
-            </a:pPr>
-            <a:r>
-              <a:rPr sz="1100" b="0" i="0">
-                <a:solidFill>
-                  <a:srgbClr val="6B7280"/>
-                </a:solidFill>
-                <a:latin typeface="Calibri"/>
-              </a:rPr>
-              <a:t>Programming Learning Platform — Capstone</a:t>
-            </a:r>
-          </a:p>
-        </p:txBody>
-      </p:sp>
-      <p:sp>
-        <p:nvSpPr>
-          <p:cNvPr id="7" name="TextBox 6"/>
-          <p:cNvSpPr txBox="1"/>
-          <p:nvPr/>
-        </p:nvSpPr>
-        <p:spPr>
-          <a:xfrm>
-            <a:off x="10728655" y="6400800"/>
-            <a:ext cx="1005840" cy="320040"/>
-          </a:xfrm>
-          <a:prstGeom prst="rect">
-            <a:avLst/>
-          </a:prstGeom>
-          <a:noFill/>
-        </p:spPr>
-        <p:txBody>
-          <a:bodyPr wrap="square" anchor="t">
-            <a:spAutoFit/>
-          </a:bodyPr>
-          <a:lstStyle/>
-          <a:p>
-            <a:pPr algn="r">
-              <a:lnSpc>
-                <a:spcPct val="115000"/>
-              </a:lnSpc>
-            </a:pPr>
-            <a:r>
-              <a:rPr sz="1100" b="0" i="0">
-                <a:solidFill>
-                  <a:srgbClr val="6B7280"/>
-                </a:solidFill>
-                <a:latin typeface="Calibri"/>
-              </a:rPr>
-              <a:t>17</a:t>
-            </a:r>
-          </a:p>
-        </p:txBody>
-      </p:sp>
-      <p:sp>
-        <p:nvSpPr>
-          <p:cNvPr id="8" name="TextBox 7"/>
-          <p:cNvSpPr txBox="1"/>
-          <p:nvPr/>
-        </p:nvSpPr>
-        <p:spPr>
-          <a:xfrm>
-            <a:off x="502920" y="1600200"/>
-            <a:ext cx="11185855" cy="4709160"/>
-          </a:xfrm>
-          <a:prstGeom prst="rect">
-            <a:avLst/>
-          </a:prstGeom>
-          <a:noFill/>
-        </p:spPr>
-        <p:txBody>
-          <a:bodyPr wrap="square">
-            <a:spAutoFit/>
-          </a:bodyPr>
-          <a:lstStyle/>
+              <a:t>[8] Hermans, F. (2020). Hedy: A gradual language for programming education. ICER ’20.</a:t>
+            </a:r>
+          </a:p>
           <a:p>
             <a:pPr>
-              <a:lnSpc>
-                <a:spcPct val="115000"/>
-              </a:lnSpc>
               <a:spcAft>
-                <a:spcPts val="1000"/>
+                <a:spcPts val="400"/>
               </a:spcAft>
             </a:pPr>
             <a:r>
-              <a:rPr sz="2000" b="1">
-                <a:solidFill>
-                  <a:srgbClr val="2563EB"/>
-                </a:solidFill>
-                <a:latin typeface="Calibri"/>
-              </a:rPr>
-              <a:t>•  </a:t>
-            </a:r>
-            <a:r>
-              <a:rPr sz="2000">
+              <a:rPr sz="1500" b="0" i="0">
                 <a:solidFill>
                   <a:srgbClr val="1F2937"/>
                 </a:solidFill>
                 <a:latin typeface="Calibri"/>
               </a:rPr>
-              <a:t>Process didn't prevent every mistake — it caught them</a:t>
+              <a:t>[9] ignatandrei. (2024). BlocklyAutomation [software]. GitHub.</a:t>
             </a:r>
           </a:p>
           <a:p>
             <a:pPr>
-              <a:lnSpc>
-                <a:spcPct val="115000"/>
-              </a:lnSpc>
               <a:spcAft>
-                <a:spcPts val="1000"/>
+                <a:spcPts val="400"/>
               </a:spcAft>
             </a:pPr>
             <a:r>
-              <a:rPr sz="2000" b="1">
-                <a:solidFill>
-                  <a:srgbClr val="2563EB"/>
-                </a:solidFill>
-                <a:latin typeface="Calibri"/>
-              </a:rPr>
-              <a:t>•  </a:t>
-            </a:r>
-            <a:r>
-              <a:rPr sz="2000">
+              <a:rPr sz="1500" b="0" i="0">
                 <a:solidFill>
                   <a:srgbClr val="1F2937"/>
                 </a:solidFill>
                 <a:latin typeface="Calibri"/>
               </a:rPr>
-              <a:t>Real overhead: review + TDD slow down small changes</a:t>
+              <a:t>[10] Merkel, D. (2014). Docker: Lightweight Linux containers. Linux Journal.</a:t>
             </a:r>
           </a:p>
           <a:p>
             <a:pPr>
-              <a:lnSpc>
-                <a:spcPct val="115000"/>
-              </a:lnSpc>
               <a:spcAft>
-                <a:spcPts val="1000"/>
+                <a:spcPts val="400"/>
               </a:spcAft>
             </a:pPr>
             <a:r>
-              <a:rPr sz="2000" b="1">
-                <a:solidFill>
-                  <a:srgbClr val="2563EB"/>
-                </a:solidFill>
-                <a:latin typeface="Calibri"/>
-              </a:rPr>
-              <a:t>•  </a:t>
-            </a:r>
-            <a:r>
-              <a:rPr sz="2000">
+              <a:rPr sz="1500" b="0" i="0">
                 <a:solidFill>
                   <a:srgbClr val="1F2937"/>
                 </a:solidFill>
                 <a:latin typeface="Calibri"/>
               </a:rPr>
-              <a:t>Human bottleneck is deliberate, not accidental</a:t>
+              <a:t>[11] Open Roberta. (2024). Open Roberta Lab [software]. GitHub.</a:t>
             </a:r>
           </a:p>
           <a:p>
             <a:pPr>
-              <a:lnSpc>
-                <a:spcPct val="115000"/>
-              </a:lnSpc>
               <a:spcAft>
-                <a:spcPts val="1000"/>
+                <a:spcPts val="400"/>
               </a:spcAft>
             </a:pPr>
             <a:r>
-              <a:rPr sz="2000" b="1">
-                <a:solidFill>
-                  <a:srgbClr val="2563EB"/>
-                </a:solidFill>
-                <a:latin typeface="Calibri"/>
-              </a:rPr>
-              <a:t>•  </a:t>
-            </a:r>
-            <a:r>
-              <a:rPr sz="2000">
+              <a:rPr sz="1500" b="0" i="0">
                 <a:solidFill>
                   <a:srgbClr val="1F2937"/>
                 </a:solidFill>
                 <a:latin typeface="Calibri"/>
               </a:rPr>
-              <a:t>Knowing which calls can't be delegated is itself a skill</a:t>
-            </a:r>
-          </a:p>
-        </p:txBody>
-      </p:sp>
-    </p:spTree>
-  </p:cSld>
-  <p:clrMapOvr>
-    <a:masterClrMapping/>
-  </p:clrMapOvr>
-</p:sld>
-</file>
-
-<file path=ppt/slides/slide18.xml><?xml version="1.0" encoding="utf-8"?>
-<p:sld xmlns:a="http://schemas.openxmlformats.org/drawingml/2006/main" xmlns:p="http://schemas.openxmlformats.org/presentationml/2006/main" xmlns:r="http://schemas.openxmlformats.org/officeDocument/2006/relationships">
-  <p:cSld>
-    <p:spTree>
-      <p:nvGrpSpPr>
-        <p:cNvPr id="1" name=""/>
-        <p:cNvGrpSpPr/>
-        <p:nvPr/>
-      </p:nvGrpSpPr>
-      <p:grpSpPr/>
-      <p:sp>
-        <p:nvSpPr>
-          <p:cNvPr id="2" name="Rectangle 1"/>
-          <p:cNvSpPr/>
-          <p:nvPr/>
-        </p:nvSpPr>
-        <p:spPr>
-          <a:xfrm>
-            <a:off x="0" y="0"/>
-            <a:ext cx="12191695" cy="109728"/>
-          </a:xfrm>
-          <a:prstGeom prst="rect">
-            <a:avLst/>
-          </a:prstGeom>
-          <a:solidFill>
-            <a:srgbClr val="2563EB"/>
-          </a:solidFill>
-          <a:ln>
-            <a:noFill/>
-          </a:ln>
-          <a:effectLst/>
-        </p:spPr>
-        <p:style>
-          <a:lnRef idx="1">
-            <a:schemeClr val="accent1"/>
-          </a:lnRef>
-          <a:fillRef idx="3">
-            <a:schemeClr val="accent1"/>
-          </a:fillRef>
-          <a:effectRef idx="2">
-            <a:schemeClr val="accent1"/>
-          </a:effectRef>
-          <a:fontRef idx="minor">
-            <a:schemeClr val="lt1"/>
-          </a:fontRef>
-        </p:style>
-        <p:txBody>
-          <a:bodyPr rtlCol="0" anchor="ctr"/>
-          <a:lstStyle/>
-          <a:p>
-            <a:pPr algn="ctr"/>
-          </a:p>
-        </p:txBody>
-      </p:sp>
-      <p:sp>
-        <p:nvSpPr>
-          <p:cNvPr id="3" name="TextBox 2"/>
-          <p:cNvSpPr txBox="1"/>
-          <p:nvPr/>
-        </p:nvSpPr>
-        <p:spPr>
-          <a:xfrm>
-            <a:off x="502920" y="256032"/>
-            <a:ext cx="11185855" cy="320040"/>
-          </a:xfrm>
-          <a:prstGeom prst="rect">
-            <a:avLst/>
-          </a:prstGeom>
-          <a:noFill/>
-        </p:spPr>
-        <p:txBody>
-          <a:bodyPr wrap="square" anchor="t">
-            <a:spAutoFit/>
-          </a:bodyPr>
-          <a:lstStyle/>
-          <a:p>
-            <a:pPr algn="l">
-              <a:lnSpc>
-                <a:spcPct val="115000"/>
-              </a:lnSpc>
-            </a:pPr>
-            <a:r>
-              <a:rPr sz="1300" b="1" i="0">
-                <a:solidFill>
-                  <a:srgbClr val="6B7280"/>
-                </a:solidFill>
-                <a:latin typeface="Calibri"/>
-              </a:rPr>
-              <a:t>PART 4 — RESULTS AND IMPLICATIONS</a:t>
-            </a:r>
-          </a:p>
-        </p:txBody>
-      </p:sp>
-      <p:sp>
-        <p:nvSpPr>
-          <p:cNvPr id="4" name="TextBox 3"/>
-          <p:cNvSpPr txBox="1"/>
-          <p:nvPr/>
-        </p:nvSpPr>
-        <p:spPr>
-          <a:xfrm>
-            <a:off x="502920" y="566928"/>
-            <a:ext cx="11185855" cy="822960"/>
-          </a:xfrm>
-          <a:prstGeom prst="rect">
-            <a:avLst/>
-          </a:prstGeom>
-          <a:noFill/>
-        </p:spPr>
-        <p:txBody>
-          <a:bodyPr wrap="square" anchor="t">
-            <a:spAutoFit/>
-          </a:bodyPr>
-          <a:lstStyle/>
-          <a:p>
-            <a:pPr algn="l">
-              <a:lnSpc>
-                <a:spcPct val="115000"/>
-              </a:lnSpc>
-            </a:pPr>
-            <a:r>
-              <a:rPr sz="3200" b="1" i="0">
-                <a:solidFill>
-                  <a:srgbClr val="1F2937"/>
-                </a:solidFill>
-                <a:latin typeface="Calibri"/>
-              </a:rPr>
-              <a:t>Future Work &amp; Broader Implication</a:t>
-            </a:r>
-          </a:p>
-        </p:txBody>
-      </p:sp>
-      <p:sp>
-        <p:nvSpPr>
-          <p:cNvPr id="5" name="Rectangle 4"/>
-          <p:cNvSpPr/>
-          <p:nvPr/>
-        </p:nvSpPr>
-        <p:spPr>
-          <a:xfrm>
-            <a:off x="502920" y="1371600"/>
-            <a:ext cx="11185855" cy="20116"/>
-          </a:xfrm>
-          <a:prstGeom prst="rect">
-            <a:avLst/>
-          </a:prstGeom>
-          <a:solidFill>
-            <a:srgbClr val="E5E7EB"/>
-          </a:solidFill>
-          <a:ln>
-            <a:noFill/>
-          </a:ln>
-          <a:effectLst/>
-        </p:spPr>
-        <p:style>
-          <a:lnRef idx="1">
-            <a:schemeClr val="accent1"/>
-          </a:lnRef>
-          <a:fillRef idx="3">
-            <a:schemeClr val="accent1"/>
-          </a:fillRef>
-          <a:effectRef idx="2">
-            <a:schemeClr val="accent1"/>
-          </a:effectRef>
-          <a:fontRef idx="minor">
-            <a:schemeClr val="lt1"/>
-          </a:fontRef>
-        </p:style>
-        <p:txBody>
-          <a:bodyPr rtlCol="0" anchor="ctr"/>
-          <a:lstStyle/>
-          <a:p>
-            <a:pPr algn="ctr"/>
-          </a:p>
-        </p:txBody>
-      </p:sp>
-      <p:sp>
-        <p:nvSpPr>
-          <p:cNvPr id="6" name="TextBox 5"/>
-          <p:cNvSpPr txBox="1"/>
-          <p:nvPr/>
-        </p:nvSpPr>
-        <p:spPr>
-          <a:xfrm>
-            <a:off x="502920" y="6400800"/>
-            <a:ext cx="5486400" cy="320040"/>
-          </a:xfrm>
-          <a:prstGeom prst="rect">
-            <a:avLst/>
-          </a:prstGeom>
-          <a:noFill/>
-        </p:spPr>
-        <p:txBody>
-          <a:bodyPr wrap="square" anchor="t">
-            <a:spAutoFit/>
-          </a:bodyPr>
-          <a:lstStyle/>
-          <a:p>
-            <a:pPr algn="l">
-              <a:lnSpc>
-                <a:spcPct val="115000"/>
-              </a:lnSpc>
-            </a:pPr>
-            <a:r>
-              <a:rPr sz="1100" b="0" i="0">
-                <a:solidFill>
-                  <a:srgbClr val="6B7280"/>
-                </a:solidFill>
-                <a:latin typeface="Calibri"/>
-              </a:rPr>
-              <a:t>Programming Learning Platform — Capstone</a:t>
-            </a:r>
-          </a:p>
-        </p:txBody>
-      </p:sp>
-      <p:sp>
-        <p:nvSpPr>
-          <p:cNvPr id="7" name="TextBox 6"/>
-          <p:cNvSpPr txBox="1"/>
-          <p:nvPr/>
-        </p:nvSpPr>
-        <p:spPr>
-          <a:xfrm>
-            <a:off x="10728655" y="6400800"/>
-            <a:ext cx="1005840" cy="320040"/>
-          </a:xfrm>
-          <a:prstGeom prst="rect">
-            <a:avLst/>
-          </a:prstGeom>
-          <a:noFill/>
-        </p:spPr>
-        <p:txBody>
-          <a:bodyPr wrap="square" anchor="t">
-            <a:spAutoFit/>
-          </a:bodyPr>
-          <a:lstStyle/>
-          <a:p>
-            <a:pPr algn="r">
-              <a:lnSpc>
-                <a:spcPct val="115000"/>
-              </a:lnSpc>
-            </a:pPr>
-            <a:r>
-              <a:rPr sz="1100" b="0" i="0">
-                <a:solidFill>
-                  <a:srgbClr val="6B7280"/>
-                </a:solidFill>
-                <a:latin typeface="Calibri"/>
-              </a:rPr>
-              <a:t>18</a:t>
-            </a:r>
-          </a:p>
-        </p:txBody>
-      </p:sp>
-      <p:sp>
-        <p:nvSpPr>
-          <p:cNvPr id="8" name="TextBox 7"/>
-          <p:cNvSpPr txBox="1"/>
-          <p:nvPr/>
-        </p:nvSpPr>
-        <p:spPr>
-          <a:xfrm>
-            <a:off x="502920" y="1600200"/>
-            <a:ext cx="11185855" cy="4709160"/>
-          </a:xfrm>
-          <a:prstGeom prst="rect">
-            <a:avLst/>
-          </a:prstGeom>
-          <a:noFill/>
-        </p:spPr>
-        <p:txBody>
-          <a:bodyPr wrap="square">
-            <a:spAutoFit/>
-          </a:bodyPr>
-          <a:lstStyle/>
-          <a:p>
-            <a:pPr>
-              <a:lnSpc>
-                <a:spcPct val="115000"/>
-              </a:lnSpc>
-              <a:spcAft>
-                <a:spcPts val="1000"/>
-              </a:spcAft>
-            </a:pPr>
-            <a:r>
-              <a:rPr sz="2000" b="1">
-                <a:solidFill>
-                  <a:srgbClr val="2563EB"/>
-                </a:solidFill>
-                <a:latin typeface="Calibri"/>
-              </a:rPr>
-              <a:t>•  </a:t>
-            </a:r>
-            <a:r>
-              <a:rPr sz="2000">
-                <a:solidFill>
-                  <a:srgbClr val="1F2937"/>
-                </a:solidFill>
-                <a:latin typeface="Calibri"/>
-              </a:rPr>
-              <a:t>P1: Exercise Likes, Profile management</a:t>
-            </a:r>
-          </a:p>
-          <a:p>
-            <a:pPr>
-              <a:lnSpc>
-                <a:spcPct val="115000"/>
-              </a:lnSpc>
-              <a:spcAft>
-                <a:spcPts val="1000"/>
-              </a:spcAft>
-            </a:pPr>
-            <a:r>
-              <a:rPr sz="2000" b="1">
-                <a:solidFill>
-                  <a:srgbClr val="2563EB"/>
-                </a:solidFill>
-                <a:latin typeface="Calibri"/>
-              </a:rPr>
-              <a:t>•  </a:t>
-            </a:r>
-            <a:r>
-              <a:rPr sz="2000">
-                <a:solidFill>
-                  <a:srgbClr val="1F2937"/>
-                </a:solidFill>
-                <a:latin typeface="Calibri"/>
-              </a:rPr>
-              <a:t>Broader: this pattern generalizes beyond this project</a:t>
-            </a:r>
-          </a:p>
-          <a:p>
-            <a:pPr>
-              <a:lnSpc>
-                <a:spcPct val="115000"/>
-              </a:lnSpc>
-              <a:spcAft>
-                <a:spcPts val="1000"/>
-              </a:spcAft>
-            </a:pPr>
-            <a:r>
-              <a:rPr sz="2000" b="1">
-                <a:solidFill>
-                  <a:srgbClr val="2563EB"/>
-                </a:solidFill>
-                <a:latin typeface="Calibri"/>
-              </a:rPr>
-              <a:t>•  </a:t>
-            </a:r>
-            <a:r>
-              <a:rPr sz="2000">
-                <a:solidFill>
-                  <a:srgbClr val="1F2937"/>
-                </a:solidFill>
-                <a:latin typeface="Calibri"/>
-              </a:rPr>
-              <a:t>Candidate template for reliable AI-agent-built software</a:t>
-            </a:r>
-          </a:p>
-        </p:txBody>
-      </p:sp>
-    </p:spTree>
-  </p:cSld>
-  <p:clrMapOvr>
-    <a:masterClrMapping/>
-  </p:clrMapOvr>
-</p:sld>
-</file>
-
-<file path=ppt/slides/slide19.xml><?xml version="1.0" encoding="utf-8"?>
-<p:sld xmlns:a="http://schemas.openxmlformats.org/drawingml/2006/main" xmlns:p="http://schemas.openxmlformats.org/presentationml/2006/main" xmlns:r="http://schemas.openxmlformats.org/officeDocument/2006/relationships">
-  <p:cSld>
-    <p:spTree>
-      <p:nvGrpSpPr>
-        <p:cNvPr id="1" name=""/>
-        <p:cNvGrpSpPr/>
-        <p:nvPr/>
-      </p:nvGrpSpPr>
-      <p:grpSpPr/>
-      <p:sp>
-        <p:nvSpPr>
-          <p:cNvPr id="2" name="Rectangle 1"/>
-          <p:cNvSpPr/>
-          <p:nvPr/>
-        </p:nvSpPr>
-        <p:spPr>
-          <a:xfrm>
-            <a:off x="0" y="0"/>
-            <a:ext cx="12191695" cy="6858000"/>
-          </a:xfrm>
-          <a:prstGeom prst="rect">
-            <a:avLst/>
-          </a:prstGeom>
-          <a:solidFill>
-            <a:srgbClr val="FAFAFB"/>
-          </a:solidFill>
-          <a:ln>
-            <a:noFill/>
-          </a:ln>
-          <a:effectLst/>
-        </p:spPr>
-        <p:style>
-          <a:lnRef idx="1">
-            <a:schemeClr val="accent1"/>
-          </a:lnRef>
-          <a:fillRef idx="3">
-            <a:schemeClr val="accent1"/>
-          </a:fillRef>
-          <a:effectRef idx="2">
-            <a:schemeClr val="accent1"/>
-          </a:effectRef>
-          <a:fontRef idx="minor">
-            <a:schemeClr val="lt1"/>
-          </a:fontRef>
-        </p:style>
-        <p:txBody>
-          <a:bodyPr rtlCol="0" anchor="ctr"/>
-          <a:lstStyle/>
-          <a:p>
-            <a:pPr algn="ctr"/>
-          </a:p>
-        </p:txBody>
-      </p:sp>
-      <p:sp>
-        <p:nvSpPr>
-          <p:cNvPr id="3" name="Rectangle 2"/>
-          <p:cNvSpPr/>
-          <p:nvPr/>
-        </p:nvSpPr>
-        <p:spPr>
-          <a:xfrm>
-            <a:off x="0" y="0"/>
-            <a:ext cx="12191695" cy="109728"/>
-          </a:xfrm>
-          <a:prstGeom prst="rect">
-            <a:avLst/>
-          </a:prstGeom>
-          <a:solidFill>
-            <a:srgbClr val="2563EB"/>
-          </a:solidFill>
-          <a:ln>
-            <a:noFill/>
-          </a:ln>
-          <a:effectLst/>
-        </p:spPr>
-        <p:style>
-          <a:lnRef idx="1">
-            <a:schemeClr val="accent1"/>
-          </a:lnRef>
-          <a:fillRef idx="3">
-            <a:schemeClr val="accent1"/>
-          </a:fillRef>
-          <a:effectRef idx="2">
-            <a:schemeClr val="accent1"/>
-          </a:effectRef>
-          <a:fontRef idx="minor">
-            <a:schemeClr val="lt1"/>
-          </a:fontRef>
-        </p:style>
-        <p:txBody>
-          <a:bodyPr rtlCol="0" anchor="ctr"/>
-          <a:lstStyle/>
-          <a:p>
-            <a:pPr algn="ctr"/>
-          </a:p>
-        </p:txBody>
-      </p:sp>
-      <p:sp>
-        <p:nvSpPr>
-          <p:cNvPr id="4" name="TextBox 3"/>
-          <p:cNvSpPr txBox="1"/>
-          <p:nvPr/>
-        </p:nvSpPr>
-        <p:spPr>
-          <a:xfrm>
-            <a:off x="731520" y="457200"/>
-            <a:ext cx="10728655" cy="365760"/>
-          </a:xfrm>
-          <a:prstGeom prst="rect">
-            <a:avLst/>
-          </a:prstGeom>
-          <a:noFill/>
-        </p:spPr>
-        <p:txBody>
-          <a:bodyPr wrap="square" anchor="t">
-            <a:spAutoFit/>
-          </a:bodyPr>
-          <a:lstStyle/>
-          <a:p>
-            <a:pPr algn="ctr">
-              <a:lnSpc>
-                <a:spcPct val="115000"/>
-              </a:lnSpc>
-            </a:pPr>
-            <a:r>
-              <a:rPr sz="1300" b="1" i="0">
-                <a:solidFill>
-                  <a:srgbClr val="6B7280"/>
-                </a:solidFill>
-                <a:latin typeface="Calibri"/>
-              </a:rPr>
-              <a:t>PART 5 — QUESTION AND ANSWER</a:t>
-            </a:r>
-          </a:p>
-        </p:txBody>
-      </p:sp>
-      <p:sp>
-        <p:nvSpPr>
-          <p:cNvPr id="5" name="TextBox 4"/>
-          <p:cNvSpPr txBox="1"/>
-          <p:nvPr/>
-        </p:nvSpPr>
-        <p:spPr>
-          <a:xfrm>
-            <a:off x="731520" y="2057400"/>
-            <a:ext cx="10728655" cy="1280160"/>
-          </a:xfrm>
-          <a:prstGeom prst="rect">
-            <a:avLst/>
-          </a:prstGeom>
-          <a:noFill/>
-        </p:spPr>
-        <p:txBody>
-          <a:bodyPr wrap="square" anchor="ctr">
-            <a:spAutoFit/>
-          </a:bodyPr>
-          <a:lstStyle/>
-          <a:p>
-            <a:pPr algn="ctr">
-              <a:lnSpc>
-                <a:spcPct val="115000"/>
-              </a:lnSpc>
-            </a:pPr>
-            <a:r>
-              <a:rPr sz="4800" b="1" i="0">
-                <a:solidFill>
-                  <a:srgbClr val="2563EB"/>
-                </a:solidFill>
-                <a:latin typeface="Calibri"/>
-              </a:rPr>
-              <a:t>Questions?</a:t>
-            </a:r>
-          </a:p>
-        </p:txBody>
-      </p:sp>
-      <p:sp>
-        <p:nvSpPr>
-          <p:cNvPr id="6" name="TextBox 5"/>
-          <p:cNvSpPr txBox="1"/>
-          <p:nvPr/>
-        </p:nvSpPr>
-        <p:spPr>
-          <a:xfrm>
-            <a:off x="1188720" y="3520440"/>
-            <a:ext cx="9814255" cy="1645920"/>
-          </a:xfrm>
-          <a:prstGeom prst="rect">
-            <a:avLst/>
-          </a:prstGeom>
-          <a:noFill/>
-        </p:spPr>
-        <p:txBody>
-          <a:bodyPr wrap="square" anchor="t">
-            <a:spAutoFit/>
-          </a:bodyPr>
-          <a:lstStyle/>
-          <a:p>
-            <a:pPr algn="ctr">
-              <a:lnSpc>
-                <a:spcPct val="130000"/>
-              </a:lnSpc>
-            </a:pPr>
-            <a:r>
-              <a:rPr sz="2000" b="0" i="0">
-                <a:solidFill>
-                  <a:srgbClr val="1F2937"/>
-                </a:solidFill>
-                <a:latin typeface="Calibri"/>
-              </a:rPr>
-              <a:t>Thank you.</a:t>
-            </a:r>
-          </a:p>
-        </p:txBody>
-      </p:sp>
-      <p:sp>
-        <p:nvSpPr>
-          <p:cNvPr id="7" name="TextBox 6"/>
-          <p:cNvSpPr txBox="1"/>
-          <p:nvPr/>
-        </p:nvSpPr>
-        <p:spPr>
-          <a:xfrm>
-            <a:off x="10728655" y="6400800"/>
-            <a:ext cx="1005840" cy="320040"/>
-          </a:xfrm>
-          <a:prstGeom prst="rect">
-            <a:avLst/>
-          </a:prstGeom>
-          <a:noFill/>
-        </p:spPr>
-        <p:txBody>
-          <a:bodyPr wrap="square" anchor="t">
-            <a:spAutoFit/>
-          </a:bodyPr>
-          <a:lstStyle/>
-          <a:p>
-            <a:pPr algn="r">
-              <a:lnSpc>
-                <a:spcPct val="115000"/>
-              </a:lnSpc>
-            </a:pPr>
-            <a:r>
-              <a:rPr sz="1100" b="0" i="0">
-                <a:solidFill>
-                  <a:srgbClr val="6B7280"/>
-                </a:solidFill>
-                <a:latin typeface="Calibri"/>
-              </a:rPr>
-              <a:t>19</a:t>
+              <a:t>[12] Petre, M. (2004). How expert software engineers understand and use UML. JSS 71(3).</a:t>
             </a:r>
           </a:p>
         </p:txBody>
@@ -9519,7 +7002,7 @@
         <p:spPr>
           <a:xfrm>
             <a:off x="502920" y="256032"/>
-            <a:ext cx="11185855" cy="320040"/>
+            <a:ext cx="11183112" cy="320040"/>
           </a:xfrm>
           <a:prstGeom prst="rect">
             <a:avLst/>
@@ -9527,16 +7010,11 @@
           <a:noFill/>
         </p:spPr>
         <p:txBody>
-          <a:bodyPr wrap="square" anchor="t">
+          <a:bodyPr wrap="square" lIns="0" rIns="0" tIns="0" bIns="0">
             <a:spAutoFit/>
           </a:bodyPr>
           <a:lstStyle/>
           <a:p>
-            <a:pPr algn="l">
-              <a:lnSpc>
-                <a:spcPct val="115000"/>
-              </a:lnSpc>
-            </a:pPr>
             <a:r>
               <a:rPr sz="1300" b="1" i="0">
                 <a:solidFill>
@@ -9544,7 +7022,7 @@
                 </a:solidFill>
                 <a:latin typeface="Calibri"/>
               </a:rPr>
-              <a:t>PART 1 — THE PROBLEM AND ITS SIGNIFICANCE</a:t>
+              <a:t>PART 1 — THE PROBLEM AND ITS VALUE</a:t>
             </a:r>
           </a:p>
         </p:txBody>
@@ -9558,7 +7036,7 @@
         <p:spPr>
           <a:xfrm>
             <a:off x="502920" y="566928"/>
-            <a:ext cx="11185855" cy="822960"/>
+            <a:ext cx="11183112" cy="822960"/>
           </a:xfrm>
           <a:prstGeom prst="rect">
             <a:avLst/>
@@ -9566,16 +7044,11 @@
           <a:noFill/>
         </p:spPr>
         <p:txBody>
-          <a:bodyPr wrap="square" anchor="t">
+          <a:bodyPr wrap="square" lIns="0" rIns="0" tIns="0" bIns="0">
             <a:spAutoFit/>
           </a:bodyPr>
           <a:lstStyle/>
           <a:p>
-            <a:pPr algn="l">
-              <a:lnSpc>
-                <a:spcPct val="115000"/>
-              </a:lnSpc>
-            </a:pPr>
             <a:r>
               <a:rPr sz="3200" b="1" i="0">
                 <a:solidFill>
@@ -9583,7 +7056,7 @@
                 </a:solidFill>
                 <a:latin typeface="Calibri"/>
               </a:rPr>
-              <a:t>The Problem &amp; Why It Matters</a:t>
+              <a:t>The Problem</a:t>
             </a:r>
           </a:p>
         </p:txBody>
@@ -9597,7 +7070,7 @@
         <p:spPr>
           <a:xfrm>
             <a:off x="502920" y="1371600"/>
-            <a:ext cx="11185855" cy="20116"/>
+            <a:ext cx="11183112" cy="18288"/>
           </a:xfrm>
           <a:prstGeom prst="rect">
             <a:avLst/>
@@ -9649,16 +7122,11 @@
           <a:noFill/>
         </p:spPr>
         <p:txBody>
-          <a:bodyPr wrap="square" anchor="t">
+          <a:bodyPr wrap="square" lIns="0" rIns="0" tIns="0" bIns="0">
             <a:spAutoFit/>
           </a:bodyPr>
           <a:lstStyle/>
           <a:p>
-            <a:pPr algn="l">
-              <a:lnSpc>
-                <a:spcPct val="115000"/>
-              </a:lnSpc>
-            </a:pPr>
             <a:r>
               <a:rPr sz="1100" b="0" i="0">
                 <a:solidFill>
@@ -9679,7 +7147,7 @@
         </p:nvSpPr>
         <p:spPr>
           <a:xfrm>
-            <a:off x="10728655" y="6400800"/>
+            <a:off x="10725912" y="6400800"/>
             <a:ext cx="1005840" cy="320040"/>
           </a:xfrm>
           <a:prstGeom prst="rect">
@@ -9688,16 +7156,12 @@
           <a:noFill/>
         </p:spPr>
         <p:txBody>
-          <a:bodyPr wrap="square" anchor="t">
+          <a:bodyPr wrap="square" lIns="0" rIns="0" tIns="0" bIns="0">
             <a:spAutoFit/>
           </a:bodyPr>
           <a:lstStyle/>
           <a:p>
-            <a:pPr algn="r">
-              <a:lnSpc>
-                <a:spcPct val="115000"/>
-              </a:lnSpc>
-            </a:pPr>
+            <a:pPr algn="r"/>
             <a:r>
               <a:rPr sz="1100" b="0" i="0">
                 <a:solidFill>
@@ -9719,7 +7183,7 @@
         <p:spPr>
           <a:xfrm>
             <a:off x="502920" y="1600200"/>
-            <a:ext cx="11185855" cy="1691640"/>
+            <a:ext cx="11183112" cy="1828800"/>
           </a:xfrm>
           <a:prstGeom prst="rect">
             <a:avLst/>
@@ -9727,21 +7191,21 @@
           <a:noFill/>
         </p:spPr>
         <p:txBody>
-          <a:bodyPr wrap="square">
+          <a:bodyPr wrap="square" lIns="0" rIns="0" tIns="0" bIns="0">
             <a:spAutoFit/>
           </a:bodyPr>
           <a:lstStyle/>
           <a:p>
             <a:pPr>
-              <a:lnSpc>
-                <a:spcPct val="115000"/>
-              </a:lnSpc>
+              <a:spcBef>
+                <a:spcPts val="0"/>
+              </a:spcBef>
               <a:spcAft>
-                <a:spcPts val="1000"/>
+                <a:spcPts val="600"/>
               </a:spcAft>
             </a:pPr>
             <a:r>
-              <a:rPr sz="2000" b="1">
+              <a:rPr sz="2000" b="1" i="0">
                 <a:solidFill>
                   <a:srgbClr val="2563EB"/>
                 </a:solidFill>
@@ -9750,26 +7214,26 @@
               <a:t>•  </a:t>
             </a:r>
             <a:r>
-              <a:rPr sz="2000">
+              <a:rPr sz="2000" b="0" i="0">
                 <a:solidFill>
                   <a:srgbClr val="1F2937"/>
                 </a:solidFill>
                 <a:latin typeface="Calibri"/>
               </a:rPr>
-              <a:t>All exercises live in one monolithic XML file</a:t>
+              <a:t>The old platform is called OLE.</a:t>
             </a:r>
           </a:p>
           <a:p>
             <a:pPr>
-              <a:lnSpc>
-                <a:spcPct val="115000"/>
-              </a:lnSpc>
+              <a:spcBef>
+                <a:spcPts val="0"/>
+              </a:spcBef>
               <a:spcAft>
-                <a:spcPts val="1000"/>
+                <a:spcPts val="600"/>
               </a:spcAft>
             </a:pPr>
             <a:r>
-              <a:rPr sz="2000" b="1">
+              <a:rPr sz="2000" b="1" i="0">
                 <a:solidFill>
                   <a:srgbClr val="2563EB"/>
                 </a:solidFill>
@@ -9778,26 +7242,26 @@
               <a:t>•  </a:t>
             </a:r>
             <a:r>
-              <a:rPr sz="2000">
+              <a:rPr sz="2000" b="0" i="0">
                 <a:solidFill>
                   <a:srgbClr val="1F2937"/>
                 </a:solidFill>
                 <a:latin typeface="Calibri"/>
               </a:rPr>
-              <a:t>One bad edit → risk of corrupting everything</a:t>
+              <a:t>It keeps every exercise in one big XML file.</a:t>
             </a:r>
           </a:p>
           <a:p>
             <a:pPr>
-              <a:lnSpc>
-                <a:spcPct val="115000"/>
-              </a:lnSpc>
+              <a:spcBef>
+                <a:spcPts val="0"/>
+              </a:spcBef>
               <a:spcAft>
-                <a:spcPts val="1000"/>
+                <a:spcPts val="600"/>
               </a:spcAft>
             </a:pPr>
             <a:r>
-              <a:rPr sz="2000" b="1">
+              <a:rPr sz="2000" b="1" i="0">
                 <a:solidFill>
                   <a:srgbClr val="2563EB"/>
                 </a:solidFill>
@@ -9806,26 +7270,26 @@
               <a:t>•  </a:t>
             </a:r>
             <a:r>
-              <a:rPr sz="2000">
+              <a:rPr sz="2000" b="0" i="0">
                 <a:solidFill>
                   <a:srgbClr val="1F2937"/>
                 </a:solidFill>
                 <a:latin typeface="Calibri"/>
               </a:rPr>
-              <a:t>Maintainers are scarce; even small changes stall</a:t>
+              <a:t>One bad edit can break the whole file.</a:t>
             </a:r>
           </a:p>
           <a:p>
             <a:pPr>
-              <a:lnSpc>
-                <a:spcPct val="115000"/>
-              </a:lnSpc>
+              <a:spcBef>
+                <a:spcPts val="0"/>
+              </a:spcBef>
               <a:spcAft>
-                <a:spcPts val="1000"/>
+                <a:spcPts val="600"/>
               </a:spcAft>
             </a:pPr>
             <a:r>
-              <a:rPr sz="2000" b="1">
+              <a:rPr sz="2000" b="1" i="0">
                 <a:solidFill>
                   <a:srgbClr val="2563EB"/>
                 </a:solidFill>
@@ -9834,20 +7298,48 @@
               <a:t>•  </a:t>
             </a:r>
             <a:r>
-              <a:rPr sz="2000">
+              <a:rPr sz="2000" b="0" i="0">
                 <a:solidFill>
                   <a:srgbClr val="1F2937"/>
                 </a:solidFill>
                 <a:latin typeface="Calibri"/>
               </a:rPr>
-              <a:t>Result: stale content, no new exercise types</a:t>
+              <a:t>So nobody dares to touch it.</a:t>
+            </a:r>
+          </a:p>
+          <a:p>
+            <a:pPr>
+              <a:spcBef>
+                <a:spcPts val="0"/>
+              </a:spcBef>
+              <a:spcAft>
+                <a:spcPts val="600"/>
+              </a:spcAft>
+            </a:pPr>
+            <a:r>
+              <a:rPr sz="2000" b="1" i="0">
+                <a:solidFill>
+                  <a:srgbClr val="2563EB"/>
+                </a:solidFill>
+                <a:latin typeface="Calibri"/>
+              </a:rPr>
+              <a:t>•  </a:t>
+            </a:r>
+            <a:r>
+              <a:rPr sz="2000" b="0" i="0">
+                <a:solidFill>
+                  <a:srgbClr val="1F2937"/>
+                </a:solidFill>
+                <a:latin typeface="Calibri"/>
+              </a:rPr>
+              <a:t>Tutors cannot add or fix exercises on their own.</a:t>
             </a:r>
           </a:p>
         </p:txBody>
       </p:sp>
       <p:pic>
         <p:nvPicPr>
-          <p:cNvPr id="9" name="Picture 8" descr="before_after.png"/>
+          <p:cNvPr id="9" name="Picture 8" descr="problem.png"/>
           <p:cNvPicPr>
             <a:picLocks noChangeAspect="1"/>
           </p:cNvPicPr>
@@ -9861,8 +7353,8 @@
         </p:blipFill>
         <p:spPr>
           <a:xfrm>
-            <a:off x="3220217" y="3611880"/>
-            <a:ext cx="5751260" cy="2743200"/>
+            <a:off x="2796787" y="3520440"/>
+            <a:ext cx="6598121" cy="2697480"/>
           </a:xfrm>
           <a:prstGeom prst="rect">
             <a:avLst/>
@@ -9940,7 +7432,7 @@
         <p:spPr>
           <a:xfrm>
             <a:off x="502920" y="256032"/>
-            <a:ext cx="11185855" cy="320040"/>
+            <a:ext cx="11183112" cy="320040"/>
           </a:xfrm>
           <a:prstGeom prst="rect">
             <a:avLst/>
@@ -9948,16 +7440,11 @@
           <a:noFill/>
         </p:spPr>
         <p:txBody>
-          <a:bodyPr wrap="square" anchor="t">
+          <a:bodyPr wrap="square" lIns="0" rIns="0" tIns="0" bIns="0">
             <a:spAutoFit/>
           </a:bodyPr>
           <a:lstStyle/>
           <a:p>
-            <a:pPr algn="l">
-              <a:lnSpc>
-                <a:spcPct val="115000"/>
-              </a:lnSpc>
-            </a:pPr>
             <a:r>
               <a:rPr sz="1300" b="1" i="0">
                 <a:solidFill>
@@ -9965,7 +7452,7 @@
                 </a:solidFill>
                 <a:latin typeface="Calibri"/>
               </a:rPr>
-              <a:t>PART 2 — ANALYSIS OF THE PROBLEM AND THE APPROACH</a:t>
+              <a:t>PART 2 — THE SOLUTION AND THE APPROACH</a:t>
             </a:r>
           </a:p>
         </p:txBody>
@@ -9979,7 +7466,7 @@
         <p:spPr>
           <a:xfrm>
             <a:off x="502920" y="566928"/>
-            <a:ext cx="11185855" cy="822960"/>
+            <a:ext cx="11183112" cy="822960"/>
           </a:xfrm>
           <a:prstGeom prst="rect">
             <a:avLst/>
@@ -9987,16 +7474,11 @@
           <a:noFill/>
         </p:spPr>
         <p:txBody>
-          <a:bodyPr wrap="square" anchor="t">
+          <a:bodyPr wrap="square" lIns="0" rIns="0" tIns="0" bIns="0">
             <a:spAutoFit/>
           </a:bodyPr>
           <a:lstStyle/>
           <a:p>
-            <a:pPr algn="l">
-              <a:lnSpc>
-                <a:spcPct val="115000"/>
-              </a:lnSpc>
-            </a:pPr>
             <a:r>
               <a:rPr sz="3200" b="1" i="0">
                 <a:solidFill>
@@ -10004,7 +7486,7 @@
                 </a:solidFill>
                 <a:latin typeface="Calibri"/>
               </a:rPr>
-              <a:t>The Solution, at a Glance</a:t>
+              <a:t>The Solution at a Glance</a:t>
             </a:r>
           </a:p>
         </p:txBody>
@@ -10018,7 +7500,7 @@
         <p:spPr>
           <a:xfrm>
             <a:off x="502920" y="1371600"/>
-            <a:ext cx="11185855" cy="20116"/>
+            <a:ext cx="11183112" cy="18288"/>
           </a:xfrm>
           <a:prstGeom prst="rect">
             <a:avLst/>
@@ -10070,16 +7552,11 @@
           <a:noFill/>
         </p:spPr>
         <p:txBody>
-          <a:bodyPr wrap="square" anchor="t">
+          <a:bodyPr wrap="square" lIns="0" rIns="0" tIns="0" bIns="0">
             <a:spAutoFit/>
           </a:bodyPr>
           <a:lstStyle/>
           <a:p>
-            <a:pPr algn="l">
-              <a:lnSpc>
-                <a:spcPct val="115000"/>
-              </a:lnSpc>
-            </a:pPr>
             <a:r>
               <a:rPr sz="1100" b="0" i="0">
                 <a:solidFill>
@@ -10100,7 +7577,7 @@
         </p:nvSpPr>
         <p:spPr>
           <a:xfrm>
-            <a:off x="10728655" y="6400800"/>
+            <a:off x="10725912" y="6400800"/>
             <a:ext cx="1005840" cy="320040"/>
           </a:xfrm>
           <a:prstGeom prst="rect">
@@ -10109,16 +7586,12 @@
           <a:noFill/>
         </p:spPr>
         <p:txBody>
-          <a:bodyPr wrap="square" anchor="t">
+          <a:bodyPr wrap="square" lIns="0" rIns="0" tIns="0" bIns="0">
             <a:spAutoFit/>
           </a:bodyPr>
           <a:lstStyle/>
           <a:p>
-            <a:pPr algn="r">
-              <a:lnSpc>
-                <a:spcPct val="115000"/>
-              </a:lnSpc>
-            </a:pPr>
+            <a:pPr algn="r"/>
             <a:r>
               <a:rPr sz="1100" b="0" i="0">
                 <a:solidFill>
@@ -10140,7 +7613,7 @@
         <p:spPr>
           <a:xfrm>
             <a:off x="502920" y="1600200"/>
-            <a:ext cx="11185855" cy="1691640"/>
+            <a:ext cx="11183112" cy="1828800"/>
           </a:xfrm>
           <a:prstGeom prst="rect">
             <a:avLst/>
@@ -10148,21 +7621,21 @@
           <a:noFill/>
         </p:spPr>
         <p:txBody>
-          <a:bodyPr wrap="square">
+          <a:bodyPr wrap="square" lIns="0" rIns="0" tIns="0" bIns="0">
             <a:spAutoFit/>
           </a:bodyPr>
           <a:lstStyle/>
           <a:p>
             <a:pPr>
-              <a:lnSpc>
-                <a:spcPct val="115000"/>
-              </a:lnSpc>
+              <a:spcBef>
+                <a:spcPts val="0"/>
+              </a:spcBef>
               <a:spcAft>
-                <a:spcPts val="1000"/>
+                <a:spcPts val="600"/>
               </a:spcAft>
             </a:pPr>
             <a:r>
-              <a:rPr sz="2000" b="1">
+              <a:rPr sz="1900" b="1" i="0">
                 <a:solidFill>
                   <a:srgbClr val="2563EB"/>
                 </a:solidFill>
@@ -10171,26 +7644,26 @@
               <a:t>•  </a:t>
             </a:r>
             <a:r>
-              <a:rPr sz="2000">
+              <a:rPr sz="1900" b="0" i="0">
                 <a:solidFill>
                   <a:srgbClr val="1F2937"/>
                 </a:solidFill>
                 <a:latin typeface="Calibri"/>
               </a:rPr>
-              <a:t>Standalone platform, independent of OLE</a:t>
+              <a:t>A new, standalone platform. It runs apart from OLE.</a:t>
             </a:r>
           </a:p>
           <a:p>
             <a:pPr>
-              <a:lnSpc>
-                <a:spcPct val="115000"/>
-              </a:lnSpc>
+              <a:spcBef>
+                <a:spcPts val="0"/>
+              </a:spcBef>
               <a:spcAft>
-                <a:spcPts val="1000"/>
+                <a:spcPts val="600"/>
               </a:spcAft>
             </a:pPr>
             <a:r>
-              <a:rPr sz="2000" b="1">
+              <a:rPr sz="1900" b="1" i="0">
                 <a:solidFill>
                   <a:srgbClr val="2563EB"/>
                 </a:solidFill>
@@ -10199,26 +7672,26 @@
               <a:t>•  </a:t>
             </a:r>
             <a:r>
-              <a:rPr sz="2000">
+              <a:rPr sz="1900" b="0" i="0">
                 <a:solidFill>
                   <a:srgbClr val="1F2937"/>
                 </a:solidFill>
                 <a:latin typeface="Calibri"/>
               </a:rPr>
-              <a:t>Three roles: Student · Tutor · Super Admin</a:t>
+              <a:t>Three roles: Student, Tutor, Super Admin.</a:t>
             </a:r>
           </a:p>
           <a:p>
             <a:pPr>
-              <a:lnSpc>
-                <a:spcPct val="115000"/>
-              </a:lnSpc>
+              <a:spcBef>
+                <a:spcPts val="0"/>
+              </a:spcBef>
               <a:spcAft>
-                <a:spcPts val="1000"/>
+                <a:spcPts val="600"/>
               </a:spcAft>
             </a:pPr>
             <a:r>
-              <a:rPr sz="2000" b="1">
+              <a:rPr sz="1900" b="1" i="0">
                 <a:solidFill>
                   <a:srgbClr val="2563EB"/>
                 </a:solidFill>
@@ -10227,26 +7700,26 @@
               <a:t>•  </a:t>
             </a:r>
             <a:r>
-              <a:rPr sz="2000">
+              <a:rPr sz="1900" b="0" i="0">
                 <a:solidFill>
                   <a:srgbClr val="1F2937"/>
                 </a:solidFill>
                 <a:latin typeface="Calibri"/>
               </a:rPr>
-              <a:t>Blockly visual exercises</a:t>
+              <a:t>Exercises use Blockly. Students drag blocks to write code.</a:t>
             </a:r>
           </a:p>
           <a:p>
             <a:pPr>
-              <a:lnSpc>
-                <a:spcPct val="115000"/>
-              </a:lnSpc>
+              <a:spcBef>
+                <a:spcPts val="0"/>
+              </a:spcBef>
               <a:spcAft>
-                <a:spcPts val="1000"/>
+                <a:spcPts val="600"/>
               </a:spcAft>
             </a:pPr>
             <a:r>
-              <a:rPr sz="2000" b="1">
+              <a:rPr sz="1900" b="1" i="0">
                 <a:solidFill>
                   <a:srgbClr val="2563EB"/>
                 </a:solidFill>
@@ -10255,13 +7728,41 @@
               <a:t>•  </a:t>
             </a:r>
             <a:r>
-              <a:rPr sz="2000">
+              <a:rPr sz="1900" b="0" i="0">
                 <a:solidFill>
                   <a:srgbClr val="1F2937"/>
                 </a:solidFill>
                 <a:latin typeface="Calibri"/>
               </a:rPr>
-              <a:t>Export / import grading, decoupled from OLE</a:t>
+              <a:t>Block-based coding is a proven way to teach programming [4][8][11].</a:t>
+            </a:r>
+          </a:p>
+          <a:p>
+            <a:pPr>
+              <a:spcBef>
+                <a:spcPts val="0"/>
+              </a:spcBef>
+              <a:spcAft>
+                <a:spcPts val="600"/>
+              </a:spcAft>
+            </a:pPr>
+            <a:r>
+              <a:rPr sz="1900" b="1" i="0">
+                <a:solidFill>
+                  <a:srgbClr val="2563EB"/>
+                </a:solidFill>
+                <a:latin typeface="Calibri"/>
+              </a:rPr>
+              <a:t>•  </a:t>
+            </a:r>
+            <a:r>
+              <a:rPr sz="1900" b="0" i="0">
+                <a:solidFill>
+                  <a:srgbClr val="1F2937"/>
+                </a:solidFill>
+                <a:latin typeface="Calibri"/>
+              </a:rPr>
+              <a:t>Grading is decoupled. Students export. Tutors import and grade.</a:t>
             </a:r>
           </a:p>
         </p:txBody>
@@ -10282,8 +7783,8 @@
         </p:blipFill>
         <p:spPr>
           <a:xfrm>
-            <a:off x="3879154" y="3611880"/>
-            <a:ext cx="4433386" cy="2743200"/>
+            <a:off x="2555711" y="3429000"/>
+            <a:ext cx="7080273" cy="2788920"/>
           </a:xfrm>
           <a:prstGeom prst="rect">
             <a:avLst/>
@@ -10361,7 +7862,7 @@
         <p:spPr>
           <a:xfrm>
             <a:off x="502920" y="256032"/>
-            <a:ext cx="11185855" cy="320040"/>
+            <a:ext cx="11183112" cy="320040"/>
           </a:xfrm>
           <a:prstGeom prst="rect">
             <a:avLst/>
@@ -10369,16 +7870,11 @@
           <a:noFill/>
         </p:spPr>
         <p:txBody>
-          <a:bodyPr wrap="square" anchor="t">
+          <a:bodyPr wrap="square" lIns="0" rIns="0" tIns="0" bIns="0">
             <a:spAutoFit/>
           </a:bodyPr>
           <a:lstStyle/>
           <a:p>
-            <a:pPr algn="l">
-              <a:lnSpc>
-                <a:spcPct val="115000"/>
-              </a:lnSpc>
-            </a:pPr>
             <a:r>
               <a:rPr sz="1300" b="1" i="0">
                 <a:solidFill>
@@ -10386,7 +7882,7 @@
                 </a:solidFill>
                 <a:latin typeface="Calibri"/>
               </a:rPr>
-              <a:t>PART 2 — ANALYSIS OF THE PROBLEM AND THE APPROACH</a:t>
+              <a:t>PART 2 — THE SOLUTION AND THE APPROACH</a:t>
             </a:r>
           </a:p>
         </p:txBody>
@@ -10400,7 +7896,7 @@
         <p:spPr>
           <a:xfrm>
             <a:off x="502920" y="566928"/>
-            <a:ext cx="11185855" cy="822960"/>
+            <a:ext cx="11183112" cy="822960"/>
           </a:xfrm>
           <a:prstGeom prst="rect">
             <a:avLst/>
@@ -10408,16 +7904,11 @@
           <a:noFill/>
         </p:spPr>
         <p:txBody>
-          <a:bodyPr wrap="square" anchor="t">
+          <a:bodyPr wrap="square" lIns="0" rIns="0" tIns="0" bIns="0">
             <a:spAutoFit/>
           </a:bodyPr>
           <a:lstStyle/>
           <a:p>
-            <a:pPr algn="l">
-              <a:lnSpc>
-                <a:spcPct val="115000"/>
-              </a:lnSpc>
-            </a:pPr>
             <a:r>
               <a:rPr sz="3200" b="1" i="0">
                 <a:solidFill>
@@ -10425,7 +7916,7 @@
                 </a:solidFill>
                 <a:latin typeface="Calibri"/>
               </a:rPr>
-              <a:t>Failed First Attempt: Pure “Vibe Coding”</a:t>
+              <a:t>Why We Needed a Real Process</a:t>
             </a:r>
           </a:p>
         </p:txBody>
@@ -10439,7 +7930,7 @@
         <p:spPr>
           <a:xfrm>
             <a:off x="502920" y="1371600"/>
-            <a:ext cx="11185855" cy="20116"/>
+            <a:ext cx="11183112" cy="18288"/>
           </a:xfrm>
           <a:prstGeom prst="rect">
             <a:avLst/>
@@ -10491,16 +7982,11 @@
           <a:noFill/>
         </p:spPr>
         <p:txBody>
-          <a:bodyPr wrap="square" anchor="t">
+          <a:bodyPr wrap="square" lIns="0" rIns="0" tIns="0" bIns="0">
             <a:spAutoFit/>
           </a:bodyPr>
           <a:lstStyle/>
           <a:p>
-            <a:pPr algn="l">
-              <a:lnSpc>
-                <a:spcPct val="115000"/>
-              </a:lnSpc>
-            </a:pPr>
             <a:r>
               <a:rPr sz="1100" b="0" i="0">
                 <a:solidFill>
@@ -10521,7 +8007,7 @@
         </p:nvSpPr>
         <p:spPr>
           <a:xfrm>
-            <a:off x="10728655" y="6400800"/>
+            <a:off x="10725912" y="6400800"/>
             <a:ext cx="1005840" cy="320040"/>
           </a:xfrm>
           <a:prstGeom prst="rect">
@@ -10530,16 +8016,12 @@
           <a:noFill/>
         </p:spPr>
         <p:txBody>
-          <a:bodyPr wrap="square" anchor="t">
+          <a:bodyPr wrap="square" lIns="0" rIns="0" tIns="0" bIns="0">
             <a:spAutoFit/>
           </a:bodyPr>
           <a:lstStyle/>
           <a:p>
-            <a:pPr algn="r">
-              <a:lnSpc>
-                <a:spcPct val="115000"/>
-              </a:lnSpc>
-            </a:pPr>
+            <a:pPr algn="r"/>
             <a:r>
               <a:rPr sz="1100" b="0" i="0">
                 <a:solidFill>
@@ -10561,7 +8043,7 @@
         <p:spPr>
           <a:xfrm>
             <a:off x="502920" y="1600200"/>
-            <a:ext cx="11185855" cy="1691640"/>
+            <a:ext cx="11183112" cy="1828800"/>
           </a:xfrm>
           <a:prstGeom prst="rect">
             <a:avLst/>
@@ -10569,21 +8051,21 @@
           <a:noFill/>
         </p:spPr>
         <p:txBody>
-          <a:bodyPr wrap="square">
+          <a:bodyPr wrap="square" lIns="0" rIns="0" tIns="0" bIns="0">
             <a:spAutoFit/>
           </a:bodyPr>
           <a:lstStyle/>
           <a:p>
             <a:pPr>
-              <a:lnSpc>
-                <a:spcPct val="115000"/>
-              </a:lnSpc>
+              <a:spcBef>
+                <a:spcPts val="0"/>
+              </a:spcBef>
               <a:spcAft>
-                <a:spcPts val="1000"/>
+                <a:spcPts val="600"/>
               </a:spcAft>
             </a:pPr>
             <a:r>
-              <a:rPr sz="2000" b="1">
+              <a:rPr sz="1900" b="1" i="0">
                 <a:solidFill>
                   <a:srgbClr val="2563EB"/>
                 </a:solidFill>
@@ -10592,26 +8074,26 @@
               <a:t>•  </a:t>
             </a:r>
             <a:r>
-              <a:rPr sz="2000">
+              <a:rPr sz="1900" b="0" i="0">
                 <a:solidFill>
                   <a:srgbClr val="1F2937"/>
                 </a:solidFill>
                 <a:latin typeface="Calibri"/>
               </a:rPr>
-              <a:t>Started in a Telegram chat — no code visibility</a:t>
+              <a:t>The first attempt was pure “vibe coding” over chat.</a:t>
             </a:r>
           </a:p>
           <a:p>
             <a:pPr>
-              <a:lnSpc>
-                <a:spcPct val="115000"/>
-              </a:lnSpc>
+              <a:spcBef>
+                <a:spcPts val="0"/>
+              </a:spcBef>
               <a:spcAft>
-                <a:spcPts val="1000"/>
+                <a:spcPts val="600"/>
               </a:spcAft>
             </a:pPr>
             <a:r>
-              <a:rPr sz="2000" b="1">
+              <a:rPr sz="1900" b="1" i="0">
                 <a:solidFill>
                   <a:srgbClr val="2563EB"/>
                 </a:solidFill>
@@ -10620,26 +8102,26 @@
               <a:t>•  </a:t>
             </a:r>
             <a:r>
-              <a:rPr sz="2000">
+              <a:rPr sz="1900" b="0" i="0">
                 <a:solidFill>
                   <a:srgbClr val="1F2937"/>
                 </a:solidFill>
                 <a:latin typeface="Calibri"/>
               </a:rPr>
-              <a:t>Fine at first, for small changes</a:t>
+              <a:t>No plan. No design. No review.</a:t>
             </a:r>
           </a:p>
           <a:p>
             <a:pPr>
-              <a:lnSpc>
-                <a:spcPct val="115000"/>
-              </a:lnSpc>
+              <a:spcBef>
+                <a:spcPts val="0"/>
+              </a:spcBef>
               <a:spcAft>
-                <a:spcPts val="1000"/>
+                <a:spcPts val="600"/>
               </a:spcAft>
             </a:pPr>
             <a:r>
-              <a:rPr sz="2000" b="1">
+              <a:rPr sz="1900" b="1" i="0">
                 <a:solidFill>
                   <a:srgbClr val="2563EB"/>
                 </a:solidFill>
@@ -10648,26 +8130,26 @@
               <a:t>•  </a:t>
             </a:r>
             <a:r>
-              <a:rPr sz="2000">
+              <a:rPr sz="1900" b="0" i="0">
                 <a:solidFill>
                   <a:srgbClr val="1F2937"/>
                 </a:solidFill>
                 <a:latin typeface="Calibri"/>
               </a:rPr>
-              <a:t>No constraints, no design docs, no review</a:t>
+              <a:t>It worked for small changes. It broke as the project grew.</a:t>
             </a:r>
           </a:p>
           <a:p>
             <a:pPr>
-              <a:lnSpc>
-                <a:spcPct val="115000"/>
-              </a:lnSpc>
+              <a:spcBef>
+                <a:spcPts val="0"/>
+              </a:spcBef>
               <a:spcAft>
-                <a:spcPts val="1000"/>
+                <a:spcPts val="600"/>
               </a:spcAft>
             </a:pPr>
             <a:r>
-              <a:rPr sz="2000" b="1">
+              <a:rPr sz="1900" b="1" i="0">
                 <a:solidFill>
                   <a:srgbClr val="2563EB"/>
                 </a:solidFill>
@@ -10676,20 +8158,48 @@
               <a:t>•  </a:t>
             </a:r>
             <a:r>
-              <a:rPr sz="2000">
+              <a:rPr sz="1900" b="0" i="0">
                 <a:solidFill>
                   <a:srgbClr val="1F2937"/>
                 </a:solidFill>
                 <a:latin typeface="Calibri"/>
               </a:rPr>
-              <a:t>New features broke old ones; fixes caused more bugs</a:t>
+              <a:t>One fix often caused new bugs. Progress stalled.</a:t>
+            </a:r>
+          </a:p>
+          <a:p>
+            <a:pPr>
+              <a:spcBef>
+                <a:spcPts val="0"/>
+              </a:spcBef>
+              <a:spcAft>
+                <a:spcPts val="600"/>
+              </a:spcAft>
+            </a:pPr>
+            <a:r>
+              <a:rPr sz="1900" b="1" i="0">
+                <a:solidFill>
+                  <a:srgbClr val="2563EB"/>
+                </a:solidFill>
+                <a:latin typeface="Calibri"/>
+              </a:rPr>
+              <a:t>•  </a:t>
+            </a:r>
+            <a:r>
+              <a:rPr sz="1900" b="0" i="0">
+                <a:solidFill>
+                  <a:srgbClr val="1F2937"/>
+                </a:solidFill>
+                <a:latin typeface="Calibri"/>
+              </a:rPr>
+              <a:t>The lesson: the AI can write code. It needs a process [12].</a:t>
             </a:r>
           </a:p>
         </p:txBody>
       </p:sp>
       <p:pic>
         <p:nvPicPr>
-          <p:cNvPr id="9" name="Picture 8" descr="vibe_coding.png"/>
+          <p:cNvPr id="9" name="Picture 8" descr="twophase.png"/>
           <p:cNvPicPr>
             <a:picLocks noChangeAspect="1"/>
           </p:cNvPicPr>
@@ -10703,8 +8213,8 @@
         </p:blipFill>
         <p:spPr>
           <a:xfrm>
-            <a:off x="2828026" y="3611880"/>
-            <a:ext cx="6535642" cy="2743200"/>
+            <a:off x="2597250" y="3566160"/>
+            <a:ext cx="6997195" cy="2651760"/>
           </a:xfrm>
           <a:prstGeom prst="rect">
             <a:avLst/>
@@ -10738,13 +8248,13 @@
         <p:spPr>
           <a:xfrm>
             <a:off x="0" y="0"/>
-            <a:ext cx="12191695" cy="6858000"/>
+            <a:ext cx="12191695" cy="109728"/>
           </a:xfrm>
           <a:prstGeom prst="rect">
             <a:avLst/>
           </a:prstGeom>
           <a:solidFill>
-            <a:srgbClr val="FAFAFB"/>
+            <a:srgbClr val="2563EB"/>
           </a:solidFill>
           <a:ln>
             <a:noFill/>
@@ -10775,20 +8285,88 @@
       </p:sp>
       <p:sp>
         <p:nvSpPr>
-          <p:cNvPr id="3" name="Rectangle 2"/>
+          <p:cNvPr id="3" name="TextBox 2"/>
+          <p:cNvSpPr txBox="1"/>
+          <p:nvPr/>
+        </p:nvSpPr>
+        <p:spPr>
+          <a:xfrm>
+            <a:off x="502920" y="256032"/>
+            <a:ext cx="11183112" cy="320040"/>
+          </a:xfrm>
+          <a:prstGeom prst="rect">
+            <a:avLst/>
+          </a:prstGeom>
+          <a:noFill/>
+        </p:spPr>
+        <p:txBody>
+          <a:bodyPr wrap="square" lIns="0" rIns="0" tIns="0" bIns="0">
+            <a:spAutoFit/>
+          </a:bodyPr>
+          <a:lstStyle/>
+          <a:p>
+            <a:r>
+              <a:rPr sz="1300" b="1" i="0">
+                <a:solidFill>
+                  <a:srgbClr val="6B7280"/>
+                </a:solidFill>
+                <a:latin typeface="Calibri"/>
+              </a:rPr>
+              <a:t>PART 3 — THE SYSTEM (HOW IT WORKS)</a:t>
+            </a:r>
+          </a:p>
+        </p:txBody>
+      </p:sp>
+      <p:sp>
+        <p:nvSpPr>
+          <p:cNvPr id="4" name="TextBox 3"/>
+          <p:cNvSpPr txBox="1"/>
+          <p:nvPr/>
+        </p:nvSpPr>
+        <p:spPr>
+          <a:xfrm>
+            <a:off x="502920" y="566928"/>
+            <a:ext cx="11183112" cy="822960"/>
+          </a:xfrm>
+          <a:prstGeom prst="rect">
+            <a:avLst/>
+          </a:prstGeom>
+          <a:noFill/>
+        </p:spPr>
+        <p:txBody>
+          <a:bodyPr wrap="square" lIns="0" rIns="0" tIns="0" bIns="0">
+            <a:spAutoFit/>
+          </a:bodyPr>
+          <a:lstStyle/>
+          <a:p>
+            <a:r>
+              <a:rPr sz="3200" b="1" i="0">
+                <a:solidFill>
+                  <a:srgbClr val="1F2937"/>
+                </a:solidFill>
+                <a:latin typeface="Calibri"/>
+              </a:rPr>
+              <a:t>System Overview</a:t>
+            </a:r>
+          </a:p>
+        </p:txBody>
+      </p:sp>
+      <p:sp>
+        <p:nvSpPr>
+          <p:cNvPr id="5" name="Rectangle 4"/>
           <p:cNvSpPr/>
           <p:nvPr/>
         </p:nvSpPr>
         <p:spPr>
           <a:xfrm>
-            <a:off x="0" y="0"/>
-            <a:ext cx="12191695" cy="109728"/>
+            <a:off x="502920" y="1371600"/>
+            <a:ext cx="11183112" cy="18288"/>
           </a:xfrm>
           <a:prstGeom prst="rect">
             <a:avLst/>
           </a:prstGeom>
           <a:solidFill>
-            <a:srgbClr val="2563EB"/>
+            <a:srgbClr val="E5E7EB"/>
           </a:solidFill>
           <a:ln>
             <a:noFill/>
@@ -10819,14 +8397,14 @@
       </p:sp>
       <p:sp>
         <p:nvSpPr>
-          <p:cNvPr id="4" name="TextBox 3"/>
+          <p:cNvPr id="6" name="TextBox 5"/>
           <p:cNvSpPr txBox="1"/>
           <p:nvPr/>
         </p:nvSpPr>
         <p:spPr>
           <a:xfrm>
-            <a:off x="731520" y="457200"/>
-            <a:ext cx="10728655" cy="365760"/>
+            <a:off x="502920" y="6400800"/>
+            <a:ext cx="5486400" cy="320040"/>
           </a:xfrm>
           <a:prstGeom prst="rect">
             <a:avLst/>
@@ -10834,38 +8412,33 @@
           <a:noFill/>
         </p:spPr>
         <p:txBody>
-          <a:bodyPr wrap="square" anchor="t">
+          <a:bodyPr wrap="square" lIns="0" rIns="0" tIns="0" bIns="0">
             <a:spAutoFit/>
           </a:bodyPr>
           <a:lstStyle/>
           <a:p>
-            <a:pPr algn="ctr">
-              <a:lnSpc>
-                <a:spcPct val="115000"/>
-              </a:lnSpc>
-            </a:pPr>
-            <a:r>
-              <a:rPr sz="1300" b="1" i="0">
+            <a:r>
+              <a:rPr sz="1100" b="0" i="0">
                 <a:solidFill>
                   <a:srgbClr val="6B7280"/>
                 </a:solidFill>
                 <a:latin typeface="Calibri"/>
               </a:rPr>
-              <a:t>PART 2 — ANALYSIS OF THE PROBLEM AND THE APPROACH</a:t>
-            </a:r>
-          </a:p>
-        </p:txBody>
-      </p:sp>
-      <p:sp>
-        <p:nvSpPr>
-          <p:cNvPr id="5" name="TextBox 4"/>
+              <a:t>Programming Learning Platform — Capstone</a:t>
+            </a:r>
+          </a:p>
+        </p:txBody>
+      </p:sp>
+      <p:sp>
+        <p:nvSpPr>
+          <p:cNvPr id="7" name="TextBox 6"/>
           <p:cNvSpPr txBox="1"/>
           <p:nvPr/>
         </p:nvSpPr>
         <p:spPr>
           <a:xfrm>
-            <a:off x="731520" y="2057400"/>
-            <a:ext cx="10728655" cy="1280160"/>
+            <a:off x="10725912" y="6400800"/>
+            <a:ext cx="1005840" cy="320040"/>
           </a:xfrm>
           <a:prstGeom prst="rect">
             <a:avLst/>
@@ -10873,54 +8446,34 @@
           <a:noFill/>
         </p:spPr>
         <p:txBody>
-          <a:bodyPr wrap="square" anchor="ctr">
+          <a:bodyPr wrap="square" lIns="0" rIns="0" tIns="0" bIns="0">
             <a:spAutoFit/>
           </a:bodyPr>
           <a:lstStyle/>
           <a:p>
-            <a:pPr algn="ctr">
-              <a:lnSpc>
-                <a:spcPct val="115000"/>
-              </a:lnSpc>
-            </a:pPr>
-            <a:r>
-              <a:rPr sz="3400" b="1" i="0">
-                <a:solidFill>
-                  <a:srgbClr val="2563EB"/>
-                </a:solidFill>
-                <a:latin typeface="Calibri"/>
-              </a:rPr>
-              <a:t>The Real Analysis:</a:t>
-            </a:r>
-          </a:p>
-          <a:p>
-            <a:pPr algn="ctr">
-              <a:lnSpc>
-                <a:spcPct val="115000"/>
-              </a:lnSpc>
-            </a:pPr>
-            <a:r>
-              <a:rPr sz="3400" b="1" i="0">
-                <a:solidFill>
-                  <a:srgbClr val="2563EB"/>
-                </a:solidFill>
-                <a:latin typeface="Calibri"/>
-              </a:rPr>
-              <a:t>What Was Actually Broken</a:t>
-            </a:r>
-          </a:p>
-        </p:txBody>
-      </p:sp>
-      <p:sp>
-        <p:nvSpPr>
-          <p:cNvPr id="6" name="TextBox 5"/>
+            <a:pPr algn="r"/>
+            <a:r>
+              <a:rPr sz="1100" b="0" i="0">
+                <a:solidFill>
+                  <a:srgbClr val="6B7280"/>
+                </a:solidFill>
+                <a:latin typeface="Calibri"/>
+              </a:rPr>
+              <a:t>5</a:t>
+            </a:r>
+          </a:p>
+        </p:txBody>
+      </p:sp>
+      <p:sp>
+        <p:nvSpPr>
+          <p:cNvPr id="8" name="TextBox 7"/>
           <p:cNvSpPr txBox="1"/>
           <p:nvPr/>
         </p:nvSpPr>
         <p:spPr>
           <a:xfrm>
-            <a:off x="1188720" y="3520440"/>
-            <a:ext cx="9814255" cy="1645920"/>
+            <a:off x="502920" y="1600200"/>
+            <a:ext cx="11183112" cy="1188720"/>
           </a:xfrm>
           <a:prstGeom prst="rect">
             <a:avLst/>
@@ -10928,147 +8481,120 @@
           <a:noFill/>
         </p:spPr>
         <p:txBody>
-          <a:bodyPr wrap="square" anchor="t">
+          <a:bodyPr wrap="square" lIns="0" rIns="0" tIns="0" bIns="0">
             <a:spAutoFit/>
           </a:bodyPr>
           <a:lstStyle/>
           <a:p>
-            <a:pPr algn="ctr">
-              <a:lnSpc>
-                <a:spcPct val="130000"/>
-              </a:lnSpc>
+            <a:pPr>
+              <a:spcBef>
+                <a:spcPts val="0"/>
+              </a:spcBef>
+              <a:spcAft>
+                <a:spcPts val="600"/>
+              </a:spcAft>
             </a:pPr>
             <a:r>
+              <a:rPr sz="2000" b="1" i="0">
+                <a:solidFill>
+                  <a:srgbClr val="2563EB"/>
+                </a:solidFill>
+                <a:latin typeface="Calibri"/>
+              </a:rPr>
+              <a:t>•  </a:t>
+            </a:r>
+            <a:r>
               <a:rPr sz="2000" b="0" i="0">
                 <a:solidFill>
                   <a:srgbClr val="1F2937"/>
                 </a:solidFill>
                 <a:latin typeface="Calibri"/>
               </a:rPr>
-              <a:t>The agent is right most of the time — not all of the time.</a:t>
-            </a:r>
-          </a:p>
-          <a:p>
-            <a:pPr algn="ctr">
-              <a:lnSpc>
-                <a:spcPct val="130000"/>
-              </a:lnSpc>
+              <a:t>Nginx serves the site. Spring Boot runs the API. MySQL stores data.</a:t>
+            </a:r>
+          </a:p>
+          <a:p>
+            <a:pPr>
+              <a:spcBef>
+                <a:spcPts val="0"/>
+              </a:spcBef>
+              <a:spcAft>
+                <a:spcPts val="600"/>
+              </a:spcAft>
             </a:pPr>
             <a:r>
+              <a:rPr sz="2000" b="1" i="0">
+                <a:solidFill>
+                  <a:srgbClr val="2563EB"/>
+                </a:solidFill>
+                <a:latin typeface="Calibri"/>
+              </a:rPr>
+              <a:t>•  </a:t>
+            </a:r>
+            <a:r>
               <a:rPr sz="2000" b="0" i="0">
                 <a:solidFill>
                   <a:srgbClr val="1F2937"/>
                 </a:solidFill>
                 <a:latin typeface="Calibri"/>
               </a:rPr>
-              <a:t>With no checkpoints, small errors don't get caught — they compound.</a:t>
-            </a:r>
-          </a:p>
-          <a:p>
-            <a:pPr algn="ctr">
-              <a:lnSpc>
-                <a:spcPct val="130000"/>
-              </a:lnSpc>
+              <a:t>Blockly answers are graded on the server, safely.</a:t>
+            </a:r>
+          </a:p>
+          <a:p>
+            <a:pPr>
+              <a:spcBef>
+                <a:spcPts val="0"/>
+              </a:spcBef>
+              <a:spcAft>
+                <a:spcPts val="600"/>
+              </a:spcAft>
             </a:pPr>
             <a:r>
+              <a:rPr sz="2000" b="1" i="0">
+                <a:solidFill>
+                  <a:srgbClr val="2563EB"/>
+                </a:solidFill>
+                <a:latin typeface="Calibri"/>
+              </a:rPr>
+              <a:t>•  </a:t>
+            </a:r>
+            <a:r>
               <a:rPr sz="2000" b="0" i="0">
                 <a:solidFill>
                   <a:srgbClr val="1F2937"/>
                 </a:solidFill>
                 <a:latin typeface="Calibri"/>
               </a:rPr>
-              <a:t>The real bottleneck: no human-reviewed decision process.</a:t>
-            </a:r>
-          </a:p>
-          <a:p>
-            <a:pPr algn="ctr">
-              <a:lnSpc>
-                <a:spcPct val="130000"/>
-              </a:lnSpc>
-            </a:pPr>
-            <a:r>
-              <a:rPr sz="2000" b="0" i="0">
-                <a:solidFill>
-                  <a:srgbClr val="1F2937"/>
-                </a:solidFill>
-                <a:latin typeface="Calibri"/>
-              </a:rPr>
-              <a:t/>
-            </a:r>
-          </a:p>
-          <a:p>
-            <a:pPr algn="ctr">
-              <a:lnSpc>
-                <a:spcPct val="130000"/>
-              </a:lnSpc>
-            </a:pPr>
-            <a:r>
-              <a:rPr sz="2000" b="0" i="0">
-                <a:solidFill>
-                  <a:srgbClr val="1F2937"/>
-                </a:solidFill>
-                <a:latin typeface="Calibri"/>
-              </a:rPr>
-              <a:t>So the real question isn't “can an agent write code.”</a:t>
-            </a:r>
-          </a:p>
-          <a:p>
-            <a:pPr algn="ctr">
-              <a:lnSpc>
-                <a:spcPct val="130000"/>
-              </a:lnSpc>
-            </a:pPr>
-            <a:r>
-              <a:rPr sz="2000" b="0" i="0">
-                <a:solidFill>
-                  <a:srgbClr val="1F2937"/>
-                </a:solidFill>
-                <a:latin typeface="Calibri"/>
-              </a:rPr>
-              <a:t>It's: what process makes agent-built software reliable?</a:t>
-            </a:r>
-          </a:p>
-        </p:txBody>
-      </p:sp>
-      <p:sp>
-        <p:nvSpPr>
-          <p:cNvPr id="7" name="TextBox 6"/>
-          <p:cNvSpPr txBox="1"/>
-          <p:nvPr/>
-        </p:nvSpPr>
-        <p:spPr>
-          <a:xfrm>
-            <a:off x="10728655" y="6400800"/>
-            <a:ext cx="1005840" cy="320040"/>
-          </a:xfrm>
-          <a:prstGeom prst="rect">
-            <a:avLst/>
-          </a:prstGeom>
-          <a:noFill/>
-        </p:spPr>
-        <p:txBody>
-          <a:bodyPr wrap="square" anchor="t">
-            <a:spAutoFit/>
-          </a:bodyPr>
-          <a:lstStyle/>
-          <a:p>
-            <a:pPr algn="r">
-              <a:lnSpc>
-                <a:spcPct val="115000"/>
-              </a:lnSpc>
-            </a:pPr>
-            <a:r>
-              <a:rPr sz="1100" b="0" i="0">
-                <a:solidFill>
-                  <a:srgbClr val="6B7280"/>
-                </a:solidFill>
-                <a:latin typeface="Calibri"/>
-              </a:rPr>
-              <a:t>5</a:t>
-            </a:r>
-          </a:p>
-        </p:txBody>
-      </p:sp>
+              <a:t>It all runs on one server with Docker [10].</a:t>
+            </a:r>
+          </a:p>
+        </p:txBody>
+      </p:sp>
+      <p:pic>
+        <p:nvPicPr>
+          <p:cNvPr id="9" name="Picture 8" descr="architecture.png"/>
+          <p:cNvPicPr>
+            <a:picLocks noChangeAspect="1"/>
+          </p:cNvPicPr>
+          <p:nvPr/>
+        </p:nvPicPr>
+        <p:blipFill>
+          <a:blip r:embed="rId2"/>
+          <a:stretch>
+            <a:fillRect/>
+          </a:stretch>
+        </p:blipFill>
+        <p:spPr>
+          <a:xfrm>
+            <a:off x="2135386" y="2788920"/>
+            <a:ext cx="7920922" cy="3474720"/>
+          </a:xfrm>
+          <a:prstGeom prst="rect">
+            <a:avLst/>
+          </a:prstGeom>
+        </p:spPr>
+      </p:pic>
     </p:spTree>
   </p:cSld>
   <p:clrMapOvr>
@@ -11140,7 +8666,7 @@
         <p:spPr>
           <a:xfrm>
             <a:off x="502920" y="256032"/>
-            <a:ext cx="11185855" cy="320040"/>
+            <a:ext cx="11183112" cy="320040"/>
           </a:xfrm>
           <a:prstGeom prst="rect">
             <a:avLst/>
@@ -11148,16 +8674,11 @@
           <a:noFill/>
         </p:spPr>
         <p:txBody>
-          <a:bodyPr wrap="square" anchor="t">
+          <a:bodyPr wrap="square" lIns="0" rIns="0" tIns="0" bIns="0">
             <a:spAutoFit/>
           </a:bodyPr>
           <a:lstStyle/>
           <a:p>
-            <a:pPr algn="l">
-              <a:lnSpc>
-                <a:spcPct val="115000"/>
-              </a:lnSpc>
-            </a:pPr>
             <a:r>
               <a:rPr sz="1300" b="1" i="0">
                 <a:solidFill>
@@ -11165,7 +8686,7 @@
                 </a:solidFill>
                 <a:latin typeface="Calibri"/>
               </a:rPr>
-              <a:t>PART 3 — THE METHODOLOGY</a:t>
+              <a:t>PART 3 — THE SYSTEM (HOW IT WORKS)</a:t>
             </a:r>
           </a:p>
         </p:txBody>
@@ -11179,7 +8700,7 @@
         <p:spPr>
           <a:xfrm>
             <a:off x="502920" y="566928"/>
-            <a:ext cx="11185855" cy="822960"/>
+            <a:ext cx="11183112" cy="822960"/>
           </a:xfrm>
           <a:prstGeom prst="rect">
             <a:avLst/>
@@ -11187,16 +8708,11 @@
           <a:noFill/>
         </p:spPr>
         <p:txBody>
-          <a:bodyPr wrap="square" anchor="t">
+          <a:bodyPr wrap="square" lIns="0" rIns="0" tIns="0" bIns="0">
             <a:spAutoFit/>
           </a:bodyPr>
           <a:lstStyle/>
           <a:p>
-            <a:pPr algn="l">
-              <a:lnSpc>
-                <a:spcPct val="115000"/>
-              </a:lnSpc>
-            </a:pPr>
             <a:r>
               <a:rPr sz="3200" b="1" i="0">
                 <a:solidFill>
@@ -11204,7 +8720,7 @@
                 </a:solidFill>
                 <a:latin typeface="Calibri"/>
               </a:rPr>
-              <a:t>System Architecture</a:t>
+              <a:t>Student: Practice an Exercise</a:t>
             </a:r>
           </a:p>
         </p:txBody>
@@ -11218,7 +8734,7 @@
         <p:spPr>
           <a:xfrm>
             <a:off x="502920" y="1371600"/>
-            <a:ext cx="11185855" cy="20116"/>
+            <a:ext cx="11183112" cy="18288"/>
           </a:xfrm>
           <a:prstGeom prst="rect">
             <a:avLst/>
@@ -11270,16 +8786,11 @@
           <a:noFill/>
         </p:spPr>
         <p:txBody>
-          <a:bodyPr wrap="square" anchor="t">
+          <a:bodyPr wrap="square" lIns="0" rIns="0" tIns="0" bIns="0">
             <a:spAutoFit/>
           </a:bodyPr>
           <a:lstStyle/>
           <a:p>
-            <a:pPr algn="l">
-              <a:lnSpc>
-                <a:spcPct val="115000"/>
-              </a:lnSpc>
-            </a:pPr>
             <a:r>
               <a:rPr sz="1100" b="0" i="0">
                 <a:solidFill>
@@ -11300,7 +8811,7 @@
         </p:nvSpPr>
         <p:spPr>
           <a:xfrm>
-            <a:off x="10728655" y="6400800"/>
+            <a:off x="10725912" y="6400800"/>
             <a:ext cx="1005840" cy="320040"/>
           </a:xfrm>
           <a:prstGeom prst="rect">
@@ -11309,16 +8820,12 @@
           <a:noFill/>
         </p:spPr>
         <p:txBody>
-          <a:bodyPr wrap="square" anchor="t">
+          <a:bodyPr wrap="square" lIns="0" rIns="0" tIns="0" bIns="0">
             <a:spAutoFit/>
           </a:bodyPr>
           <a:lstStyle/>
           <a:p>
-            <a:pPr algn="r">
-              <a:lnSpc>
-                <a:spcPct val="115000"/>
-              </a:lnSpc>
-            </a:pPr>
+            <a:pPr algn="r"/>
             <a:r>
               <a:rPr sz="1100" b="0" i="0">
                 <a:solidFill>
@@ -11339,8 +8846,8 @@
         </p:nvSpPr>
         <p:spPr>
           <a:xfrm>
-            <a:off x="502920" y="1600200"/>
-            <a:ext cx="11185855" cy="1691640"/>
+            <a:off x="502920" y="1645920"/>
+            <a:ext cx="5486400" cy="4389120"/>
           </a:xfrm>
           <a:prstGeom prst="rect">
             <a:avLst/>
@@ -11348,21 +8855,21 @@
           <a:noFill/>
         </p:spPr>
         <p:txBody>
-          <a:bodyPr wrap="square">
+          <a:bodyPr wrap="square" lIns="0" rIns="0" tIns="0" bIns="0">
             <a:spAutoFit/>
           </a:bodyPr>
           <a:lstStyle/>
           <a:p>
             <a:pPr>
-              <a:lnSpc>
-                <a:spcPct val="115000"/>
-              </a:lnSpc>
+              <a:spcBef>
+                <a:spcPts val="0"/>
+              </a:spcBef>
               <a:spcAft>
                 <a:spcPts val="1000"/>
               </a:spcAft>
             </a:pPr>
             <a:r>
-              <a:rPr sz="2000" b="1">
+              <a:rPr sz="1900" b="1" i="0">
                 <a:solidFill>
                   <a:srgbClr val="2563EB"/>
                 </a:solidFill>
@@ -11371,26 +8878,26 @@
               <a:t>•  </a:t>
             </a:r>
             <a:r>
-              <a:rPr sz="2000">
+              <a:rPr sz="1900" b="0" i="0">
                 <a:solidFill>
                   <a:srgbClr val="1F2937"/>
                 </a:solidFill>
                 <a:latin typeface="Calibri"/>
               </a:rPr>
-              <a:t>Nginx → Spring Boot API → MySQL</a:t>
+              <a:t>The student opens a published exercise.</a:t>
             </a:r>
           </a:p>
           <a:p>
             <a:pPr>
-              <a:lnSpc>
-                <a:spcPct val="115000"/>
-              </a:lnSpc>
+              <a:spcBef>
+                <a:spcPts val="0"/>
+              </a:spcBef>
               <a:spcAft>
                 <a:spcPts val="1000"/>
               </a:spcAft>
             </a:pPr>
             <a:r>
-              <a:rPr sz="2000" b="1">
+              <a:rPr sz="1900" b="1" i="0">
                 <a:solidFill>
                   <a:srgbClr val="2563EB"/>
                 </a:solidFill>
@@ -11399,26 +8906,26 @@
               <a:t>•  </a:t>
             </a:r>
             <a:r>
-              <a:rPr sz="2000">
+              <a:rPr sz="1900" b="0" i="0">
                 <a:solidFill>
                   <a:srgbClr val="1F2937"/>
                 </a:solidFill>
                 <a:latin typeface="Calibri"/>
               </a:rPr>
-              <a:t>Blockly grading via embedded Rhino sandbox</a:t>
+              <a:t>They drag blocks to build a solution.</a:t>
             </a:r>
           </a:p>
           <a:p>
             <a:pPr>
-              <a:lnSpc>
-                <a:spcPct val="115000"/>
-              </a:lnSpc>
+              <a:spcBef>
+                <a:spcPts val="0"/>
+              </a:spcBef>
               <a:spcAft>
                 <a:spcPts val="1000"/>
               </a:spcAft>
             </a:pPr>
             <a:r>
-              <a:rPr sz="2000" b="1">
+              <a:rPr sz="1900" b="1" i="0">
                 <a:solidFill>
                   <a:srgbClr val="2563EB"/>
                 </a:solidFill>
@@ -11427,41 +8934,152 @@
               <a:t>•  </a:t>
             </a:r>
             <a:r>
-              <a:rPr sz="2000">
+              <a:rPr sz="1900" b="0" i="0">
                 <a:solidFill>
                   <a:srgbClr val="1F2937"/>
                 </a:solidFill>
                 <a:latin typeface="Calibri"/>
               </a:rPr>
-              <a:t>Prometheus + Grafana monitoring</a:t>
-            </a:r>
-          </a:p>
-        </p:txBody>
-      </p:sp>
-      <p:pic>
-        <p:nvPicPr>
-          <p:cNvPr id="9" name="Picture 8" descr="architecture.png"/>
-          <p:cNvPicPr>
-            <a:picLocks noChangeAspect="1"/>
-          </p:cNvPicPr>
-          <p:nvPr/>
-        </p:nvPicPr>
-        <p:blipFill>
-          <a:blip r:embed="rId2"/>
-          <a:stretch>
-            <a:fillRect/>
-          </a:stretch>
-        </p:blipFill>
-        <p:spPr>
-          <a:xfrm>
-            <a:off x="3256792" y="3611880"/>
-            <a:ext cx="5678110" cy="2743200"/>
-          </a:xfrm>
-          <a:prstGeom prst="rect">
-            <a:avLst/>
-          </a:prstGeom>
-        </p:spPr>
-      </p:pic>
+              <a:t>They click Run. The code runs in the browser, safely.</a:t>
+            </a:r>
+          </a:p>
+          <a:p>
+            <a:pPr>
+              <a:spcBef>
+                <a:spcPts val="0"/>
+              </a:spcBef>
+              <a:spcAft>
+                <a:spcPts val="1000"/>
+              </a:spcAft>
+            </a:pPr>
+            <a:r>
+              <a:rPr sz="1900" b="1" i="0">
+                <a:solidFill>
+                  <a:srgbClr val="2563EB"/>
+                </a:solidFill>
+                <a:latin typeface="Calibri"/>
+              </a:rPr>
+              <a:t>•  </a:t>
+            </a:r>
+            <a:r>
+              <a:rPr sz="1900" b="0" i="0">
+                <a:solidFill>
+                  <a:srgbClr val="1F2937"/>
+                </a:solidFill>
+                <a:latin typeface="Calibri"/>
+              </a:rPr>
+              <a:t>They see the result right away.</a:t>
+            </a:r>
+          </a:p>
+          <a:p>
+            <a:pPr>
+              <a:spcBef>
+                <a:spcPts val="0"/>
+              </a:spcBef>
+              <a:spcAft>
+                <a:spcPts val="1000"/>
+              </a:spcAft>
+            </a:pPr>
+            <a:r>
+              <a:rPr sz="1900" b="1" i="0">
+                <a:solidFill>
+                  <a:srgbClr val="2563EB"/>
+                </a:solidFill>
+                <a:latin typeface="Calibri"/>
+              </a:rPr>
+              <a:t>•  </a:t>
+            </a:r>
+            <a:r>
+              <a:rPr sz="1900" b="0" i="0">
+                <a:solidFill>
+                  <a:srgbClr val="1F2937"/>
+                </a:solidFill>
+                <a:latin typeface="Calibri"/>
+              </a:rPr>
+              <a:t>When done, they export their answer to a file.</a:t>
+            </a:r>
+          </a:p>
+        </p:txBody>
+      </p:sp>
+      <p:sp>
+        <p:nvSpPr>
+          <p:cNvPr id="9" name="Rounded Rectangle 8"/>
+          <p:cNvSpPr/>
+          <p:nvPr/>
+        </p:nvSpPr>
+        <p:spPr>
+          <a:xfrm>
+            <a:off x="6309360" y="1691640"/>
+            <a:ext cx="5394960" cy="4297680"/>
+          </a:xfrm>
+          <a:prstGeom prst="roundRect">
+            <a:avLst/>
+          </a:prstGeom>
+          <a:solidFill>
+            <a:srgbClr val="F3F4F6"/>
+          </a:solidFill>
+          <a:ln w="19050">
+            <a:solidFill>
+              <a:srgbClr val="9CA3AF"/>
+            </a:solidFill>
+          </a:ln>
+          <a:effectLst/>
+        </p:spPr>
+        <p:style>
+          <a:lnRef idx="1">
+            <a:schemeClr val="accent1"/>
+          </a:lnRef>
+          <a:fillRef idx="3">
+            <a:schemeClr val="accent1"/>
+          </a:fillRef>
+          <a:effectRef idx="2">
+            <a:schemeClr val="accent1"/>
+          </a:effectRef>
+          <a:fontRef idx="minor">
+            <a:schemeClr val="lt1"/>
+          </a:fontRef>
+        </p:style>
+        <p:txBody>
+          <a:bodyPr rtlCol="0" anchor="ctr" wrap="square"/>
+          <a:lstStyle/>
+          <a:p>
+            <a:pPr algn="ctr"/>
+            <a:r>
+              <a:rPr sz="1300" b="1" i="0">
+                <a:solidFill>
+                  <a:srgbClr val="6B7280"/>
+                </a:solidFill>
+                <a:latin typeface="Calibri"/>
+              </a:rPr>
+              <a:t>SCREENSHOT</a:t>
+            </a:r>
+          </a:p>
+          <a:p>
+            <a:pPr algn="ctr"/>
+            <a:r>
+              <a:rPr sz="1500" b="1" i="0">
+                <a:solidFill>
+                  <a:srgbClr val="6B7280"/>
+                </a:solidFill>
+                <a:latin typeface="Calibri"/>
+              </a:rPr>
+              <a:t>Student Blockly workspace + run result</a:t>
+            </a:r>
+          </a:p>
+          <a:p>
+            <a:pPr algn="ctr"/>
+            <a:r>
+              <a:rPr sz="1100" b="0" i="1">
+                <a:solidFill>
+                  <a:srgbClr val="6B7280"/>
+                </a:solidFill>
+                <a:latin typeface="Calibri"/>
+              </a:rPr>
+              <a:t>(capture and drop in here)</a:t>
+            </a:r>
+          </a:p>
+        </p:txBody>
+      </p:sp>
     </p:spTree>
   </p:cSld>
   <p:clrMapOvr>
@@ -11533,7 +9151,7 @@
         <p:spPr>
           <a:xfrm>
             <a:off x="502920" y="256032"/>
-            <a:ext cx="11185855" cy="320040"/>
+            <a:ext cx="11183112" cy="320040"/>
           </a:xfrm>
           <a:prstGeom prst="rect">
             <a:avLst/>
@@ -11541,16 +9159,11 @@
           <a:noFill/>
         </p:spPr>
         <p:txBody>
-          <a:bodyPr wrap="square" anchor="t">
+          <a:bodyPr wrap="square" lIns="0" rIns="0" tIns="0" bIns="0">
             <a:spAutoFit/>
           </a:bodyPr>
           <a:lstStyle/>
           <a:p>
-            <a:pPr algn="l">
-              <a:lnSpc>
-                <a:spcPct val="115000"/>
-              </a:lnSpc>
-            </a:pPr>
             <a:r>
               <a:rPr sz="1300" b="1" i="0">
                 <a:solidFill>
@@ -11558,7 +9171,7 @@
                 </a:solidFill>
                 <a:latin typeface="Calibri"/>
               </a:rPr>
-              <a:t>PART 3 — THE METHODOLOGY</a:t>
+              <a:t>PART 3 — THE SYSTEM (HOW IT WORKS)</a:t>
             </a:r>
           </a:p>
         </p:txBody>
@@ -11572,7 +9185,7 @@
         <p:spPr>
           <a:xfrm>
             <a:off x="502920" y="566928"/>
-            <a:ext cx="11185855" cy="822960"/>
+            <a:ext cx="11183112" cy="822960"/>
           </a:xfrm>
           <a:prstGeom prst="rect">
             <a:avLst/>
@@ -11580,16 +9193,11 @@
           <a:noFill/>
         </p:spPr>
         <p:txBody>
-          <a:bodyPr wrap="square" anchor="t">
+          <a:bodyPr wrap="square" lIns="0" rIns="0" tIns="0" bIns="0">
             <a:spAutoFit/>
           </a:bodyPr>
           <a:lstStyle/>
           <a:p>
-            <a:pPr algn="l">
-              <a:lnSpc>
-                <a:spcPct val="115000"/>
-              </a:lnSpc>
-            </a:pPr>
             <a:r>
               <a:rPr sz="3200" b="1" i="0">
                 <a:solidFill>
@@ -11597,7 +9205,7 @@
                 </a:solidFill>
                 <a:latin typeface="Calibri"/>
               </a:rPr>
-              <a:t>Runtime: Seven Containers, One Server</a:t>
+              <a:t>Tutor: Create and Publish Exercises</a:t>
             </a:r>
           </a:p>
         </p:txBody>
@@ -11611,7 +9219,7 @@
         <p:spPr>
           <a:xfrm>
             <a:off x="502920" y="1371600"/>
-            <a:ext cx="11185855" cy="20116"/>
+            <a:ext cx="11183112" cy="18288"/>
           </a:xfrm>
           <a:prstGeom prst="rect">
             <a:avLst/>
@@ -11663,16 +9271,11 @@
           <a:noFill/>
         </p:spPr>
         <p:txBody>
-          <a:bodyPr wrap="square" anchor="t">
+          <a:bodyPr wrap="square" lIns="0" rIns="0" tIns="0" bIns="0">
             <a:spAutoFit/>
           </a:bodyPr>
           <a:lstStyle/>
           <a:p>
-            <a:pPr algn="l">
-              <a:lnSpc>
-                <a:spcPct val="115000"/>
-              </a:lnSpc>
-            </a:pPr>
             <a:r>
               <a:rPr sz="1100" b="0" i="0">
                 <a:solidFill>
@@ -11693,7 +9296,7 @@
         </p:nvSpPr>
         <p:spPr>
           <a:xfrm>
-            <a:off x="10728655" y="6400800"/>
+            <a:off x="10725912" y="6400800"/>
             <a:ext cx="1005840" cy="320040"/>
           </a:xfrm>
           <a:prstGeom prst="rect">
@@ -11702,16 +9305,12 @@
           <a:noFill/>
         </p:spPr>
         <p:txBody>
-          <a:bodyPr wrap="square" anchor="t">
+          <a:bodyPr wrap="square" lIns="0" rIns="0" tIns="0" bIns="0">
             <a:spAutoFit/>
           </a:bodyPr>
           <a:lstStyle/>
           <a:p>
-            <a:pPr algn="r">
-              <a:lnSpc>
-                <a:spcPct val="115000"/>
-              </a:lnSpc>
-            </a:pPr>
+            <a:pPr algn="r"/>
             <a:r>
               <a:rPr sz="1100" b="0" i="0">
                 <a:solidFill>
@@ -11732,8 +9331,8 @@
         </p:nvSpPr>
         <p:spPr>
           <a:xfrm>
-            <a:off x="502920" y="1600200"/>
-            <a:ext cx="11185855" cy="1691640"/>
+            <a:off x="502920" y="1645920"/>
+            <a:ext cx="5486400" cy="4389120"/>
           </a:xfrm>
           <a:prstGeom prst="rect">
             <a:avLst/>
@@ -11741,21 +9340,21 @@
           <a:noFill/>
         </p:spPr>
         <p:txBody>
-          <a:bodyPr wrap="square">
+          <a:bodyPr wrap="square" lIns="0" rIns="0" tIns="0" bIns="0">
             <a:spAutoFit/>
           </a:bodyPr>
           <a:lstStyle/>
           <a:p>
             <a:pPr>
-              <a:lnSpc>
-                <a:spcPct val="115000"/>
-              </a:lnSpc>
+              <a:spcBef>
+                <a:spcPts val="0"/>
+              </a:spcBef>
               <a:spcAft>
                 <a:spcPts val="1000"/>
               </a:spcAft>
             </a:pPr>
             <a:r>
-              <a:rPr sz="2000" b="1">
+              <a:rPr sz="1900" b="1" i="0">
                 <a:solidFill>
                   <a:srgbClr val="2563EB"/>
                 </a:solidFill>
@@ -11764,26 +9363,26 @@
               <a:t>•  </a:t>
             </a:r>
             <a:r>
-              <a:rPr sz="2000">
+              <a:rPr sz="1900" b="0" i="0">
                 <a:solidFill>
                   <a:srgbClr val="1F2937"/>
                 </a:solidFill>
                 <a:latin typeface="Calibri"/>
               </a:rPr>
-              <a:t>nginx · api-server · mysql · sandbox</a:t>
+              <a:t>The tutor creates a new exercise. They set the task and the blocks.</a:t>
             </a:r>
           </a:p>
           <a:p>
             <a:pPr>
-              <a:lnSpc>
-                <a:spcPct val="115000"/>
-              </a:lnSpc>
+              <a:spcBef>
+                <a:spcPts val="0"/>
+              </a:spcBef>
               <a:spcAft>
                 <a:spcPts val="1000"/>
               </a:spcAft>
             </a:pPr>
             <a:r>
-              <a:rPr sz="2000" b="1">
+              <a:rPr sz="1900" b="1" i="0">
                 <a:solidFill>
                   <a:srgbClr val="2563EB"/>
                 </a:solidFill>
@@ -11792,26 +9391,26 @@
               <a:t>•  </a:t>
             </a:r>
             <a:r>
-              <a:rPr sz="2000">
+              <a:rPr sz="1900" b="0" i="0">
                 <a:solidFill>
                   <a:srgbClr val="1F2937"/>
                 </a:solidFill>
                 <a:latin typeface="Calibri"/>
               </a:rPr>
-              <a:t>prometheus · grafana · backup</a:t>
+              <a:t>They can edit and publish it.</a:t>
             </a:r>
           </a:p>
           <a:p>
             <a:pPr>
-              <a:lnSpc>
-                <a:spcPct val="115000"/>
-              </a:lnSpc>
+              <a:spcBef>
+                <a:spcPts val="0"/>
+              </a:spcBef>
               <a:spcAft>
                 <a:spcPts val="1000"/>
               </a:spcAft>
             </a:pPr>
             <a:r>
-              <a:rPr sz="2000" b="1">
+              <a:rPr sz="1900" b="1" i="0">
                 <a:solidFill>
                   <a:srgbClr val="2563EB"/>
                 </a:solidFill>
@@ -11820,41 +9419,124 @@
               <a:t>•  </a:t>
             </a:r>
             <a:r>
-              <a:rPr sz="2000">
+              <a:rPr sz="1900" b="0" i="0">
                 <a:solidFill>
                   <a:srgbClr val="1F2937"/>
                 </a:solidFill>
                 <a:latin typeface="Calibri"/>
               </a:rPr>
-              <a:t>Single server — no Kubernetes, no Redis, no Kafka</a:t>
-            </a:r>
-          </a:p>
-        </p:txBody>
-      </p:sp>
-      <p:pic>
-        <p:nvPicPr>
-          <p:cNvPr id="9" name="Picture 8" descr="containers.png"/>
-          <p:cNvPicPr>
-            <a:picLocks noChangeAspect="1"/>
-          </p:cNvPicPr>
-          <p:nvPr/>
-        </p:nvPicPr>
-        <p:blipFill>
-          <a:blip r:embed="rId2"/>
-          <a:stretch>
-            <a:fillRect/>
-          </a:stretch>
-        </p:blipFill>
-        <p:spPr>
-          <a:xfrm>
-            <a:off x="3256792" y="3611880"/>
-            <a:ext cx="5678110" cy="2743200"/>
-          </a:xfrm>
-          <a:prstGeom prst="rect">
-            <a:avLst/>
-          </a:prstGeom>
-        </p:spPr>
-      </p:pic>
+              <a:t>Every edit saves a new version. Old versions are never lost.</a:t>
+            </a:r>
+          </a:p>
+          <a:p>
+            <a:pPr>
+              <a:spcBef>
+                <a:spcPts val="0"/>
+              </a:spcBef>
+              <a:spcAft>
+                <a:spcPts val="1000"/>
+              </a:spcAft>
+            </a:pPr>
+            <a:r>
+              <a:rPr sz="1900" b="1" i="0">
+                <a:solidFill>
+                  <a:srgbClr val="2563EB"/>
+                </a:solidFill>
+                <a:latin typeface="Calibri"/>
+              </a:rPr>
+              <a:t>•  </a:t>
+            </a:r>
+            <a:r>
+              <a:rPr sz="1900" b="0" i="0">
+                <a:solidFill>
+                  <a:srgbClr val="1F2937"/>
+                </a:solidFill>
+                <a:latin typeface="Calibri"/>
+              </a:rPr>
+              <a:t>Rollback is easy. Just point back to an old version.</a:t>
+            </a:r>
+          </a:p>
+        </p:txBody>
+      </p:sp>
+      <p:sp>
+        <p:nvSpPr>
+          <p:cNvPr id="9" name="Rounded Rectangle 8"/>
+          <p:cNvSpPr/>
+          <p:nvPr/>
+        </p:nvSpPr>
+        <p:spPr>
+          <a:xfrm>
+            <a:off x="6309360" y="1691640"/>
+            <a:ext cx="5394960" cy="4297680"/>
+          </a:xfrm>
+          <a:prstGeom prst="roundRect">
+            <a:avLst/>
+          </a:prstGeom>
+          <a:solidFill>
+            <a:srgbClr val="F3F4F6"/>
+          </a:solidFill>
+          <a:ln w="19050">
+            <a:solidFill>
+              <a:srgbClr val="9CA3AF"/>
+            </a:solidFill>
+          </a:ln>
+          <a:effectLst/>
+        </p:spPr>
+        <p:style>
+          <a:lnRef idx="1">
+            <a:schemeClr val="accent1"/>
+          </a:lnRef>
+          <a:fillRef idx="3">
+            <a:schemeClr val="accent1"/>
+          </a:fillRef>
+          <a:effectRef idx="2">
+            <a:schemeClr val="accent1"/>
+          </a:effectRef>
+          <a:fontRef idx="minor">
+            <a:schemeClr val="lt1"/>
+          </a:fontRef>
+        </p:style>
+        <p:txBody>
+          <a:bodyPr rtlCol="0" anchor="ctr" wrap="square"/>
+          <a:lstStyle/>
+          <a:p>
+            <a:pPr algn="ctr"/>
+            <a:r>
+              <a:rPr sz="1300" b="1" i="0">
+                <a:solidFill>
+                  <a:srgbClr val="6B7280"/>
+                </a:solidFill>
+                <a:latin typeface="Calibri"/>
+              </a:rPr>
+              <a:t>SCREENSHOT</a:t>
+            </a:r>
+          </a:p>
+          <a:p>
+            <a:pPr algn="ctr"/>
+            <a:r>
+              <a:rPr sz="1500" b="1" i="0">
+                <a:solidFill>
+                  <a:srgbClr val="6B7280"/>
+                </a:solidFill>
+                <a:latin typeface="Calibri"/>
+              </a:rPr>
+              <a:t>Exercise editor + version list</a:t>
+            </a:r>
+          </a:p>
+          <a:p>
+            <a:pPr algn="ctr"/>
+            <a:r>
+              <a:rPr sz="1100" b="0" i="1">
+                <a:solidFill>
+                  <a:srgbClr val="6B7280"/>
+                </a:solidFill>
+                <a:latin typeface="Calibri"/>
+              </a:rPr>
+              <a:t>(capture and drop in here)</a:t>
+            </a:r>
+          </a:p>
+        </p:txBody>
+      </p:sp>
     </p:spTree>
   </p:cSld>
   <p:clrMapOvr>
@@ -11926,7 +9608,7 @@
         <p:spPr>
           <a:xfrm>
             <a:off x="502920" y="256032"/>
-            <a:ext cx="11185855" cy="320040"/>
+            <a:ext cx="11183112" cy="320040"/>
           </a:xfrm>
           <a:prstGeom prst="rect">
             <a:avLst/>
@@ -11934,16 +9616,11 @@
           <a:noFill/>
         </p:spPr>
         <p:txBody>
-          <a:bodyPr wrap="square" anchor="t">
+          <a:bodyPr wrap="square" lIns="0" rIns="0" tIns="0" bIns="0">
             <a:spAutoFit/>
           </a:bodyPr>
           <a:lstStyle/>
           <a:p>
-            <a:pPr algn="l">
-              <a:lnSpc>
-                <a:spcPct val="115000"/>
-              </a:lnSpc>
-            </a:pPr>
             <a:r>
               <a:rPr sz="1300" b="1" i="0">
                 <a:solidFill>
@@ -11951,7 +9628,7 @@
                 </a:solidFill>
                 <a:latin typeface="Calibri"/>
               </a:rPr>
-              <a:t>PART 3 — THE METHODOLOGY</a:t>
+              <a:t>PART 3 — THE SYSTEM (HOW IT WORKS)</a:t>
             </a:r>
           </a:p>
         </p:txBody>
@@ -11965,7 +9642,7 @@
         <p:spPr>
           <a:xfrm>
             <a:off x="502920" y="566928"/>
-            <a:ext cx="11185855" cy="822960"/>
+            <a:ext cx="11183112" cy="822960"/>
           </a:xfrm>
           <a:prstGeom prst="rect">
             <a:avLst/>
@@ -11973,16 +9650,11 @@
           <a:noFill/>
         </p:spPr>
         <p:txBody>
-          <a:bodyPr wrap="square" anchor="t">
+          <a:bodyPr wrap="square" lIns="0" rIns="0" tIns="0" bIns="0">
             <a:spAutoFit/>
           </a:bodyPr>
           <a:lstStyle/>
           <a:p>
-            <a:pPr algn="l">
-              <a:lnSpc>
-                <a:spcPct val="115000"/>
-              </a:lnSpc>
-            </a:pPr>
             <a:r>
               <a:rPr sz="3200" b="1" i="0">
                 <a:solidFill>
@@ -11990,7 +9662,7 @@
                 </a:solidFill>
                 <a:latin typeface="Calibri"/>
               </a:rPr>
-              <a:t>Tech Stack &amp; Safety Design</a:t>
+              <a:t>Tutor: Organize Courses and Categories</a:t>
             </a:r>
           </a:p>
         </p:txBody>
@@ -12004,7 +9676,7 @@
         <p:spPr>
           <a:xfrm>
             <a:off x="502920" y="1371600"/>
-            <a:ext cx="11185855" cy="20116"/>
+            <a:ext cx="11183112" cy="18288"/>
           </a:xfrm>
           <a:prstGeom prst="rect">
             <a:avLst/>
@@ -12056,16 +9728,11 @@
           <a:noFill/>
         </p:spPr>
         <p:txBody>
-          <a:bodyPr wrap="square" anchor="t">
+          <a:bodyPr wrap="square" lIns="0" rIns="0" tIns="0" bIns="0">
             <a:spAutoFit/>
           </a:bodyPr>
           <a:lstStyle/>
           <a:p>
-            <a:pPr algn="l">
-              <a:lnSpc>
-                <a:spcPct val="115000"/>
-              </a:lnSpc>
-            </a:pPr>
             <a:r>
               <a:rPr sz="1100" b="0" i="0">
                 <a:solidFill>
@@ -12086,7 +9753,7 @@
         </p:nvSpPr>
         <p:spPr>
           <a:xfrm>
-            <a:off x="10728655" y="6400800"/>
+            <a:off x="10725912" y="6400800"/>
             <a:ext cx="1005840" cy="320040"/>
           </a:xfrm>
           <a:prstGeom prst="rect">
@@ -12095,16 +9762,12 @@
           <a:noFill/>
         </p:spPr>
         <p:txBody>
-          <a:bodyPr wrap="square" anchor="t">
+          <a:bodyPr wrap="square" lIns="0" rIns="0" tIns="0" bIns="0">
             <a:spAutoFit/>
           </a:bodyPr>
           <a:lstStyle/>
           <a:p>
-            <a:pPr algn="r">
-              <a:lnSpc>
-                <a:spcPct val="115000"/>
-              </a:lnSpc>
-            </a:pPr>
+            <a:pPr algn="r"/>
             <a:r>
               <a:rPr sz="1100" b="0" i="0">
                 <a:solidFill>
@@ -12125,8 +9788,8 @@
         </p:nvSpPr>
         <p:spPr>
           <a:xfrm>
-            <a:off x="502920" y="1600200"/>
-            <a:ext cx="11185855" cy="4709160"/>
+            <a:off x="502920" y="1645920"/>
+            <a:ext cx="5486400" cy="4389120"/>
           </a:xfrm>
           <a:prstGeom prst="rect">
             <a:avLst/>
@@ -12134,21 +9797,21 @@
           <a:noFill/>
         </p:spPr>
         <p:txBody>
-          <a:bodyPr wrap="square">
+          <a:bodyPr wrap="square" lIns="0" rIns="0" tIns="0" bIns="0">
             <a:spAutoFit/>
           </a:bodyPr>
           <a:lstStyle/>
           <a:p>
             <a:pPr>
-              <a:lnSpc>
-                <a:spcPct val="115000"/>
-              </a:lnSpc>
+              <a:spcBef>
+                <a:spcPts val="0"/>
+              </a:spcBef>
               <a:spcAft>
                 <a:spcPts val="1000"/>
               </a:spcAft>
             </a:pPr>
             <a:r>
-              <a:rPr sz="2000" b="1">
+              <a:rPr sz="1900" b="1" i="0">
                 <a:solidFill>
                   <a:srgbClr val="2563EB"/>
                 </a:solidFill>
@@ -12157,26 +9820,26 @@
               <a:t>•  </a:t>
             </a:r>
             <a:r>
-              <a:rPr sz="2000">
+              <a:rPr sz="1900" b="0" i="0">
                 <a:solidFill>
                   <a:srgbClr val="1F2937"/>
                 </a:solidFill>
                 <a:latin typeface="Calibri"/>
               </a:rPr>
-              <a:t>Frontend: React 18 · Vite · Blockly</a:t>
+              <a:t>The tutor groups exercises into courses.</a:t>
             </a:r>
           </a:p>
           <a:p>
             <a:pPr>
-              <a:lnSpc>
-                <a:spcPct val="115000"/>
-              </a:lnSpc>
+              <a:spcBef>
+                <a:spcPts val="0"/>
+              </a:spcBef>
               <a:spcAft>
                 <a:spcPts val="1000"/>
               </a:spcAft>
             </a:pPr>
             <a:r>
-              <a:rPr sz="2000" b="1">
+              <a:rPr sz="1900" b="1" i="0">
                 <a:solidFill>
                   <a:srgbClr val="2563EB"/>
                 </a:solidFill>
@@ -12185,26 +9848,26 @@
               <a:t>•  </a:t>
             </a:r>
             <a:r>
-              <a:rPr sz="2000">
+              <a:rPr sz="1900" b="0" i="0">
                 <a:solidFill>
                   <a:srgbClr val="1F2937"/>
                 </a:solidFill>
                 <a:latin typeface="Calibri"/>
               </a:rPr>
-              <a:t>Backend: Spring Boot 3.5 · Spring Security+JWT · Flyway</a:t>
+              <a:t>Categories keep exercises tidy.</a:t>
             </a:r>
           </a:p>
           <a:p>
             <a:pPr>
-              <a:lnSpc>
-                <a:spcPct val="115000"/>
-              </a:lnSpc>
+              <a:spcBef>
+                <a:spcPts val="0"/>
+              </a:spcBef>
               <a:spcAft>
                 <a:spcPts val="1000"/>
               </a:spcAft>
             </a:pPr>
             <a:r>
-              <a:rPr sz="2000" b="1">
+              <a:rPr sz="1900" b="1" i="0">
                 <a:solidFill>
                   <a:srgbClr val="2563EB"/>
                 </a:solidFill>
@@ -12213,26 +9876,26 @@
               <a:t>•  </a:t>
             </a:r>
             <a:r>
-              <a:rPr sz="2000">
+              <a:rPr sz="1900" b="0" i="0">
                 <a:solidFill>
                   <a:srgbClr val="1F2937"/>
                 </a:solidFill>
                 <a:latin typeface="Calibri"/>
               </a:rPr>
-              <a:t>Immutable exercise versions — every edit is a new version</a:t>
+              <a:t>Tutors assign exercises to a course.</a:t>
             </a:r>
           </a:p>
           <a:p>
             <a:pPr>
-              <a:lnSpc>
-                <a:spcPct val="115000"/>
-              </a:lnSpc>
+              <a:spcBef>
+                <a:spcPts val="0"/>
+              </a:spcBef>
               <a:spcAft>
                 <a:spcPts val="1000"/>
               </a:spcAft>
             </a:pPr>
             <a:r>
-              <a:rPr sz="2000" b="1">
+              <a:rPr sz="1900" b="1" i="0">
                 <a:solidFill>
                   <a:srgbClr val="2563EB"/>
                 </a:solidFill>
@@ -12241,13 +9904,92 @@
               <a:t>•  </a:t>
             </a:r>
             <a:r>
-              <a:rPr sz="2000">
+              <a:rPr sz="1900" b="0" i="0">
                 <a:solidFill>
                   <a:srgbClr val="1F2937"/>
                 </a:solidFill>
                 <a:latin typeface="Calibri"/>
               </a:rPr>
-              <a:t>Soft deletes only — never hard delete</a:t>
+              <a:t>They pick which students see them.</a:t>
+            </a:r>
+          </a:p>
+        </p:txBody>
+      </p:sp>
+      <p:sp>
+        <p:nvSpPr>
+          <p:cNvPr id="9" name="Rounded Rectangle 8"/>
+          <p:cNvSpPr/>
+          <p:nvPr/>
+        </p:nvSpPr>
+        <p:spPr>
+          <a:xfrm>
+            <a:off x="6309360" y="1691640"/>
+            <a:ext cx="5394960" cy="4297680"/>
+          </a:xfrm>
+          <a:prstGeom prst="roundRect">
+            <a:avLst/>
+          </a:prstGeom>
+          <a:solidFill>
+            <a:srgbClr val="F3F4F6"/>
+          </a:solidFill>
+          <a:ln w="19050">
+            <a:solidFill>
+              <a:srgbClr val="9CA3AF"/>
+            </a:solidFill>
+          </a:ln>
+          <a:effectLst/>
+        </p:spPr>
+        <p:style>
+          <a:lnRef idx="1">
+            <a:schemeClr val="accent1"/>
+          </a:lnRef>
+          <a:fillRef idx="3">
+            <a:schemeClr val="accent1"/>
+          </a:fillRef>
+          <a:effectRef idx="2">
+            <a:schemeClr val="accent1"/>
+          </a:effectRef>
+          <a:fontRef idx="minor">
+            <a:schemeClr val="lt1"/>
+          </a:fontRef>
+        </p:style>
+        <p:txBody>
+          <a:bodyPr rtlCol="0" anchor="ctr" wrap="square"/>
+          <a:lstStyle/>
+          <a:p>
+            <a:pPr algn="ctr"/>
+            <a:r>
+              <a:rPr sz="1300" b="1" i="0">
+                <a:solidFill>
+                  <a:srgbClr val="6B7280"/>
+                </a:solidFill>
+                <a:latin typeface="Calibri"/>
+              </a:rPr>
+              <a:t>SCREENSHOT</a:t>
+            </a:r>
+          </a:p>
+          <a:p>
+            <a:pPr algn="ctr"/>
+            <a:r>
+              <a:rPr sz="1500" b="1" i="0">
+                <a:solidFill>
+                  <a:srgbClr val="6B7280"/>
+                </a:solidFill>
+                <a:latin typeface="Calibri"/>
+              </a:rPr>
+              <a:t>Course / category management view</a:t>
+            </a:r>
+          </a:p>
+          <a:p>
+            <a:pPr algn="ctr"/>
+            <a:r>
+              <a:rPr sz="1100" b="0" i="1">
+                <a:solidFill>
+                  <a:srgbClr val="6B7280"/>
+                </a:solidFill>
+                <a:latin typeface="Calibri"/>
+              </a:rPr>
+              <a:t>(capture and drop in here)</a:t>
             </a:r>
           </a:p>
         </p:txBody>
@@ -12279,13 +10021,13 @@
         <p:spPr>
           <a:xfrm>
             <a:off x="0" y="0"/>
-            <a:ext cx="12191695" cy="6858000"/>
+            <a:ext cx="12191695" cy="109728"/>
           </a:xfrm>
           <a:prstGeom prst="rect">
             <a:avLst/>
           </a:prstGeom>
           <a:solidFill>
-            <a:srgbClr val="FAFAFB"/>
+            <a:srgbClr val="2563EB"/>
           </a:solidFill>
           <a:ln>
             <a:noFill/>
@@ -12316,20 +10058,88 @@
       </p:sp>
       <p:sp>
         <p:nvSpPr>
-          <p:cNvPr id="3" name="Rectangle 2"/>
+          <p:cNvPr id="3" name="TextBox 2"/>
+          <p:cNvSpPr txBox="1"/>
+          <p:nvPr/>
+        </p:nvSpPr>
+        <p:spPr>
+          <a:xfrm>
+            <a:off x="502920" y="256032"/>
+            <a:ext cx="11183112" cy="320040"/>
+          </a:xfrm>
+          <a:prstGeom prst="rect">
+            <a:avLst/>
+          </a:prstGeom>
+          <a:noFill/>
+        </p:spPr>
+        <p:txBody>
+          <a:bodyPr wrap="square" lIns="0" rIns="0" tIns="0" bIns="0">
+            <a:spAutoFit/>
+          </a:bodyPr>
+          <a:lstStyle/>
+          <a:p>
+            <a:r>
+              <a:rPr sz="1300" b="1" i="0">
+                <a:solidFill>
+                  <a:srgbClr val="6B7280"/>
+                </a:solidFill>
+                <a:latin typeface="Calibri"/>
+              </a:rPr>
+              <a:t>PART 3 — THE SYSTEM (HOW IT WORKS)</a:t>
+            </a:r>
+          </a:p>
+        </p:txBody>
+      </p:sp>
+      <p:sp>
+        <p:nvSpPr>
+          <p:cNvPr id="4" name="TextBox 3"/>
+          <p:cNvSpPr txBox="1"/>
+          <p:nvPr/>
+        </p:nvSpPr>
+        <p:spPr>
+          <a:xfrm>
+            <a:off x="502920" y="566928"/>
+            <a:ext cx="11183112" cy="822960"/>
+          </a:xfrm>
+          <a:prstGeom prst="rect">
+            <a:avLst/>
+          </a:prstGeom>
+          <a:noFill/>
+        </p:spPr>
+        <p:txBody>
+          <a:bodyPr wrap="square" lIns="0" rIns="0" tIns="0" bIns="0">
+            <a:spAutoFit/>
+          </a:bodyPr>
+          <a:lstStyle/>
+          <a:p>
+            <a:r>
+              <a:rPr sz="3200" b="1" i="0">
+                <a:solidFill>
+                  <a:srgbClr val="1F2937"/>
+                </a:solidFill>
+                <a:latin typeface="Calibri"/>
+              </a:rPr>
+              <a:t>The Core: Export / Import Grading</a:t>
+            </a:r>
+          </a:p>
+        </p:txBody>
+      </p:sp>
+      <p:sp>
+        <p:nvSpPr>
+          <p:cNvPr id="5" name="Rectangle 4"/>
           <p:cNvSpPr/>
           <p:nvPr/>
         </p:nvSpPr>
         <p:spPr>
           <a:xfrm>
-            <a:off x="0" y="0"/>
-            <a:ext cx="12191695" cy="109728"/>
+            <a:off x="502920" y="1371600"/>
+            <a:ext cx="11183112" cy="18288"/>
           </a:xfrm>
           <a:prstGeom prst="rect">
             <a:avLst/>
           </a:prstGeom>
           <a:solidFill>
-            <a:srgbClr val="1F2937"/>
+            <a:srgbClr val="E5E7EB"/>
           </a:solidFill>
           <a:ln>
             <a:noFill/>
@@ -12360,14 +10170,14 @@
       </p:sp>
       <p:sp>
         <p:nvSpPr>
-          <p:cNvPr id="4" name="TextBox 3"/>
+          <p:cNvPr id="6" name="TextBox 5"/>
           <p:cNvSpPr txBox="1"/>
           <p:nvPr/>
         </p:nvSpPr>
         <p:spPr>
           <a:xfrm>
-            <a:off x="731520" y="2057400"/>
-            <a:ext cx="10728655" cy="1280160"/>
+            <a:off x="502920" y="6400800"/>
+            <a:ext cx="5486400" cy="320040"/>
           </a:xfrm>
           <a:prstGeom prst="rect">
             <a:avLst/>
@@ -12375,37 +10185,32 @@
           <a:noFill/>
         </p:spPr>
         <p:txBody>
-          <a:bodyPr wrap="square" anchor="ctr">
+          <a:bodyPr wrap="square" lIns="0" rIns="0" tIns="0" bIns="0">
             <a:spAutoFit/>
           </a:bodyPr>
           <a:lstStyle/>
           <a:p>
-            <a:pPr algn="ctr">
-              <a:lnSpc>
-                <a:spcPct val="115000"/>
-              </a:lnSpc>
-            </a:pPr>
-            <a:r>
-              <a:rPr sz="4400" b="1" i="0">
-                <a:solidFill>
-                  <a:srgbClr val="1F2937"/>
-                </a:solidFill>
-                <a:latin typeface="Calibri"/>
-              </a:rPr>
-              <a:t>How Was This Actually Built?</a:t>
-            </a:r>
-          </a:p>
-        </p:txBody>
-      </p:sp>
-      <p:sp>
-        <p:nvSpPr>
-          <p:cNvPr id="5" name="TextBox 4"/>
+            <a:r>
+              <a:rPr sz="1100" b="0" i="0">
+                <a:solidFill>
+                  <a:srgbClr val="6B7280"/>
+                </a:solidFill>
+                <a:latin typeface="Calibri"/>
+              </a:rPr>
+              <a:t>Programming Learning Platform — Capstone</a:t>
+            </a:r>
+          </a:p>
+        </p:txBody>
+      </p:sp>
+      <p:sp>
+        <p:nvSpPr>
+          <p:cNvPr id="7" name="TextBox 6"/>
           <p:cNvSpPr txBox="1"/>
           <p:nvPr/>
         </p:nvSpPr>
         <p:spPr>
           <a:xfrm>
-            <a:off x="10728655" y="6400800"/>
+            <a:off x="10725912" y="6400800"/>
             <a:ext cx="1005840" cy="320040"/>
           </a:xfrm>
           <a:prstGeom prst="rect">
@@ -12414,28 +10219,211 @@
           <a:noFill/>
         </p:spPr>
         <p:txBody>
-          <a:bodyPr wrap="square" anchor="t">
+          <a:bodyPr wrap="square" lIns="0" rIns="0" tIns="0" bIns="0">
             <a:spAutoFit/>
           </a:bodyPr>
           <a:lstStyle/>
           <a:p>
-            <a:pPr algn="r">
-              <a:lnSpc>
-                <a:spcPct val="115000"/>
-              </a:lnSpc>
+            <a:pPr algn="r"/>
+            <a:r>
+              <a:rPr sz="1100" b="0" i="0">
+                <a:solidFill>
+                  <a:srgbClr val="6B7280"/>
+                </a:solidFill>
+                <a:latin typeface="Calibri"/>
+              </a:rPr>
+              <a:t>9</a:t>
+            </a:r>
+          </a:p>
+        </p:txBody>
+      </p:sp>
+      <p:sp>
+        <p:nvSpPr>
+          <p:cNvPr id="8" name="TextBox 7"/>
+          <p:cNvSpPr txBox="1"/>
+          <p:nvPr/>
+        </p:nvSpPr>
+        <p:spPr>
+          <a:xfrm>
+            <a:off x="502920" y="1600200"/>
+            <a:ext cx="11183112" cy="1828800"/>
+          </a:xfrm>
+          <a:prstGeom prst="rect">
+            <a:avLst/>
+          </a:prstGeom>
+          <a:noFill/>
+        </p:spPr>
+        <p:txBody>
+          <a:bodyPr wrap="square" lIns="0" rIns="0" tIns="0" bIns="0">
+            <a:spAutoFit/>
+          </a:bodyPr>
+          <a:lstStyle/>
+          <a:p>
+            <a:pPr>
+              <a:spcBef>
+                <a:spcPts val="0"/>
+              </a:spcBef>
+              <a:spcAft>
+                <a:spcPts val="600"/>
+              </a:spcAft>
             </a:pPr>
             <a:r>
-              <a:rPr sz="1100" b="0" i="0">
-                <a:solidFill>
-                  <a:srgbClr val="6B7280"/>
-                </a:solidFill>
-                <a:latin typeface="Calibri"/>
-              </a:rPr>
-              <a:t>9</a:t>
-            </a:r>
-          </a:p>
-        </p:txBody>
-      </p:sp>
+              <a:rPr sz="1900" b="1" i="0">
+                <a:solidFill>
+                  <a:srgbClr val="2563EB"/>
+                </a:solidFill>
+                <a:latin typeface="Calibri"/>
+              </a:rPr>
+              <a:t>•  </a:t>
+            </a:r>
+            <a:r>
+              <a:rPr sz="1900" b="0" i="0">
+                <a:solidFill>
+                  <a:srgbClr val="1F2937"/>
+                </a:solidFill>
+                <a:latin typeface="Calibri"/>
+              </a:rPr>
+              <a:t>This replaces the old OLE workflow.</a:t>
+            </a:r>
+          </a:p>
+          <a:p>
+            <a:pPr>
+              <a:spcBef>
+                <a:spcPts val="0"/>
+              </a:spcBef>
+              <a:spcAft>
+                <a:spcPts val="600"/>
+              </a:spcAft>
+            </a:pPr>
+            <a:r>
+              <a:rPr sz="1900" b="1" i="0">
+                <a:solidFill>
+                  <a:srgbClr val="2563EB"/>
+                </a:solidFill>
+                <a:latin typeface="Calibri"/>
+              </a:rPr>
+              <a:t>•  </a:t>
+            </a:r>
+            <a:r>
+              <a:rPr sz="1900" b="0" i="0">
+                <a:solidFill>
+                  <a:srgbClr val="1F2937"/>
+                </a:solidFill>
+                <a:latin typeface="Calibri"/>
+              </a:rPr>
+              <a:t>Student exports an answer. The tutor imports it.</a:t>
+            </a:r>
+          </a:p>
+          <a:p>
+            <a:pPr>
+              <a:spcBef>
+                <a:spcPts val="0"/>
+              </a:spcBef>
+              <a:spcAft>
+                <a:spcPts val="600"/>
+              </a:spcAft>
+            </a:pPr>
+            <a:r>
+              <a:rPr sz="1900" b="1" i="0">
+                <a:solidFill>
+                  <a:srgbClr val="2563EB"/>
+                </a:solidFill>
+                <a:latin typeface="Calibri"/>
+              </a:rPr>
+              <a:t>•  </a:t>
+            </a:r>
+            <a:r>
+              <a:rPr sz="1900" b="0" i="0">
+                <a:solidFill>
+                  <a:srgbClr val="1F2937"/>
+                </a:solidFill>
+                <a:latin typeface="Calibri"/>
+              </a:rPr>
+              <a:t>The system grades Blockly answers automatically, on the server.</a:t>
+            </a:r>
+          </a:p>
+          <a:p>
+            <a:pPr>
+              <a:spcBef>
+                <a:spcPts val="0"/>
+              </a:spcBef>
+              <a:spcAft>
+                <a:spcPts val="600"/>
+              </a:spcAft>
+            </a:pPr>
+            <a:r>
+              <a:rPr sz="1900" b="1" i="0">
+                <a:solidFill>
+                  <a:srgbClr val="2563EB"/>
+                </a:solidFill>
+                <a:latin typeface="Calibri"/>
+              </a:rPr>
+              <a:t>•  </a:t>
+            </a:r>
+            <a:r>
+              <a:rPr sz="1900" b="0" i="0">
+                <a:solidFill>
+                  <a:srgbClr val="1F2937"/>
+                </a:solidFill>
+                <a:latin typeface="Calibri"/>
+              </a:rPr>
+              <a:t>It flags duplicates. It flags version mismatches.</a:t>
+            </a:r>
+          </a:p>
+          <a:p>
+            <a:pPr>
+              <a:spcBef>
+                <a:spcPts val="0"/>
+              </a:spcBef>
+              <a:spcAft>
+                <a:spcPts val="600"/>
+              </a:spcAft>
+            </a:pPr>
+            <a:r>
+              <a:rPr sz="1900" b="1" i="0">
+                <a:solidFill>
+                  <a:srgbClr val="2563EB"/>
+                </a:solidFill>
+                <a:latin typeface="Calibri"/>
+              </a:rPr>
+              <a:t>•  </a:t>
+            </a:r>
+            <a:r>
+              <a:rPr sz="1900" b="0" i="0">
+                <a:solidFill>
+                  <a:srgbClr val="1F2937"/>
+                </a:solidFill>
+                <a:latin typeface="Calibri"/>
+              </a:rPr>
+              <a:t>Tutors can export the results to CSV.</a:t>
+            </a:r>
+          </a:p>
+        </p:txBody>
+      </p:sp>
+      <p:pic>
+        <p:nvPicPr>
+          <p:cNvPr id="9" name="Picture 8" descr="grading_flow.png"/>
+          <p:cNvPicPr>
+            <a:picLocks noChangeAspect="1"/>
+          </p:cNvPicPr>
+          <p:nvPr/>
+        </p:nvPicPr>
+        <p:blipFill>
+          <a:blip r:embed="rId2"/>
+          <a:stretch>
+            <a:fillRect/>
+          </a:stretch>
+        </p:blipFill>
+        <p:spPr>
+          <a:xfrm>
+            <a:off x="2391020" y="3566160"/>
+            <a:ext cx="7409655" cy="2697480"/>
+          </a:xfrm>
+          <a:prstGeom prst="rect">
+            <a:avLst/>
+          </a:prstGeom>
+        </p:spPr>
+      </p:pic>
     </p:spTree>
   </p:cSld>
   <p:clrMapOvr>
